--- a/slides/LAB10_Monitoring_Status_Bukti_Live.pptx
+++ b/slides/LAB10_Monitoring_Status_Bukti_Live.pptx
@@ -16,6 +16,7 @@
     <p:sldId id="293" r:id="rId7"/>
     <p:sldId id="294" r:id="rId8"/>
     <p:sldId id="295" r:id="rId9"/>
+    <p:sldId id="300" r:id="rId19"/>
     <p:sldId id="296" r:id="rId10"/>
     <p:sldId id="297" r:id="rId11"/>
     <p:sldId id="298" r:id="rId12"/>
@@ -1810,6 +1811,10 @@
             <a:prstDash val="solid"/>
           </a:ln>
         </p:spPr>
+        <p:txBody>
+          <a:bodyPr/>
+          <a:p/>
+        </p:txBody>
       </p:sp>
       <p:sp>
         <p:nvSpPr>
@@ -2111,6 +2116,10 @@
             <a:prstDash val="solid"/>
           </a:ln>
         </p:spPr>
+        <p:txBody>
+          <a:bodyPr/>
+          <a:p/>
+        </p:txBody>
       </p:sp>
       <p:pic>
         <p:nvPicPr>
@@ -2190,6 +2199,10 @@
             <a:prstDash val="solid"/>
           </a:ln>
         </p:spPr>
+        <p:txBody>
+          <a:bodyPr/>
+          <a:p/>
+        </p:txBody>
       </p:sp>
       <p:sp>
         <p:nvSpPr>
@@ -2231,7 +2244,7 @@
                 <a:ea typeface="Calibri"/>
                 <a:cs typeface="Calibri"/>
               </a:rPr>
-              <a:t>5 | Baca structured log tanpa secret</a:t>
+              <a:t>4 | Kunci challenge SLI, SLO, p95</a:t>
             </a:r>
             <a:endParaRPr sz="2200"/>
           </a:p>
@@ -2277,7 +2290,7 @@
                 <a:ea typeface="Calibri"/>
                 <a:cs typeface="Calibri"/>
               </a:rPr>
-              <a:t>Route Handler Lab 08 menulis metadata request JSON</a:t>
+              <a:t>Baca report.py; hitung dari data yang benar</a:t>
             </a:r>
             <a:endParaRPr sz="1200"/>
           </a:p>
@@ -2315,6 +2328,10 @@
             <a:prstDash val="solid"/>
           </a:ln>
         </p:spPr>
+        <p:txBody>
+          <a:bodyPr/>
+          <a:p/>
+        </p:txBody>
       </p:sp>
       <p:sp>
         <p:nvSpPr>
@@ -2348,6 +2365,10 @@
             <a:prstDash val="solid"/>
           </a:ln>
         </p:spPr>
+        <p:txBody>
+          <a:bodyPr/>
+          <a:p/>
+        </p:txBody>
       </p:sp>
       <p:sp>
         <p:nvSpPr>
@@ -2381,6 +2402,10 @@
             <a:prstDash val="solid"/>
           </a:ln>
         </p:spPr>
+        <p:txBody>
+          <a:bodyPr/>
+          <a:p/>
+        </p:txBody>
       </p:sp>
       <p:sp>
         <p:nvSpPr>
@@ -2414,6 +2439,10 @@
             <a:prstDash val="solid"/>
           </a:ln>
         </p:spPr>
+        <p:txBody>
+          <a:bodyPr/>
+          <a:p/>
+        </p:txBody>
       </p:sp>
       <p:sp>
         <p:nvSpPr>
@@ -2447,6 +2476,10 @@
             <a:prstDash val="solid"/>
           </a:ln>
         </p:spPr>
+        <p:txBody>
+          <a:bodyPr/>
+          <a:p/>
+        </p:txBody>
       </p:sp>
       <p:sp>
         <p:nvSpPr>
@@ -2488,7 +2521,7 @@
                 <a:ea typeface="Consolas"/>
                 <a:cs typeface="Consolas"/>
               </a:rPr>
-              <a:t>Reproduksi</a:t>
+              <a:t>Rumus di report.py</a:t>
             </a:r>
             <a:endParaRPr sz="900"/>
           </a:p>
@@ -2537,11 +2570,13 @@
                 <a:ea typeface="Consolas"/>
                 <a:cs typeface="Consolas"/>
               </a:rPr>
-              <a:t># Jalankan kembali npm run dev Lab 08.
-Invoke-RestMethod `
-  http://127.0.0.1:3000/api/notes
-# Lihat terminal Next.js, cari notes_proxy.
-# Cocokkan X-Request-ID dari respons.</a:t>
+              <a:t>availability = len(ok) / len(rows)
+latencies = sorted(r["latency_ms"]
+                   for r in ok)
+p95 = latencies[ceil(.95 * n) - 1]
+budget_total = len(rows) * .01
+budget_spent = len(rows) - len(ok)
+budget_left = budget_total - budget_spent</a:t>
             </a:r>
             <a:endParaRPr sz="1500">
               <a:solidFill>
@@ -2584,6 +2619,10 @@
             <a:prstDash val="solid"/>
           </a:ln>
         </p:spPr>
+        <p:txBody>
+          <a:bodyPr/>
+          <a:p/>
+        </p:txBody>
       </p:sp>
       <p:sp>
         <p:nvSpPr>
@@ -2617,6 +2656,10 @@
             <a:prstDash val="solid"/>
           </a:ln>
         </p:spPr>
+        <p:txBody>
+          <a:bodyPr/>
+          <a:p/>
+        </p:txBody>
       </p:sp>
       <p:sp>
         <p:nvSpPr>
@@ -2650,6 +2693,10 @@
             <a:prstDash val="solid"/>
           </a:ln>
         </p:spPr>
+        <p:txBody>
+          <a:bodyPr/>
+          <a:p/>
+        </p:txBody>
       </p:sp>
       <p:sp>
         <p:nvSpPr>
@@ -2683,6 +2730,10 @@
             <a:prstDash val="solid"/>
           </a:ln>
         </p:spPr>
+        <p:txBody>
+          <a:bodyPr/>
+          <a:p/>
+        </p:txBody>
       </p:sp>
       <p:sp>
         <p:nvSpPr>
@@ -2716,6 +2767,10 @@
             <a:prstDash val="solid"/>
           </a:ln>
         </p:spPr>
+        <p:txBody>
+          <a:bodyPr/>
+          <a:p/>
+        </p:txBody>
       </p:sp>
       <p:sp>
         <p:nvSpPr>
@@ -2757,7 +2812,7 @@
                 <a:ea typeface="Consolas"/>
                 <a:cs typeface="Consolas"/>
               </a:rPr>
-              <a:t>Batas data di logger</a:t>
+              <a:t>Interpretasi</a:t>
             </a:r>
             <a:endParaRPr sz="900"/>
           </a:p>
@@ -2806,12 +2861,12 @@
                 <a:ea typeface="Consolas"/>
                 <a:cs typeface="Consolas"/>
               </a:rPr>
-              <a:t>timestamp, level, event, requestId,
-status, durationMs dapat dicari.
-Tidak perlu log isi catatan/token.
-Metrics = angka agregat.
-Logs = peristiwa dengan konteks.
-Traces = alur satu request lintas service.</a:t>
+              <a:t>Availability menghitung sukses/all.
+p95 hanya respons sukses.
+Nearest-rank memilih posisi 95%.
+SLO 99% adalah target, bukan hasil.
+Budget berlaku pada periode terdefinisi.
+Lima sampel tidak cukup untuk SLA nyata.</a:t>
             </a:r>
             <a:endParaRPr sz="1600">
               <a:solidFill>
@@ -2825,7 +2880,7 @@
     </p:spTree>
     <p:extLst>
       <p:ext uri="{BB962C8B-B14F-4D97-AF65-F5344CB8AC3E}">
-        <p14:creationId xmlns:p14="http://schemas.microsoft.com/office/powerpoint/2010/main" val="3696213950"/>
+        <p14:creationId xmlns:p14="http://schemas.microsoft.com/office/powerpoint/2010/main" val="2715567140"/>
       </p:ext>
     </p:extLst>
   </p:cSld>
@@ -2865,7 +2920,7 @@
           <p:cNvPr id="2" name="Text 0">
             <a:extLst>
               <a:ext uri="{FF2B5EF4-FFF2-40B4-BE49-F238E27FC236}">
-                <a16:creationId xmlns:a16="http://schemas.microsoft.com/office/drawing/2014/main" id="{09AB9A9A-0947-462E-934E-B2400BC5469D}"/>
+                <a16:creationId xmlns:a16="http://schemas.microsoft.com/office/drawing/2014/main" id="{551B2EDE-56D0-4896-9CD6-C86D14D34152}"/>
               </a:ext>
             </a:extLst>
           </p:cNvPr>
@@ -2911,7 +2966,7 @@
           <p:cNvPr id="3" name="Text 1">
             <a:extLst>
               <a:ext uri="{FF2B5EF4-FFF2-40B4-BE49-F238E27FC236}">
-                <a16:creationId xmlns:a16="http://schemas.microsoft.com/office/drawing/2014/main" id="{5D4F55D9-27D4-46C6-8E07-7E01E2F5FE75}"/>
+                <a16:creationId xmlns:a16="http://schemas.microsoft.com/office/drawing/2014/main" id="{85CFE9F8-72DD-4CCB-85CF-7C658CE0B028}"/>
               </a:ext>
             </a:extLst>
           </p:cNvPr>
@@ -2957,7 +3012,7 @@
           <p:cNvPr id="4" name="Shape 2">
             <a:extLst>
               <a:ext uri="{FF2B5EF4-FFF2-40B4-BE49-F238E27FC236}">
-                <a16:creationId xmlns:a16="http://schemas.microsoft.com/office/drawing/2014/main" id="{7C05EB8C-1AB1-4E56-84FE-958525890D5F}"/>
+                <a16:creationId xmlns:a16="http://schemas.microsoft.com/office/drawing/2014/main" id="{755E14C0-7D13-4B50-A92E-306CDCC99592}"/>
               </a:ext>
             </a:extLst>
           </p:cNvPr>
@@ -2984,10 +3039,14 @@
             <a:prstDash val="solid"/>
           </a:ln>
         </p:spPr>
+        <p:txBody>
+          <a:bodyPr/>
+          <a:p/>
+        </p:txBody>
       </p:sp>
       <p:pic>
         <p:nvPicPr>
-          <p:cNvPr id="43" name="Image 0"/>
+          <p:cNvPr id="29" name="Image 0"/>
           <p:cNvPicPr>
             <a:picLocks noChangeAspect="1"/>
           </p:cNvPicPr>
@@ -3011,7 +3070,7 @@
       </p:pic>
       <p:pic>
         <p:nvPicPr>
-          <p:cNvPr id="44" name="Image 1"/>
+          <p:cNvPr id="30" name="Image 1"/>
           <p:cNvPicPr>
             <a:picLocks noChangeAspect="1"/>
           </p:cNvPicPr>
@@ -3038,7 +3097,7 @@
           <p:cNvPr id="7" name="Shape 3">
             <a:extLst>
               <a:ext uri="{FF2B5EF4-FFF2-40B4-BE49-F238E27FC236}">
-                <a16:creationId xmlns:a16="http://schemas.microsoft.com/office/drawing/2014/main" id="{A1F127FB-81B4-41A8-9C45-AA7F15155A0B}"/>
+                <a16:creationId xmlns:a16="http://schemas.microsoft.com/office/drawing/2014/main" id="{E404997F-173C-4E22-A72E-8CFB412D7706}"/>
               </a:ext>
             </a:extLst>
           </p:cNvPr>
@@ -3063,13 +3122,17 @@
             <a:prstDash val="solid"/>
           </a:ln>
         </p:spPr>
+        <p:txBody>
+          <a:bodyPr/>
+          <a:p/>
+        </p:txBody>
       </p:sp>
       <p:sp>
         <p:nvSpPr>
           <p:cNvPr id="8" name="Text 4">
             <a:extLst>
               <a:ext uri="{FF2B5EF4-FFF2-40B4-BE49-F238E27FC236}">
-                <a16:creationId xmlns:a16="http://schemas.microsoft.com/office/drawing/2014/main" id="{F3EF31C9-BAC9-43A5-9588-35F774ADA48D}"/>
+                <a16:creationId xmlns:a16="http://schemas.microsoft.com/office/drawing/2014/main" id="{6CF796B5-56F1-4890-B330-5869D287A6B5}"/>
               </a:ext>
             </a:extLst>
           </p:cNvPr>
@@ -3104,7 +3167,7 @@
                 <a:ea typeface="Calibri"/>
                 <a:cs typeface="Calibri"/>
               </a:rPr>
-              <a:t>Bukti 4 | Log JSON yang dapat dicari</a:t>
+              <a:t>5 | Baca structured log tanpa secret</a:t>
             </a:r>
             <a:endParaRPr sz="2200"/>
           </a:p>
@@ -3115,7 +3178,7 @@
           <p:cNvPr id="9" name="Text 5">
             <a:extLst>
               <a:ext uri="{FF2B5EF4-FFF2-40B4-BE49-F238E27FC236}">
-                <a16:creationId xmlns:a16="http://schemas.microsoft.com/office/drawing/2014/main" id="{3ED02C09-C53D-4B52-BD4C-71B1FEDDAD1D}"/>
+                <a16:creationId xmlns:a16="http://schemas.microsoft.com/office/drawing/2014/main" id="{12F1C4EB-98E2-4DC3-9D82-FB87203F7327}"/>
               </a:ext>
             </a:extLst>
           </p:cNvPr>
@@ -3150,7 +3213,7 @@
                 <a:ea typeface="Calibri"/>
                 <a:cs typeface="Calibri"/>
               </a:rPr>
-              <a:t>Satu request Next.js menuju API Lab 06</a:t>
+              <a:t>Route Handler Lab 08 menulis metadata request JSON</a:t>
             </a:r>
             <a:endParaRPr sz="1200"/>
           </a:p>
@@ -3161,7 +3224,7 @@
           <p:cNvPr id="10" name="Shape 6">
             <a:extLst>
               <a:ext uri="{FF2B5EF4-FFF2-40B4-BE49-F238E27FC236}">
-                <a16:creationId xmlns:a16="http://schemas.microsoft.com/office/drawing/2014/main" id="{4511F3F0-6A98-41EF-8649-E696F4C9BFF2}"/>
+                <a16:creationId xmlns:a16="http://schemas.microsoft.com/office/drawing/2014/main" id="{DF8CC7F4-ED35-4A04-8415-70ACD2C0A81E}"/>
               </a:ext>
             </a:extLst>
           </p:cNvPr>
@@ -3179,755 +3242,186 @@
             <a:avLst/>
           </a:prstGeom>
           <a:solidFill>
-            <a:srgbClr val="F8FAFC"/>
+            <a:srgbClr val="1E293B"/>
           </a:solidFill>
           <a:ln w="12700">
             <a:solidFill>
-              <a:srgbClr val="E2E8F0"/>
+              <a:srgbClr val="0F172A"/>
             </a:solidFill>
             <a:prstDash val="solid"/>
           </a:ln>
         </p:spPr>
-      </p:sp>
-      <p:sp>
-        <p:nvSpPr>
-          <p:cNvPr id="11" name="Text 7">
-            <a:extLst>
-              <a:ext uri="{FF2B5EF4-FFF2-40B4-BE49-F238E27FC236}">
-                <a16:creationId xmlns:a16="http://schemas.microsoft.com/office/drawing/2014/main" id="{B0515DAC-679C-41E5-BEF3-470237094B6D}"/>
-              </a:ext>
-            </a:extLst>
-          </p:cNvPr>
-          <p:cNvSpPr>
-            <a:spLocks noGrp="1"/>
-          </p:cNvSpPr>
-          <p:nvPr/>
-        </p:nvSpPr>
-        <p:spPr>
-          <a:xfrm>
-            <a:off x="685800" y="1600200"/>
-            <a:ext cx="5120640" cy="822960"/>
-          </a:xfrm>
-          <a:prstGeom prst="rect">
-            <a:avLst/>
-          </a:prstGeom>
-          <a:noFill/>
-        </p:spPr>
-        <p:txBody>
-          <a:bodyPr wrap="square" lIns="0" tIns="0" rIns="0" bIns="0" anchor="ctr"/>
-          <a:lstStyle/>
-          <a:p>
-            <a:pPr marL="0" indent="0">
-              <a:buNone/>
-            </a:pPr>
-            <a:r>
-              <a:rPr lang="en-US" sz="1100" b="1" spc="300">
-                <a:solidFill>
-                  <a:srgbClr val="F37021"/>
-                </a:solidFill>
-                <a:latin typeface="Calibri"/>
-                <a:ea typeface="Calibri"/>
-                <a:cs typeface="Calibri"/>
-              </a:rPr>
-              <a:t>PERINTAH, FUNGSI, DAN HASIL</a:t>
-            </a:r>
-            <a:endParaRPr sz="1100"/>
-          </a:p>
-        </p:txBody>
-      </p:sp>
-      <p:pic>
-        <p:nvPicPr>
-          <p:cNvPr id="50" name="Image 2"/>
-          <p:cNvPicPr>
-            <a:picLocks noChangeAspect="1"/>
-          </p:cNvPicPr>
-          <p:nvPr/>
-        </p:nvPicPr>
-        <p:blipFill>
-          <a:blip r:embed="rId5"/>
-          <a:stretch>
-            <a:fillRect/>
-          </a:stretch>
-        </p:blipFill>
-        <p:spPr>
-          <a:xfrm>
-            <a:off x="777240" y="2697480"/>
-            <a:ext cx="292608" cy="292608"/>
-          </a:xfrm>
-          <a:prstGeom prst="rect">
-            <a:avLst/>
-          </a:prstGeom>
-        </p:spPr>
-      </p:pic>
-      <p:sp>
-        <p:nvSpPr>
-          <p:cNvPr id="13" name="Text 8">
-            <a:extLst>
-              <a:ext uri="{FF2B5EF4-FFF2-40B4-BE49-F238E27FC236}">
-                <a16:creationId xmlns:a16="http://schemas.microsoft.com/office/drawing/2014/main" id="{7777633E-25E8-473B-85D1-A2CCDB704DE5}"/>
-              </a:ext>
-            </a:extLst>
-          </p:cNvPr>
-          <p:cNvSpPr>
-            <a:spLocks noGrp="1"/>
-          </p:cNvSpPr>
-          <p:nvPr/>
-        </p:nvSpPr>
-        <p:spPr>
-          <a:xfrm>
-            <a:off x="1207008" y="2606040"/>
-            <a:ext cx="4709160" cy="457200"/>
-          </a:xfrm>
-          <a:prstGeom prst="rect">
-            <a:avLst/>
-          </a:prstGeom>
-          <a:noFill/>
-        </p:spPr>
-        <p:txBody>
-          <a:bodyPr wrap="square" lIns="0" tIns="0" rIns="0" bIns="0" anchor="ctr"/>
-          <a:lstStyle/>
-          <a:p>
-            <a:pPr marL="0" indent="0">
-              <a:buNone/>
-            </a:pPr>
-            <a:r>
-              <a:rPr lang="en-US" sz="1400">
-                <a:solidFill>
-                  <a:srgbClr val="312124"/>
-                </a:solidFill>
-                <a:latin typeface="Aptos" panose="020B0004020202020204" pitchFamily="34" charset="0"/>
-                <a:ea typeface="Calibri"/>
-                <a:cs typeface="Calibri"/>
-              </a:rPr>
-              <a:t>event notes_proxy berasal dari route.ts.</a:t>
-            </a:r>
-            <a:endParaRPr sz="1400">
-              <a:solidFill>
-                <a:srgbClr val="312124"/>
-              </a:solidFill>
-              <a:latin typeface="Aptos" panose="020B0004020202020204" pitchFamily="34" charset="0"/>
-            </a:endParaRPr>
-          </a:p>
-        </p:txBody>
-      </p:sp>
-      <p:pic>
-        <p:nvPicPr>
-          <p:cNvPr id="52" name="Image 3"/>
-          <p:cNvPicPr>
-            <a:picLocks noChangeAspect="1"/>
-          </p:cNvPicPr>
-          <p:nvPr/>
-        </p:nvPicPr>
-        <p:blipFill>
-          <a:blip r:embed="rId6"/>
-          <a:stretch>
-            <a:fillRect/>
-          </a:stretch>
-        </p:blipFill>
-        <p:spPr>
-          <a:xfrm>
-            <a:off x="777240" y="3200400"/>
-            <a:ext cx="292608" cy="292608"/>
-          </a:xfrm>
-          <a:prstGeom prst="rect">
-            <a:avLst/>
-          </a:prstGeom>
-        </p:spPr>
-      </p:pic>
-      <p:sp>
-        <p:nvSpPr>
-          <p:cNvPr id="15" name="Text 9">
-            <a:extLst>
-              <a:ext uri="{FF2B5EF4-FFF2-40B4-BE49-F238E27FC236}">
-                <a16:creationId xmlns:a16="http://schemas.microsoft.com/office/drawing/2014/main" id="{F45398AE-0FB6-42F9-BADC-B4E51CAC94BD}"/>
-              </a:ext>
-            </a:extLst>
-          </p:cNvPr>
-          <p:cNvSpPr>
-            <a:spLocks noGrp="1"/>
-          </p:cNvSpPr>
-          <p:nvPr/>
-        </p:nvSpPr>
-        <p:spPr>
-          <a:xfrm>
-            <a:off x="1207008" y="3108960"/>
-            <a:ext cx="4709160" cy="457200"/>
-          </a:xfrm>
-          <a:prstGeom prst="rect">
-            <a:avLst/>
-          </a:prstGeom>
-          <a:noFill/>
-        </p:spPr>
-        <p:txBody>
-          <a:bodyPr wrap="square" lIns="0" tIns="0" rIns="0" bIns="0" anchor="ctr"/>
-          <a:lstStyle/>
-          <a:p>
-            <a:pPr marL="0" indent="0">
-              <a:buNone/>
-            </a:pPr>
-            <a:r>
-              <a:rPr lang="en-US" sz="1400">
-                <a:solidFill>
-                  <a:srgbClr val="312124"/>
-                </a:solidFill>
-                <a:latin typeface="Aptos" panose="020B0004020202020204" pitchFamily="34" charset="0"/>
-                <a:ea typeface="Calibri"/>
-                <a:cs typeface="Calibri"/>
-              </a:rPr>
-              <a:t>requestId menghubungkan respons/log.</a:t>
-            </a:r>
-            <a:endParaRPr sz="1400">
-              <a:solidFill>
-                <a:srgbClr val="312124"/>
-              </a:solidFill>
-              <a:latin typeface="Aptos" panose="020B0004020202020204" pitchFamily="34" charset="0"/>
-            </a:endParaRPr>
-          </a:p>
-        </p:txBody>
-      </p:sp>
-      <p:pic>
-        <p:nvPicPr>
-          <p:cNvPr id="54" name="Image 4"/>
-          <p:cNvPicPr>
-            <a:picLocks noChangeAspect="1"/>
-          </p:cNvPicPr>
-          <p:nvPr/>
-        </p:nvPicPr>
-        <p:blipFill>
-          <a:blip r:embed="rId7"/>
-          <a:stretch>
-            <a:fillRect/>
-          </a:stretch>
-        </p:blipFill>
-        <p:spPr>
-          <a:xfrm>
-            <a:off x="777240" y="3703320"/>
-            <a:ext cx="292608" cy="292608"/>
-          </a:xfrm>
-          <a:prstGeom prst="rect">
-            <a:avLst/>
-          </a:prstGeom>
-        </p:spPr>
-      </p:pic>
-      <p:sp>
-        <p:nvSpPr>
-          <p:cNvPr id="17" name="Text 10">
-            <a:extLst>
-              <a:ext uri="{FF2B5EF4-FFF2-40B4-BE49-F238E27FC236}">
-                <a16:creationId xmlns:a16="http://schemas.microsoft.com/office/drawing/2014/main" id="{3465C8B5-2F2E-41A5-9CE8-A1140A05F92B}"/>
-              </a:ext>
-            </a:extLst>
-          </p:cNvPr>
-          <p:cNvSpPr>
-            <a:spLocks noGrp="1"/>
-          </p:cNvSpPr>
-          <p:nvPr/>
-        </p:nvSpPr>
-        <p:spPr>
-          <a:xfrm>
-            <a:off x="1207008" y="3611880"/>
-            <a:ext cx="4709160" cy="457200"/>
-          </a:xfrm>
-          <a:prstGeom prst="rect">
-            <a:avLst/>
-          </a:prstGeom>
-          <a:noFill/>
-        </p:spPr>
-        <p:txBody>
-          <a:bodyPr wrap="square" lIns="0" tIns="0" rIns="0" bIns="0" anchor="ctr"/>
-          <a:lstStyle/>
-          <a:p>
-            <a:pPr marL="0" indent="0">
-              <a:buNone/>
-            </a:pPr>
-            <a:r>
-              <a:rPr lang="en-US" sz="1400">
-                <a:solidFill>
-                  <a:srgbClr val="312124"/>
-                </a:solidFill>
-                <a:latin typeface="Aptos" panose="020B0004020202020204" pitchFamily="34" charset="0"/>
-                <a:ea typeface="Calibri"/>
-                <a:cs typeface="Calibri"/>
-              </a:rPr>
-              <a:t>status menunjukkan hasil upstream.</a:t>
-            </a:r>
-            <a:endParaRPr sz="1400">
-              <a:solidFill>
-                <a:srgbClr val="312124"/>
-              </a:solidFill>
-              <a:latin typeface="Aptos" panose="020B0004020202020204" pitchFamily="34" charset="0"/>
-            </a:endParaRPr>
-          </a:p>
-        </p:txBody>
-      </p:sp>
-      <p:pic>
-        <p:nvPicPr>
-          <p:cNvPr id="56" name="Image 5"/>
-          <p:cNvPicPr>
-            <a:picLocks noChangeAspect="1"/>
-          </p:cNvPicPr>
-          <p:nvPr/>
-        </p:nvPicPr>
-        <p:blipFill>
-          <a:blip r:embed="rId8"/>
-          <a:stretch>
-            <a:fillRect/>
-          </a:stretch>
-        </p:blipFill>
-        <p:spPr>
-          <a:xfrm>
-            <a:off x="777240" y="4206240"/>
-            <a:ext cx="292608" cy="292608"/>
-          </a:xfrm>
-          <a:prstGeom prst="rect">
-            <a:avLst/>
-          </a:prstGeom>
-        </p:spPr>
-      </p:pic>
-      <p:sp>
-        <p:nvSpPr>
-          <p:cNvPr id="19" name="Text 11">
-            <a:extLst>
-              <a:ext uri="{FF2B5EF4-FFF2-40B4-BE49-F238E27FC236}">
-                <a16:creationId xmlns:a16="http://schemas.microsoft.com/office/drawing/2014/main" id="{E3BA35A8-245C-4E42-B810-578F386C675B}"/>
-              </a:ext>
-            </a:extLst>
-          </p:cNvPr>
-          <p:cNvSpPr>
-            <a:spLocks noGrp="1"/>
-          </p:cNvSpPr>
-          <p:nvPr/>
-        </p:nvSpPr>
-        <p:spPr>
-          <a:xfrm>
-            <a:off x="1207008" y="4114800"/>
-            <a:ext cx="4709160" cy="457200"/>
-          </a:xfrm>
-          <a:prstGeom prst="rect">
-            <a:avLst/>
-          </a:prstGeom>
-          <a:noFill/>
-        </p:spPr>
-        <p:txBody>
-          <a:bodyPr wrap="square" lIns="0" tIns="0" rIns="0" bIns="0" anchor="ctr"/>
-          <a:lstStyle/>
-          <a:p>
-            <a:pPr marL="0" indent="0">
-              <a:buNone/>
-            </a:pPr>
-            <a:r>
-              <a:rPr lang="en-US" sz="1400">
-                <a:solidFill>
-                  <a:srgbClr val="312124"/>
-                </a:solidFill>
-                <a:latin typeface="Aptos" panose="020B0004020202020204" pitchFamily="34" charset="0"/>
-                <a:ea typeface="Calibri"/>
-                <a:cs typeface="Calibri"/>
-              </a:rPr>
-              <a:t>durationMs adalah waktu proxy.</a:t>
-            </a:r>
-            <a:endParaRPr sz="1400">
-              <a:solidFill>
-                <a:srgbClr val="312124"/>
-              </a:solidFill>
-              <a:latin typeface="Aptos" panose="020B0004020202020204" pitchFamily="34" charset="0"/>
-            </a:endParaRPr>
-          </a:p>
-        </p:txBody>
-      </p:sp>
-      <p:pic>
-        <p:nvPicPr>
-          <p:cNvPr id="58" name="Image 6"/>
-          <p:cNvPicPr>
-            <a:picLocks noChangeAspect="1"/>
-          </p:cNvPicPr>
-          <p:nvPr/>
-        </p:nvPicPr>
-        <p:blipFill>
-          <a:blip r:embed="rId9"/>
-          <a:stretch>
-            <a:fillRect/>
-          </a:stretch>
-        </p:blipFill>
-        <p:spPr>
-          <a:xfrm>
-            <a:off x="777240" y="4709160"/>
-            <a:ext cx="292608" cy="292608"/>
-          </a:xfrm>
-          <a:prstGeom prst="rect">
-            <a:avLst/>
-          </a:prstGeom>
-        </p:spPr>
-      </p:pic>
-      <p:sp>
-        <p:nvSpPr>
-          <p:cNvPr id="21" name="Text 12">
-            <a:extLst>
-              <a:ext uri="{FF2B5EF4-FFF2-40B4-BE49-F238E27FC236}">
-                <a16:creationId xmlns:a16="http://schemas.microsoft.com/office/drawing/2014/main" id="{AE08E845-E5A0-4491-8981-3F3026909A6E}"/>
-              </a:ext>
-            </a:extLst>
-          </p:cNvPr>
-          <p:cNvSpPr>
-            <a:spLocks noGrp="1"/>
-          </p:cNvSpPr>
-          <p:nvPr/>
-        </p:nvSpPr>
-        <p:spPr>
-          <a:xfrm>
-            <a:off x="1207008" y="4617720"/>
-            <a:ext cx="4709160" cy="457200"/>
-          </a:xfrm>
-          <a:prstGeom prst="rect">
-            <a:avLst/>
-          </a:prstGeom>
-          <a:noFill/>
-        </p:spPr>
-        <p:txBody>
-          <a:bodyPr wrap="square" lIns="0" tIns="0" rIns="0" bIns="0" anchor="ctr"/>
-          <a:lstStyle/>
-          <a:p>
-            <a:pPr marL="0" indent="0">
-              <a:buNone/>
-            </a:pPr>
-            <a:r>
-              <a:rPr lang="en-US" sz="1400">
-                <a:solidFill>
-                  <a:srgbClr val="312124"/>
-                </a:solidFill>
-                <a:latin typeface="Aptos" panose="020B0004020202020204" pitchFamily="34" charset="0"/>
-                <a:ea typeface="Calibri"/>
-                <a:cs typeface="Calibri"/>
-              </a:rPr>
-              <a:t>Tidak ada isi catatan atau token.</a:t>
-            </a:r>
-            <a:endParaRPr sz="1400">
-              <a:solidFill>
-                <a:srgbClr val="312124"/>
-              </a:solidFill>
-              <a:latin typeface="Aptos" panose="020B0004020202020204" pitchFamily="34" charset="0"/>
-            </a:endParaRPr>
-          </a:p>
-        </p:txBody>
-      </p:sp>
-      <p:pic>
-        <p:nvPicPr>
-          <p:cNvPr id="60" name="Image 7"/>
-          <p:cNvPicPr>
-            <a:picLocks noChangeAspect="1"/>
-          </p:cNvPicPr>
-          <p:nvPr/>
-        </p:nvPicPr>
-        <p:blipFill>
-          <a:blip r:embed="rId10"/>
-          <a:stretch>
-            <a:fillRect/>
-          </a:stretch>
-        </p:blipFill>
-        <p:spPr>
-          <a:xfrm>
-            <a:off x="777240" y="5212080"/>
-            <a:ext cx="292608" cy="292608"/>
-          </a:xfrm>
-          <a:prstGeom prst="rect">
-            <a:avLst/>
-          </a:prstGeom>
-        </p:spPr>
-      </p:pic>
-      <p:sp>
-        <p:nvSpPr>
-          <p:cNvPr id="23" name="Text 13">
-            <a:extLst>
-              <a:ext uri="{FF2B5EF4-FFF2-40B4-BE49-F238E27FC236}">
-                <a16:creationId xmlns:a16="http://schemas.microsoft.com/office/drawing/2014/main" id="{3AAF5F71-8C83-45DD-A1C2-6A37AE7ADA37}"/>
-              </a:ext>
-            </a:extLst>
-          </p:cNvPr>
-          <p:cNvSpPr>
-            <a:spLocks noGrp="1"/>
-          </p:cNvSpPr>
-          <p:nvPr/>
-        </p:nvSpPr>
-        <p:spPr>
-          <a:xfrm>
-            <a:off x="1207008" y="5120640"/>
-            <a:ext cx="4709160" cy="457200"/>
-          </a:xfrm>
-          <a:prstGeom prst="rect">
-            <a:avLst/>
-          </a:prstGeom>
-          <a:noFill/>
-        </p:spPr>
-        <p:txBody>
-          <a:bodyPr wrap="square" lIns="0" tIns="0" rIns="0" bIns="0" anchor="ctr"/>
-          <a:lstStyle/>
-          <a:p>
-            <a:pPr marL="0" indent="0">
-              <a:buNone/>
-            </a:pPr>
-            <a:r>
-              <a:rPr lang="en-US" sz="1400">
-                <a:solidFill>
-                  <a:srgbClr val="312124"/>
-                </a:solidFill>
-                <a:latin typeface="Aptos" panose="020B0004020202020204" pitchFamily="34" charset="0"/>
-                <a:ea typeface="Calibri"/>
-                <a:cs typeface="Calibri"/>
-              </a:rPr>
-              <a:t>Log server tidak sama dengan UI browser.</a:t>
-            </a:r>
-            <a:endParaRPr sz="1400">
-              <a:solidFill>
-                <a:srgbClr val="312124"/>
-              </a:solidFill>
-              <a:latin typeface="Aptos" panose="020B0004020202020204" pitchFamily="34" charset="0"/>
-            </a:endParaRPr>
-          </a:p>
-        </p:txBody>
-      </p:sp>
-      <p:pic>
-        <p:nvPicPr>
-          <p:cNvPr id="62" name="Image 8"/>
-          <p:cNvPicPr>
-            <a:picLocks noChangeAspect="1"/>
-          </p:cNvPicPr>
-          <p:nvPr/>
-        </p:nvPicPr>
-        <p:blipFill>
-          <a:blip r:embed="rId11"/>
-          <a:stretch>
-            <a:fillRect/>
-          </a:stretch>
-        </p:blipFill>
-        <p:spPr>
-          <a:xfrm>
-            <a:off x="777240" y="5715000"/>
-            <a:ext cx="292608" cy="292608"/>
-          </a:xfrm>
-          <a:prstGeom prst="rect">
-            <a:avLst/>
-          </a:prstGeom>
-        </p:spPr>
-      </p:pic>
-      <p:sp>
-        <p:nvSpPr>
-          <p:cNvPr id="25" name="Text 14">
-            <a:extLst>
-              <a:ext uri="{FF2B5EF4-FFF2-40B4-BE49-F238E27FC236}">
-                <a16:creationId xmlns:a16="http://schemas.microsoft.com/office/drawing/2014/main" id="{C7CDA5B9-11CE-4C44-977A-C028B4EEF951}"/>
-              </a:ext>
-            </a:extLst>
-          </p:cNvPr>
-          <p:cNvSpPr>
-            <a:spLocks noGrp="1"/>
-          </p:cNvSpPr>
-          <p:nvPr/>
-        </p:nvSpPr>
-        <p:spPr>
-          <a:xfrm>
-            <a:off x="1207008" y="5623560"/>
-            <a:ext cx="4709160" cy="457200"/>
-          </a:xfrm>
-          <a:prstGeom prst="rect">
-            <a:avLst/>
-          </a:prstGeom>
-          <a:noFill/>
-        </p:spPr>
-        <p:txBody>
-          <a:bodyPr wrap="square" lIns="0" tIns="0" rIns="0" bIns="0" anchor="ctr"/>
-          <a:lstStyle/>
-          <a:p>
-            <a:pPr marL="0" indent="0">
-              <a:buNone/>
-            </a:pPr>
-            <a:r>
-              <a:rPr lang="en-US" sz="1400">
-                <a:solidFill>
-                  <a:srgbClr val="312124"/>
-                </a:solidFill>
-                <a:latin typeface="Aptos" panose="020B0004020202020204" pitchFamily="34" charset="0"/>
-                <a:ea typeface="Calibri"/>
-                <a:cs typeface="Calibri"/>
-              </a:rPr>
-              <a:t>Gunakan ID untuk troubleshooting.</a:t>
-            </a:r>
-            <a:endParaRPr sz="1400">
-              <a:solidFill>
-                <a:srgbClr val="312124"/>
-              </a:solidFill>
-              <a:latin typeface="Aptos" panose="020B0004020202020204" pitchFamily="34" charset="0"/>
-            </a:endParaRPr>
-          </a:p>
-        </p:txBody>
-      </p:sp>
-      <p:sp>
-        <p:nvSpPr>
-          <p:cNvPr id="26" name="Shape 15">
-            <a:extLst>
-              <a:ext uri="{FF2B5EF4-FFF2-40B4-BE49-F238E27FC236}">
-                <a16:creationId xmlns:a16="http://schemas.microsoft.com/office/drawing/2014/main" id="{700288CD-FD9B-460A-854F-55CBD9ABDC2C}"/>
-              </a:ext>
-            </a:extLst>
-          </p:cNvPr>
-          <p:cNvSpPr>
-            <a:spLocks noGrp="1"/>
-          </p:cNvSpPr>
-          <p:nvPr/>
-        </p:nvSpPr>
-        <p:spPr>
-          <a:xfrm>
-            <a:off x="6217920" y="1417320"/>
-            <a:ext cx="5486400" cy="4754880"/>
+        <p:txBody>
+          <a:bodyPr/>
+          <a:p/>
+        </p:txBody>
+      </p:sp>
+      <p:sp>
+        <p:nvSpPr>
+          <p:cNvPr id="11" name="Shape 7">
+            <a:extLst>
+              <a:ext uri="{FF2B5EF4-FFF2-40B4-BE49-F238E27FC236}">
+                <a16:creationId xmlns:a16="http://schemas.microsoft.com/office/drawing/2014/main" id="{B411C01C-0CB8-4154-B3A8-6D74E1D55C0A}"/>
+              </a:ext>
+            </a:extLst>
+          </p:cNvPr>
+          <p:cNvSpPr>
+            <a:spLocks noGrp="1"/>
+          </p:cNvSpPr>
+          <p:nvPr/>
+        </p:nvSpPr>
+        <p:spPr>
+          <a:xfrm>
+            <a:off x="457200" y="1417320"/>
+            <a:ext cx="5577840" cy="274320"/>
           </a:xfrm>
           <a:prstGeom prst="rect">
             <a:avLst/>
           </a:prstGeom>
           <a:solidFill>
-            <a:srgbClr val="002677"/>
+            <a:srgbClr val="0F172A"/>
           </a:solidFill>
           <a:ln w="12700">
             <a:solidFill>
-              <a:srgbClr val="002677"/>
+              <a:srgbClr val="0F172A"/>
             </a:solidFill>
             <a:prstDash val="solid"/>
           </a:ln>
         </p:spPr>
-      </p:sp>
-      <p:sp>
-        <p:nvSpPr>
-          <p:cNvPr id="27" name="Text 16">
-            <a:extLst>
-              <a:ext uri="{FF2B5EF4-FFF2-40B4-BE49-F238E27FC236}">
-                <a16:creationId xmlns:a16="http://schemas.microsoft.com/office/drawing/2014/main" id="{CB3350F3-3296-426D-863F-177ECABD3178}"/>
-              </a:ext>
-            </a:extLst>
-          </p:cNvPr>
-          <p:cNvSpPr>
-            <a:spLocks noGrp="1"/>
-          </p:cNvSpPr>
-          <p:nvPr/>
-        </p:nvSpPr>
-        <p:spPr>
-          <a:xfrm>
-            <a:off x="6446520" y="1600200"/>
-            <a:ext cx="5120640" cy="822960"/>
-          </a:xfrm>
-          <a:prstGeom prst="rect">
-            <a:avLst/>
-          </a:prstGeom>
-          <a:noFill/>
-        </p:spPr>
-        <p:txBody>
-          <a:bodyPr wrap="square" lIns="0" tIns="0" rIns="0" bIns="0" anchor="ctr"/>
-          <a:lstStyle/>
-          <a:p>
-            <a:pPr marL="0" indent="0">
-              <a:buNone/>
-            </a:pPr>
-            <a:r>
-              <a:rPr lang="en-US" sz="1100" b="1" spc="300">
-                <a:solidFill>
-                  <a:srgbClr val="F37021"/>
-                </a:solidFill>
-                <a:latin typeface="Calibri"/>
-                <a:ea typeface="Calibri"/>
-                <a:cs typeface="Calibri"/>
-              </a:rPr>
-              <a:t>BUKTI PADA MESIN UJI</a:t>
-            </a:r>
-            <a:endParaRPr sz="1100"/>
-          </a:p>
-        </p:txBody>
-      </p:sp>
-      <p:sp>
-        <p:nvSpPr>
-          <p:cNvPr id="28" name="Text 17">
-            <a:extLst>
-              <a:ext uri="{FF2B5EF4-FFF2-40B4-BE49-F238E27FC236}">
-                <a16:creationId xmlns:a16="http://schemas.microsoft.com/office/drawing/2014/main" id="{A18E4DFD-E12D-4609-A35A-914A51AE19D2}"/>
-              </a:ext>
-            </a:extLst>
-          </p:cNvPr>
-          <p:cNvSpPr>
-            <a:spLocks noGrp="1"/>
-          </p:cNvSpPr>
-          <p:nvPr/>
-        </p:nvSpPr>
-        <p:spPr>
-          <a:xfrm>
-            <a:off x="6446520" y="2606040"/>
-            <a:ext cx="5029200" cy="2743200"/>
-          </a:xfrm>
-          <a:prstGeom prst="rect">
-            <a:avLst/>
-          </a:prstGeom>
-          <a:noFill/>
-        </p:spPr>
-        <p:txBody>
-          <a:bodyPr wrap="square" anchor="ctr"/>
-          <a:lstStyle/>
-          <a:p>
-            <a:pPr marL="0" indent="0">
-              <a:spcAft>
-                <a:spcPts val="600"/>
-              </a:spcAft>
-              <a:buNone/>
-            </a:pPr>
-            <a:endParaRPr sz="1200"/>
-          </a:p>
-        </p:txBody>
-      </p:sp>
-      <p:sp>
-        <p:nvSpPr>
-          <p:cNvPr id="29" name="Shape 18">
-            <a:extLst>
-              <a:ext uri="{FF2B5EF4-FFF2-40B4-BE49-F238E27FC236}">
-                <a16:creationId xmlns:a16="http://schemas.microsoft.com/office/drawing/2014/main" id="{F0706024-38A2-416F-B205-77840F63871B}"/>
-              </a:ext>
-            </a:extLst>
-          </p:cNvPr>
-          <p:cNvSpPr>
-            <a:spLocks noGrp="1"/>
-          </p:cNvSpPr>
-          <p:nvPr/>
-        </p:nvSpPr>
-        <p:spPr>
-          <a:xfrm>
-            <a:off x="6446520" y="5349240"/>
-            <a:ext cx="5029200" cy="731520"/>
-          </a:xfrm>
-          <a:prstGeom prst="rect">
+        <p:txBody>
+          <a:bodyPr/>
+          <a:p/>
+        </p:txBody>
+      </p:sp>
+      <p:sp>
+        <p:nvSpPr>
+          <p:cNvPr id="12" name="Shape 8">
+            <a:extLst>
+              <a:ext uri="{FF2B5EF4-FFF2-40B4-BE49-F238E27FC236}">
+                <a16:creationId xmlns:a16="http://schemas.microsoft.com/office/drawing/2014/main" id="{462527B0-2FD1-4F8F-9486-ECDEEC6C79F1}"/>
+              </a:ext>
+            </a:extLst>
+          </p:cNvPr>
+          <p:cNvSpPr>
+            <a:spLocks noGrp="1"/>
+          </p:cNvSpPr>
+          <p:nvPr/>
+        </p:nvSpPr>
+        <p:spPr>
+          <a:xfrm>
+            <a:off x="548640" y="1499616"/>
+            <a:ext cx="109728" cy="109728"/>
+          </a:xfrm>
+          <a:prstGeom prst="ellipse">
             <a:avLst/>
           </a:prstGeom>
           <a:solidFill>
-            <a:srgbClr val="F37021"/>
+            <a:srgbClr val="EF4444"/>
           </a:solidFill>
           <a:ln w="12700">
             <a:solidFill>
-              <a:srgbClr val="F37021"/>
+              <a:srgbClr val="EF4444"/>
             </a:solidFill>
             <a:prstDash val="solid"/>
           </a:ln>
         </p:spPr>
-      </p:sp>
-      <p:sp>
-        <p:nvSpPr>
-          <p:cNvPr id="30" name="Text 19">
-            <a:extLst>
-              <a:ext uri="{FF2B5EF4-FFF2-40B4-BE49-F238E27FC236}">
-                <a16:creationId xmlns:a16="http://schemas.microsoft.com/office/drawing/2014/main" id="{26BEBC0A-D3A9-485A-A70F-650A3A86343C}"/>
-              </a:ext>
-            </a:extLst>
-          </p:cNvPr>
-          <p:cNvSpPr>
-            <a:spLocks noGrp="1"/>
-          </p:cNvSpPr>
-          <p:nvPr/>
-        </p:nvSpPr>
-        <p:spPr>
-          <a:xfrm>
-            <a:off x="6446520" y="5349240"/>
-            <a:ext cx="5029200" cy="731520"/>
+        <p:txBody>
+          <a:bodyPr/>
+          <a:p/>
+        </p:txBody>
+      </p:sp>
+      <p:sp>
+        <p:nvSpPr>
+          <p:cNvPr id="13" name="Shape 9">
+            <a:extLst>
+              <a:ext uri="{FF2B5EF4-FFF2-40B4-BE49-F238E27FC236}">
+                <a16:creationId xmlns:a16="http://schemas.microsoft.com/office/drawing/2014/main" id="{DCEA9217-0B7B-4F3D-8F5E-9245E634D2B6}"/>
+              </a:ext>
+            </a:extLst>
+          </p:cNvPr>
+          <p:cNvSpPr>
+            <a:spLocks noGrp="1"/>
+          </p:cNvSpPr>
+          <p:nvPr/>
+        </p:nvSpPr>
+        <p:spPr>
+          <a:xfrm>
+            <a:off x="685800" y="1499616"/>
+            <a:ext cx="109728" cy="109728"/>
+          </a:xfrm>
+          <a:prstGeom prst="ellipse">
+            <a:avLst/>
+          </a:prstGeom>
+          <a:solidFill>
+            <a:srgbClr val="F59E0B"/>
+          </a:solidFill>
+          <a:ln w="12700">
+            <a:solidFill>
+              <a:srgbClr val="F59E0B"/>
+            </a:solidFill>
+            <a:prstDash val="solid"/>
+          </a:ln>
+        </p:spPr>
+        <p:txBody>
+          <a:bodyPr/>
+          <a:p/>
+        </p:txBody>
+      </p:sp>
+      <p:sp>
+        <p:nvSpPr>
+          <p:cNvPr id="14" name="Shape 10">
+            <a:extLst>
+              <a:ext uri="{FF2B5EF4-FFF2-40B4-BE49-F238E27FC236}">
+                <a16:creationId xmlns:a16="http://schemas.microsoft.com/office/drawing/2014/main" id="{5B3A4AC1-4C38-499E-9355-B79B9659CB78}"/>
+              </a:ext>
+            </a:extLst>
+          </p:cNvPr>
+          <p:cNvSpPr>
+            <a:spLocks noGrp="1"/>
+          </p:cNvSpPr>
+          <p:nvPr/>
+        </p:nvSpPr>
+        <p:spPr>
+          <a:xfrm>
+            <a:off x="822960" y="1499616"/>
+            <a:ext cx="109728" cy="109728"/>
+          </a:xfrm>
+          <a:prstGeom prst="ellipse">
+            <a:avLst/>
+          </a:prstGeom>
+          <a:solidFill>
+            <a:srgbClr val="10B981"/>
+          </a:solidFill>
+          <a:ln w="12700">
+            <a:solidFill>
+              <a:srgbClr val="10B981"/>
+            </a:solidFill>
+            <a:prstDash val="solid"/>
+          </a:ln>
+        </p:spPr>
+        <p:txBody>
+          <a:bodyPr/>
+          <a:p/>
+        </p:txBody>
+      </p:sp>
+      <p:sp>
+        <p:nvSpPr>
+          <p:cNvPr id="15" name="Text 11">
+            <a:extLst>
+              <a:ext uri="{FF2B5EF4-FFF2-40B4-BE49-F238E27FC236}">
+                <a16:creationId xmlns:a16="http://schemas.microsoft.com/office/drawing/2014/main" id="{6EB60959-1E9D-4E31-BA36-9E6852BA16D0}"/>
+              </a:ext>
+            </a:extLst>
+          </p:cNvPr>
+          <p:cNvSpPr>
+            <a:spLocks noGrp="1"/>
+          </p:cNvSpPr>
+          <p:nvPr/>
+        </p:nvSpPr>
+        <p:spPr>
+          <a:xfrm>
+            <a:off x="1005840" y="1417320"/>
+            <a:ext cx="4846320" cy="274320"/>
           </a:xfrm>
           <a:prstGeom prst="rect">
             <a:avLst/>
@@ -3942,65 +3436,372 @@
               <a:buNone/>
             </a:pPr>
             <a:r>
-              <a:rPr lang="en-US" sz="1500" i="1">
+              <a:rPr lang="en-US" sz="900">
+                <a:solidFill>
+                  <a:srgbClr val="94A3B8"/>
+                </a:solidFill>
+                <a:latin typeface="Consolas"/>
+                <a:ea typeface="Consolas"/>
+                <a:cs typeface="Consolas"/>
+              </a:rPr>
+              <a:t>Reproduksi</a:t>
+            </a:r>
+            <a:endParaRPr sz="900"/>
+          </a:p>
+        </p:txBody>
+      </p:sp>
+      <p:sp>
+        <p:nvSpPr>
+          <p:cNvPr id="16" name="Text 12">
+            <a:extLst>
+              <a:ext uri="{FF2B5EF4-FFF2-40B4-BE49-F238E27FC236}">
+                <a16:creationId xmlns:a16="http://schemas.microsoft.com/office/drawing/2014/main" id="{BC340967-8F8A-42B0-85CE-592D55F14D89}"/>
+              </a:ext>
+            </a:extLst>
+          </p:cNvPr>
+          <p:cNvSpPr>
+            <a:spLocks noGrp="1"/>
+          </p:cNvSpPr>
+          <p:nvPr/>
+        </p:nvSpPr>
+        <p:spPr>
+          <a:xfrm>
+            <a:off x="594360" y="1783080"/>
+            <a:ext cx="5303520" cy="4297680"/>
+          </a:xfrm>
+          <a:prstGeom prst="rect">
+            <a:avLst/>
+          </a:prstGeom>
+          <a:noFill/>
+        </p:spPr>
+        <p:txBody>
+          <a:bodyPr wrap="square" lIns="0" tIns="0" rIns="0" bIns="0" anchor="t"/>
+          <a:lstStyle/>
+          <a:p>
+            <a:pPr marL="0" indent="0">
+              <a:spcAft>
+                <a:spcPts val="200"/>
+              </a:spcAft>
+              <a:buNone/>
+            </a:pPr>
+            <a:r>
+              <a:rPr lang="en-US" sz="1500">
                 <a:solidFill>
                   <a:srgbClr val="FFFFFF"/>
                 </a:solidFill>
-                <a:latin typeface="Aptos" panose="020B0004020202020204" pitchFamily="34" charset="0"/>
-                <a:ea typeface="Calibri"/>
-                <a:cs typeface="Calibri"/>
+                <a:latin typeface="Consolas" panose="020B0609020204030204" pitchFamily="49" charset="0"/>
+                <a:ea typeface="Consolas"/>
+                <a:cs typeface="Consolas"/>
               </a:rPr>
-              <a:t>Satu baris JSON menjelaskan request tanpa secret.</a:t>
+              <a:t># Jalankan kembali npm run dev Lab 08.
+Invoke-RestMethod `
+  http://127.0.0.1:3000/api/notes
+# Lihat terminal Next.js, cari notes_proxy.
+# Cocokkan X-Request-ID dari respons.</a:t>
             </a:r>
             <a:endParaRPr sz="1500">
               <a:solidFill>
                 <a:srgbClr val="FFFFFF"/>
               </a:solidFill>
+              <a:latin typeface="Consolas" panose="020B0609020204030204" pitchFamily="49" charset="0"/>
+            </a:endParaRPr>
+          </a:p>
+        </p:txBody>
+      </p:sp>
+      <p:sp>
+        <p:nvSpPr>
+          <p:cNvPr id="17" name="Shape 13">
+            <a:extLst>
+              <a:ext uri="{FF2B5EF4-FFF2-40B4-BE49-F238E27FC236}">
+                <a16:creationId xmlns:a16="http://schemas.microsoft.com/office/drawing/2014/main" id="{9BC739D4-5798-4228-9B77-D0807E2088EF}"/>
+              </a:ext>
+            </a:extLst>
+          </p:cNvPr>
+          <p:cNvSpPr>
+            <a:spLocks noGrp="1"/>
+          </p:cNvSpPr>
+          <p:nvPr/>
+        </p:nvSpPr>
+        <p:spPr>
+          <a:xfrm>
+            <a:off x="6217920" y="1417320"/>
+            <a:ext cx="5486400" cy="4754880"/>
+          </a:xfrm>
+          <a:prstGeom prst="rect">
+            <a:avLst/>
+          </a:prstGeom>
+          <a:solidFill>
+            <a:srgbClr val="1E293B"/>
+          </a:solidFill>
+          <a:ln w="12700">
+            <a:solidFill>
+              <a:srgbClr val="0F172A"/>
+            </a:solidFill>
+            <a:prstDash val="solid"/>
+          </a:ln>
+        </p:spPr>
+        <p:txBody>
+          <a:bodyPr/>
+          <a:p/>
+        </p:txBody>
+      </p:sp>
+      <p:sp>
+        <p:nvSpPr>
+          <p:cNvPr id="18" name="Shape 14">
+            <a:extLst>
+              <a:ext uri="{FF2B5EF4-FFF2-40B4-BE49-F238E27FC236}">
+                <a16:creationId xmlns:a16="http://schemas.microsoft.com/office/drawing/2014/main" id="{FD9EBF0B-E8C4-4AFB-AFE7-B6CEC2B6C004}"/>
+              </a:ext>
+            </a:extLst>
+          </p:cNvPr>
+          <p:cNvSpPr>
+            <a:spLocks noGrp="1"/>
+          </p:cNvSpPr>
+          <p:nvPr/>
+        </p:nvSpPr>
+        <p:spPr>
+          <a:xfrm>
+            <a:off x="6217920" y="1417320"/>
+            <a:ext cx="5486400" cy="274320"/>
+          </a:xfrm>
+          <a:prstGeom prst="rect">
+            <a:avLst/>
+          </a:prstGeom>
+          <a:solidFill>
+            <a:srgbClr val="0F172A"/>
+          </a:solidFill>
+          <a:ln w="12700">
+            <a:solidFill>
+              <a:srgbClr val="0F172A"/>
+            </a:solidFill>
+            <a:prstDash val="solid"/>
+          </a:ln>
+        </p:spPr>
+        <p:txBody>
+          <a:bodyPr/>
+          <a:p/>
+        </p:txBody>
+      </p:sp>
+      <p:sp>
+        <p:nvSpPr>
+          <p:cNvPr id="19" name="Shape 15">
+            <a:extLst>
+              <a:ext uri="{FF2B5EF4-FFF2-40B4-BE49-F238E27FC236}">
+                <a16:creationId xmlns:a16="http://schemas.microsoft.com/office/drawing/2014/main" id="{47943E62-587A-41A0-AA91-65E9314111DC}"/>
+              </a:ext>
+            </a:extLst>
+          </p:cNvPr>
+          <p:cNvSpPr>
+            <a:spLocks noGrp="1"/>
+          </p:cNvSpPr>
+          <p:nvPr/>
+        </p:nvSpPr>
+        <p:spPr>
+          <a:xfrm>
+            <a:off x="6309360" y="1499616"/>
+            <a:ext cx="109728" cy="109728"/>
+          </a:xfrm>
+          <a:prstGeom prst="ellipse">
+            <a:avLst/>
+          </a:prstGeom>
+          <a:solidFill>
+            <a:srgbClr val="EF4444"/>
+          </a:solidFill>
+          <a:ln w="12700">
+            <a:solidFill>
+              <a:srgbClr val="EF4444"/>
+            </a:solidFill>
+            <a:prstDash val="solid"/>
+          </a:ln>
+        </p:spPr>
+        <p:txBody>
+          <a:bodyPr/>
+          <a:p/>
+        </p:txBody>
+      </p:sp>
+      <p:sp>
+        <p:nvSpPr>
+          <p:cNvPr id="20" name="Shape 16">
+            <a:extLst>
+              <a:ext uri="{FF2B5EF4-FFF2-40B4-BE49-F238E27FC236}">
+                <a16:creationId xmlns:a16="http://schemas.microsoft.com/office/drawing/2014/main" id="{F04DFE67-2A9F-48AA-8EA4-C86F7B353DB4}"/>
+              </a:ext>
+            </a:extLst>
+          </p:cNvPr>
+          <p:cNvSpPr>
+            <a:spLocks noGrp="1"/>
+          </p:cNvSpPr>
+          <p:nvPr/>
+        </p:nvSpPr>
+        <p:spPr>
+          <a:xfrm>
+            <a:off x="6446520" y="1499616"/>
+            <a:ext cx="109728" cy="109728"/>
+          </a:xfrm>
+          <a:prstGeom prst="ellipse">
+            <a:avLst/>
+          </a:prstGeom>
+          <a:solidFill>
+            <a:srgbClr val="F59E0B"/>
+          </a:solidFill>
+          <a:ln w="12700">
+            <a:solidFill>
+              <a:srgbClr val="F59E0B"/>
+            </a:solidFill>
+            <a:prstDash val="solid"/>
+          </a:ln>
+        </p:spPr>
+        <p:txBody>
+          <a:bodyPr/>
+          <a:p/>
+        </p:txBody>
+      </p:sp>
+      <p:sp>
+        <p:nvSpPr>
+          <p:cNvPr id="21" name="Shape 17">
+            <a:extLst>
+              <a:ext uri="{FF2B5EF4-FFF2-40B4-BE49-F238E27FC236}">
+                <a16:creationId xmlns:a16="http://schemas.microsoft.com/office/drawing/2014/main" id="{97180367-74D6-4455-837C-10DB48453089}"/>
+              </a:ext>
+            </a:extLst>
+          </p:cNvPr>
+          <p:cNvSpPr>
+            <a:spLocks noGrp="1"/>
+          </p:cNvSpPr>
+          <p:nvPr/>
+        </p:nvSpPr>
+        <p:spPr>
+          <a:xfrm>
+            <a:off x="6583680" y="1499616"/>
+            <a:ext cx="109728" cy="109728"/>
+          </a:xfrm>
+          <a:prstGeom prst="ellipse">
+            <a:avLst/>
+          </a:prstGeom>
+          <a:solidFill>
+            <a:srgbClr val="10B981"/>
+          </a:solidFill>
+          <a:ln w="12700">
+            <a:solidFill>
+              <a:srgbClr val="10B981"/>
+            </a:solidFill>
+            <a:prstDash val="solid"/>
+          </a:ln>
+        </p:spPr>
+        <p:txBody>
+          <a:bodyPr/>
+          <a:p/>
+        </p:txBody>
+      </p:sp>
+      <p:sp>
+        <p:nvSpPr>
+          <p:cNvPr id="22" name="Text 18">
+            <a:extLst>
+              <a:ext uri="{FF2B5EF4-FFF2-40B4-BE49-F238E27FC236}">
+                <a16:creationId xmlns:a16="http://schemas.microsoft.com/office/drawing/2014/main" id="{8A13D164-060E-41CA-8437-890A2B36EE1D}"/>
+              </a:ext>
+            </a:extLst>
+          </p:cNvPr>
+          <p:cNvSpPr>
+            <a:spLocks noGrp="1"/>
+          </p:cNvSpPr>
+          <p:nvPr/>
+        </p:nvSpPr>
+        <p:spPr>
+          <a:xfrm>
+            <a:off x="6766560" y="1417320"/>
+            <a:ext cx="4754880" cy="274320"/>
+          </a:xfrm>
+          <a:prstGeom prst="rect">
+            <a:avLst/>
+          </a:prstGeom>
+          <a:noFill/>
+        </p:spPr>
+        <p:txBody>
+          <a:bodyPr wrap="square" lIns="0" tIns="0" rIns="0" bIns="0" anchor="ctr"/>
+          <a:lstStyle/>
+          <a:p>
+            <a:pPr marL="0" indent="0" algn="ctr">
+              <a:buNone/>
+            </a:pPr>
+            <a:r>
+              <a:rPr lang="en-US" sz="900">
+                <a:solidFill>
+                  <a:srgbClr val="94A3B8"/>
+                </a:solidFill>
+                <a:latin typeface="Consolas"/>
+                <a:ea typeface="Consolas"/>
+                <a:cs typeface="Consolas"/>
+              </a:rPr>
+              <a:t>Batas data di logger</a:t>
+            </a:r>
+            <a:endParaRPr sz="900"/>
+          </a:p>
+        </p:txBody>
+      </p:sp>
+      <p:sp>
+        <p:nvSpPr>
+          <p:cNvPr id="23" name="Text 19">
+            <a:extLst>
+              <a:ext uri="{FF2B5EF4-FFF2-40B4-BE49-F238E27FC236}">
+                <a16:creationId xmlns:a16="http://schemas.microsoft.com/office/drawing/2014/main" id="{B3EACD03-024A-4921-9CE4-CECC7D83730F}"/>
+              </a:ext>
+            </a:extLst>
+          </p:cNvPr>
+          <p:cNvSpPr>
+            <a:spLocks noGrp="1"/>
+          </p:cNvSpPr>
+          <p:nvPr/>
+        </p:nvSpPr>
+        <p:spPr>
+          <a:xfrm>
+            <a:off x="6355080" y="1783080"/>
+            <a:ext cx="5212080" cy="4297680"/>
+          </a:xfrm>
+          <a:prstGeom prst="rect">
+            <a:avLst/>
+          </a:prstGeom>
+          <a:noFill/>
+        </p:spPr>
+        <p:txBody>
+          <a:bodyPr wrap="square" lIns="0" tIns="0" rIns="0" bIns="0" anchor="t"/>
+          <a:lstStyle/>
+          <a:p>
+            <a:pPr marL="0" indent="0">
+              <a:spcAft>
+                <a:spcPts val="200"/>
+              </a:spcAft>
+              <a:buNone/>
+            </a:pPr>
+            <a:r>
+              <a:rPr lang="en-US" sz="1600">
+                <a:solidFill>
+                  <a:srgbClr val="FFFFFF"/>
+                </a:solidFill>
+                <a:latin typeface="Aptos" panose="020B0004020202020204" pitchFamily="34" charset="0"/>
+                <a:ea typeface="Consolas"/>
+                <a:cs typeface="Consolas"/>
+              </a:rPr>
+              <a:t>timestamp, level, event, requestId,
+status, durationMs dapat dicari.
+Tidak perlu log isi catatan/token.
+Metrics = angka agregat.
+Logs = peristiwa dengan konteks.
+Traces = alur satu request lintas service.</a:t>
+            </a:r>
+            <a:endParaRPr sz="1600">
+              <a:solidFill>
+                <a:srgbClr val="FFFFFF"/>
+              </a:solidFill>
               <a:latin typeface="Aptos" panose="020B0004020202020204" pitchFamily="34" charset="0"/>
             </a:endParaRPr>
           </a:p>
         </p:txBody>
       </p:sp>
-      <p:pic>
-        <p:nvPicPr>
-          <p:cNvPr id="6" name="Picture 5">
-            <a:extLst>
-              <a:ext uri="{FF2B5EF4-FFF2-40B4-BE49-F238E27FC236}">
-                <a16:creationId xmlns:a16="http://schemas.microsoft.com/office/drawing/2014/main" id="{BFE431B2-64F3-D19A-E35D-1922D5961501}"/>
-              </a:ext>
-            </a:extLst>
-          </p:cNvPr>
-          <p:cNvPicPr>
-            <a:picLocks/>
-          </p:cNvPicPr>
-          <p:nvPr/>
-        </p:nvPicPr>
-        <p:blipFill>
-          <a:blip r:embed="rId12">
-            <a:extLst>
-              <a:ext uri="{28A0092B-C50C-407E-A947-70E740481C1C}">
-                <a14:useLocalDpi xmlns:a14="http://schemas.microsoft.com/office/drawing/2010/main" val="0"/>
-              </a:ext>
-            </a:extLst>
-          </a:blip>
-          <a:stretch>
-            <a:fillRect/>
-          </a:stretch>
-        </p:blipFill>
-        <p:spPr>
-          <a:xfrm>
-            <a:off x="6419088" y="2593993"/>
-            <a:ext cx="5084064" cy="2017486"/>
-          </a:xfrm>
-          <a:prstGeom prst="rect">
-            <a:avLst/>
-          </a:prstGeom>
-        </p:spPr>
-      </p:pic>
     </p:spTree>
     <p:extLst>
       <p:ext uri="{BB962C8B-B14F-4D97-AF65-F5344CB8AC3E}">
-        <p14:creationId xmlns:p14="http://schemas.microsoft.com/office/powerpoint/2010/main" val="1858563147"/>
+        <p14:creationId xmlns:p14="http://schemas.microsoft.com/office/powerpoint/2010/main" val="3696213950"/>
       </p:ext>
     </p:extLst>
   </p:cSld>
@@ -4040,7 +3841,7 @@
           <p:cNvPr id="2" name="Text 0">
             <a:extLst>
               <a:ext uri="{FF2B5EF4-FFF2-40B4-BE49-F238E27FC236}">
-                <a16:creationId xmlns:a16="http://schemas.microsoft.com/office/drawing/2014/main" id="{551B2EDE-56D0-4896-9CD6-C86D14D34152}"/>
+                <a16:creationId xmlns:a16="http://schemas.microsoft.com/office/drawing/2014/main" id="{09AB9A9A-0947-462E-934E-B2400BC5469D}"/>
               </a:ext>
             </a:extLst>
           </p:cNvPr>
@@ -4086,7 +3887,7 @@
           <p:cNvPr id="3" name="Text 1">
             <a:extLst>
               <a:ext uri="{FF2B5EF4-FFF2-40B4-BE49-F238E27FC236}">
-                <a16:creationId xmlns:a16="http://schemas.microsoft.com/office/drawing/2014/main" id="{85CFE9F8-72DD-4CCB-85CF-7C658CE0B028}"/>
+                <a16:creationId xmlns:a16="http://schemas.microsoft.com/office/drawing/2014/main" id="{5D4F55D9-27D4-46C6-8E07-7E01E2F5FE75}"/>
               </a:ext>
             </a:extLst>
           </p:cNvPr>
@@ -4132,7 +3933,7 @@
           <p:cNvPr id="4" name="Shape 2">
             <a:extLst>
               <a:ext uri="{FF2B5EF4-FFF2-40B4-BE49-F238E27FC236}">
-                <a16:creationId xmlns:a16="http://schemas.microsoft.com/office/drawing/2014/main" id="{755E14C0-7D13-4B50-A92E-306CDCC99592}"/>
+                <a16:creationId xmlns:a16="http://schemas.microsoft.com/office/drawing/2014/main" id="{7C05EB8C-1AB1-4E56-84FE-958525890D5F}"/>
               </a:ext>
             </a:extLst>
           </p:cNvPr>
@@ -4159,10 +3960,14 @@
             <a:prstDash val="solid"/>
           </a:ln>
         </p:spPr>
+        <p:txBody>
+          <a:bodyPr/>
+          <a:p/>
+        </p:txBody>
       </p:sp>
       <p:pic>
         <p:nvPicPr>
-          <p:cNvPr id="29" name="Image 0"/>
+          <p:cNvPr id="43" name="Image 0"/>
           <p:cNvPicPr>
             <a:picLocks noChangeAspect="1"/>
           </p:cNvPicPr>
@@ -4186,7 +3991,7 @@
       </p:pic>
       <p:pic>
         <p:nvPicPr>
-          <p:cNvPr id="30" name="Image 1"/>
+          <p:cNvPr id="44" name="Image 1"/>
           <p:cNvPicPr>
             <a:picLocks noChangeAspect="1"/>
           </p:cNvPicPr>
@@ -4213,7 +4018,7 @@
           <p:cNvPr id="7" name="Shape 3">
             <a:extLst>
               <a:ext uri="{FF2B5EF4-FFF2-40B4-BE49-F238E27FC236}">
-                <a16:creationId xmlns:a16="http://schemas.microsoft.com/office/drawing/2014/main" id="{E404997F-173C-4E22-A72E-8CFB412D7706}"/>
+                <a16:creationId xmlns:a16="http://schemas.microsoft.com/office/drawing/2014/main" id="{A1F127FB-81B4-41A8-9C45-AA7F15155A0B}"/>
               </a:ext>
             </a:extLst>
           </p:cNvPr>
@@ -4238,6 +4043,1205 @@
             <a:prstDash val="solid"/>
           </a:ln>
         </p:spPr>
+        <p:txBody>
+          <a:bodyPr/>
+          <a:p/>
+        </p:txBody>
+      </p:sp>
+      <p:sp>
+        <p:nvSpPr>
+          <p:cNvPr id="8" name="Text 4">
+            <a:extLst>
+              <a:ext uri="{FF2B5EF4-FFF2-40B4-BE49-F238E27FC236}">
+                <a16:creationId xmlns:a16="http://schemas.microsoft.com/office/drawing/2014/main" id="{F3EF31C9-BAC9-43A5-9588-35F774ADA48D}"/>
+              </a:ext>
+            </a:extLst>
+          </p:cNvPr>
+          <p:cNvSpPr>
+            <a:spLocks noGrp="1"/>
+          </p:cNvSpPr>
+          <p:nvPr/>
+        </p:nvSpPr>
+        <p:spPr>
+          <a:xfrm>
+            <a:off x="2011680" y="182880"/>
+            <a:ext cx="8138160" cy="502920"/>
+          </a:xfrm>
+          <a:prstGeom prst="rect">
+            <a:avLst/>
+          </a:prstGeom>
+          <a:noFill/>
+        </p:spPr>
+        <p:txBody>
+          <a:bodyPr wrap="square" lIns="0" tIns="0" rIns="0" bIns="0" anchor="ctr"/>
+          <a:lstStyle/>
+          <a:p>
+            <a:pPr marL="0" indent="0" algn="ctr">
+              <a:buNone/>
+            </a:pPr>
+            <a:r>
+              <a:rPr lang="en-US" sz="2200" b="1">
+                <a:solidFill>
+                  <a:srgbClr val="1976D2"/>
+                </a:solidFill>
+                <a:latin typeface="Calibri"/>
+                <a:ea typeface="Calibri"/>
+                <a:cs typeface="Calibri"/>
+              </a:rPr>
+              <a:t>Bukti 4 | Log JSON yang dapat dicari</a:t>
+            </a:r>
+            <a:endParaRPr sz="2200"/>
+          </a:p>
+        </p:txBody>
+      </p:sp>
+      <p:sp>
+        <p:nvSpPr>
+          <p:cNvPr id="9" name="Text 5">
+            <a:extLst>
+              <a:ext uri="{FF2B5EF4-FFF2-40B4-BE49-F238E27FC236}">
+                <a16:creationId xmlns:a16="http://schemas.microsoft.com/office/drawing/2014/main" id="{3ED02C09-C53D-4B52-BD4C-71B1FEDDAD1D}"/>
+              </a:ext>
+            </a:extLst>
+          </p:cNvPr>
+          <p:cNvSpPr>
+            <a:spLocks noGrp="1"/>
+          </p:cNvSpPr>
+          <p:nvPr/>
+        </p:nvSpPr>
+        <p:spPr>
+          <a:xfrm>
+            <a:off x="457200" y="960120"/>
+            <a:ext cx="11247120" cy="320040"/>
+          </a:xfrm>
+          <a:prstGeom prst="rect">
+            <a:avLst/>
+          </a:prstGeom>
+          <a:noFill/>
+        </p:spPr>
+        <p:txBody>
+          <a:bodyPr wrap="square" lIns="0" tIns="0" rIns="0" bIns="0" anchor="ctr"/>
+          <a:lstStyle/>
+          <a:p>
+            <a:pPr marL="0" indent="0" algn="ctr">
+              <a:buNone/>
+            </a:pPr>
+            <a:r>
+              <a:rPr lang="en-US" sz="1200" i="1">
+                <a:solidFill>
+                  <a:srgbClr val="64748B"/>
+                </a:solidFill>
+                <a:latin typeface="Calibri"/>
+                <a:ea typeface="Calibri"/>
+                <a:cs typeface="Calibri"/>
+              </a:rPr>
+              <a:t>Satu request Next.js menuju API Lab 06</a:t>
+            </a:r>
+            <a:endParaRPr sz="1200"/>
+          </a:p>
+        </p:txBody>
+      </p:sp>
+      <p:sp>
+        <p:nvSpPr>
+          <p:cNvPr id="10" name="Shape 6">
+            <a:extLst>
+              <a:ext uri="{FF2B5EF4-FFF2-40B4-BE49-F238E27FC236}">
+                <a16:creationId xmlns:a16="http://schemas.microsoft.com/office/drawing/2014/main" id="{4511F3F0-6A98-41EF-8649-E696F4C9BFF2}"/>
+              </a:ext>
+            </a:extLst>
+          </p:cNvPr>
+          <p:cNvSpPr>
+            <a:spLocks noGrp="1"/>
+          </p:cNvSpPr>
+          <p:nvPr/>
+        </p:nvSpPr>
+        <p:spPr>
+          <a:xfrm>
+            <a:off x="457200" y="1417320"/>
+            <a:ext cx="5577840" cy="4754880"/>
+          </a:xfrm>
+          <a:prstGeom prst="rect">
+            <a:avLst/>
+          </a:prstGeom>
+          <a:solidFill>
+            <a:srgbClr val="F8FAFC"/>
+          </a:solidFill>
+          <a:ln w="12700">
+            <a:solidFill>
+              <a:srgbClr val="E2E8F0"/>
+            </a:solidFill>
+            <a:prstDash val="solid"/>
+          </a:ln>
+        </p:spPr>
+        <p:txBody>
+          <a:bodyPr/>
+          <a:p/>
+        </p:txBody>
+      </p:sp>
+      <p:sp>
+        <p:nvSpPr>
+          <p:cNvPr id="11" name="Text 7">
+            <a:extLst>
+              <a:ext uri="{FF2B5EF4-FFF2-40B4-BE49-F238E27FC236}">
+                <a16:creationId xmlns:a16="http://schemas.microsoft.com/office/drawing/2014/main" id="{B0515DAC-679C-41E5-BEF3-470237094B6D}"/>
+              </a:ext>
+            </a:extLst>
+          </p:cNvPr>
+          <p:cNvSpPr>
+            <a:spLocks noGrp="1"/>
+          </p:cNvSpPr>
+          <p:nvPr/>
+        </p:nvSpPr>
+        <p:spPr>
+          <a:xfrm>
+            <a:off x="685800" y="1600200"/>
+            <a:ext cx="5120640" cy="822960"/>
+          </a:xfrm>
+          <a:prstGeom prst="rect">
+            <a:avLst/>
+          </a:prstGeom>
+          <a:noFill/>
+        </p:spPr>
+        <p:txBody>
+          <a:bodyPr wrap="square" lIns="0" tIns="0" rIns="0" bIns="0" anchor="ctr"/>
+          <a:lstStyle/>
+          <a:p>
+            <a:pPr marL="0" indent="0">
+              <a:buNone/>
+            </a:pPr>
+            <a:r>
+              <a:rPr lang="en-US" sz="1100" b="1" spc="300">
+                <a:solidFill>
+                  <a:srgbClr val="F37021"/>
+                </a:solidFill>
+                <a:latin typeface="Calibri"/>
+                <a:ea typeface="Calibri"/>
+                <a:cs typeface="Calibri"/>
+              </a:rPr>
+              <a:t>PERINTAH, FUNGSI, DAN HASIL</a:t>
+            </a:r>
+            <a:endParaRPr sz="1100"/>
+          </a:p>
+        </p:txBody>
+      </p:sp>
+      <p:pic>
+        <p:nvPicPr>
+          <p:cNvPr id="50" name="Image 2"/>
+          <p:cNvPicPr>
+            <a:picLocks noChangeAspect="1"/>
+          </p:cNvPicPr>
+          <p:nvPr/>
+        </p:nvPicPr>
+        <p:blipFill>
+          <a:blip r:embed="rId5"/>
+          <a:stretch>
+            <a:fillRect/>
+          </a:stretch>
+        </p:blipFill>
+        <p:spPr>
+          <a:xfrm>
+            <a:off x="777240" y="2697480"/>
+            <a:ext cx="292608" cy="292608"/>
+          </a:xfrm>
+          <a:prstGeom prst="rect">
+            <a:avLst/>
+          </a:prstGeom>
+        </p:spPr>
+      </p:pic>
+      <p:sp>
+        <p:nvSpPr>
+          <p:cNvPr id="13" name="Text 8">
+            <a:extLst>
+              <a:ext uri="{FF2B5EF4-FFF2-40B4-BE49-F238E27FC236}">
+                <a16:creationId xmlns:a16="http://schemas.microsoft.com/office/drawing/2014/main" id="{7777633E-25E8-473B-85D1-A2CCDB704DE5}"/>
+              </a:ext>
+            </a:extLst>
+          </p:cNvPr>
+          <p:cNvSpPr>
+            <a:spLocks noGrp="1"/>
+          </p:cNvSpPr>
+          <p:nvPr/>
+        </p:nvSpPr>
+        <p:spPr>
+          <a:xfrm>
+            <a:off x="1207008" y="2606040"/>
+            <a:ext cx="4709160" cy="457200"/>
+          </a:xfrm>
+          <a:prstGeom prst="rect">
+            <a:avLst/>
+          </a:prstGeom>
+          <a:noFill/>
+        </p:spPr>
+        <p:txBody>
+          <a:bodyPr wrap="square" lIns="0" tIns="0" rIns="0" bIns="0" anchor="ctr"/>
+          <a:lstStyle/>
+          <a:p>
+            <a:pPr marL="0" indent="0">
+              <a:buNone/>
+            </a:pPr>
+            <a:r>
+              <a:rPr lang="en-US" sz="1400">
+                <a:solidFill>
+                  <a:srgbClr val="312124"/>
+                </a:solidFill>
+                <a:latin typeface="Aptos" panose="020B0004020202020204" pitchFamily="34" charset="0"/>
+                <a:ea typeface="Calibri"/>
+                <a:cs typeface="Calibri"/>
+              </a:rPr>
+              <a:t>event notes_proxy berasal dari route.ts.</a:t>
+            </a:r>
+            <a:endParaRPr sz="1400">
+              <a:solidFill>
+                <a:srgbClr val="312124"/>
+              </a:solidFill>
+              <a:latin typeface="Aptos" panose="020B0004020202020204" pitchFamily="34" charset="0"/>
+            </a:endParaRPr>
+          </a:p>
+        </p:txBody>
+      </p:sp>
+      <p:pic>
+        <p:nvPicPr>
+          <p:cNvPr id="52" name="Image 3"/>
+          <p:cNvPicPr>
+            <a:picLocks noChangeAspect="1"/>
+          </p:cNvPicPr>
+          <p:nvPr/>
+        </p:nvPicPr>
+        <p:blipFill>
+          <a:blip r:embed="rId6"/>
+          <a:stretch>
+            <a:fillRect/>
+          </a:stretch>
+        </p:blipFill>
+        <p:spPr>
+          <a:xfrm>
+            <a:off x="777240" y="3200400"/>
+            <a:ext cx="292608" cy="292608"/>
+          </a:xfrm>
+          <a:prstGeom prst="rect">
+            <a:avLst/>
+          </a:prstGeom>
+        </p:spPr>
+      </p:pic>
+      <p:sp>
+        <p:nvSpPr>
+          <p:cNvPr id="15" name="Text 9">
+            <a:extLst>
+              <a:ext uri="{FF2B5EF4-FFF2-40B4-BE49-F238E27FC236}">
+                <a16:creationId xmlns:a16="http://schemas.microsoft.com/office/drawing/2014/main" id="{F45398AE-0FB6-42F9-BADC-B4E51CAC94BD}"/>
+              </a:ext>
+            </a:extLst>
+          </p:cNvPr>
+          <p:cNvSpPr>
+            <a:spLocks noGrp="1"/>
+          </p:cNvSpPr>
+          <p:nvPr/>
+        </p:nvSpPr>
+        <p:spPr>
+          <a:xfrm>
+            <a:off x="1207008" y="3108960"/>
+            <a:ext cx="4709160" cy="457200"/>
+          </a:xfrm>
+          <a:prstGeom prst="rect">
+            <a:avLst/>
+          </a:prstGeom>
+          <a:noFill/>
+        </p:spPr>
+        <p:txBody>
+          <a:bodyPr wrap="square" lIns="0" tIns="0" rIns="0" bIns="0" anchor="ctr"/>
+          <a:lstStyle/>
+          <a:p>
+            <a:pPr marL="0" indent="0">
+              <a:buNone/>
+            </a:pPr>
+            <a:r>
+              <a:rPr lang="en-US" sz="1400">
+                <a:solidFill>
+                  <a:srgbClr val="312124"/>
+                </a:solidFill>
+                <a:latin typeface="Aptos" panose="020B0004020202020204" pitchFamily="34" charset="0"/>
+                <a:ea typeface="Calibri"/>
+                <a:cs typeface="Calibri"/>
+              </a:rPr>
+              <a:t>requestId menghubungkan respons/log.</a:t>
+            </a:r>
+            <a:endParaRPr sz="1400">
+              <a:solidFill>
+                <a:srgbClr val="312124"/>
+              </a:solidFill>
+              <a:latin typeface="Aptos" panose="020B0004020202020204" pitchFamily="34" charset="0"/>
+            </a:endParaRPr>
+          </a:p>
+        </p:txBody>
+      </p:sp>
+      <p:pic>
+        <p:nvPicPr>
+          <p:cNvPr id="54" name="Image 4"/>
+          <p:cNvPicPr>
+            <a:picLocks noChangeAspect="1"/>
+          </p:cNvPicPr>
+          <p:nvPr/>
+        </p:nvPicPr>
+        <p:blipFill>
+          <a:blip r:embed="rId7"/>
+          <a:stretch>
+            <a:fillRect/>
+          </a:stretch>
+        </p:blipFill>
+        <p:spPr>
+          <a:xfrm>
+            <a:off x="777240" y="3703320"/>
+            <a:ext cx="292608" cy="292608"/>
+          </a:xfrm>
+          <a:prstGeom prst="rect">
+            <a:avLst/>
+          </a:prstGeom>
+        </p:spPr>
+      </p:pic>
+      <p:sp>
+        <p:nvSpPr>
+          <p:cNvPr id="17" name="Text 10">
+            <a:extLst>
+              <a:ext uri="{FF2B5EF4-FFF2-40B4-BE49-F238E27FC236}">
+                <a16:creationId xmlns:a16="http://schemas.microsoft.com/office/drawing/2014/main" id="{3465C8B5-2F2E-41A5-9CE8-A1140A05F92B}"/>
+              </a:ext>
+            </a:extLst>
+          </p:cNvPr>
+          <p:cNvSpPr>
+            <a:spLocks noGrp="1"/>
+          </p:cNvSpPr>
+          <p:nvPr/>
+        </p:nvSpPr>
+        <p:spPr>
+          <a:xfrm>
+            <a:off x="1207008" y="3611880"/>
+            <a:ext cx="4709160" cy="457200"/>
+          </a:xfrm>
+          <a:prstGeom prst="rect">
+            <a:avLst/>
+          </a:prstGeom>
+          <a:noFill/>
+        </p:spPr>
+        <p:txBody>
+          <a:bodyPr wrap="square" lIns="0" tIns="0" rIns="0" bIns="0" anchor="ctr"/>
+          <a:lstStyle/>
+          <a:p>
+            <a:pPr marL="0" indent="0">
+              <a:buNone/>
+            </a:pPr>
+            <a:r>
+              <a:rPr lang="en-US" sz="1400">
+                <a:solidFill>
+                  <a:srgbClr val="312124"/>
+                </a:solidFill>
+                <a:latin typeface="Aptos" panose="020B0004020202020204" pitchFamily="34" charset="0"/>
+                <a:ea typeface="Calibri"/>
+                <a:cs typeface="Calibri"/>
+              </a:rPr>
+              <a:t>status menunjukkan hasil upstream.</a:t>
+            </a:r>
+            <a:endParaRPr sz="1400">
+              <a:solidFill>
+                <a:srgbClr val="312124"/>
+              </a:solidFill>
+              <a:latin typeface="Aptos" panose="020B0004020202020204" pitchFamily="34" charset="0"/>
+            </a:endParaRPr>
+          </a:p>
+        </p:txBody>
+      </p:sp>
+      <p:pic>
+        <p:nvPicPr>
+          <p:cNvPr id="56" name="Image 5"/>
+          <p:cNvPicPr>
+            <a:picLocks noChangeAspect="1"/>
+          </p:cNvPicPr>
+          <p:nvPr/>
+        </p:nvPicPr>
+        <p:blipFill>
+          <a:blip r:embed="rId8"/>
+          <a:stretch>
+            <a:fillRect/>
+          </a:stretch>
+        </p:blipFill>
+        <p:spPr>
+          <a:xfrm>
+            <a:off x="777240" y="4206240"/>
+            <a:ext cx="292608" cy="292608"/>
+          </a:xfrm>
+          <a:prstGeom prst="rect">
+            <a:avLst/>
+          </a:prstGeom>
+        </p:spPr>
+      </p:pic>
+      <p:sp>
+        <p:nvSpPr>
+          <p:cNvPr id="19" name="Text 11">
+            <a:extLst>
+              <a:ext uri="{FF2B5EF4-FFF2-40B4-BE49-F238E27FC236}">
+                <a16:creationId xmlns:a16="http://schemas.microsoft.com/office/drawing/2014/main" id="{E3BA35A8-245C-4E42-B810-578F386C675B}"/>
+              </a:ext>
+            </a:extLst>
+          </p:cNvPr>
+          <p:cNvSpPr>
+            <a:spLocks noGrp="1"/>
+          </p:cNvSpPr>
+          <p:nvPr/>
+        </p:nvSpPr>
+        <p:spPr>
+          <a:xfrm>
+            <a:off x="1207008" y="4114800"/>
+            <a:ext cx="4709160" cy="457200"/>
+          </a:xfrm>
+          <a:prstGeom prst="rect">
+            <a:avLst/>
+          </a:prstGeom>
+          <a:noFill/>
+        </p:spPr>
+        <p:txBody>
+          <a:bodyPr wrap="square" lIns="0" tIns="0" rIns="0" bIns="0" anchor="ctr"/>
+          <a:lstStyle/>
+          <a:p>
+            <a:pPr marL="0" indent="0">
+              <a:buNone/>
+            </a:pPr>
+            <a:r>
+              <a:rPr lang="en-US" sz="1400">
+                <a:solidFill>
+                  <a:srgbClr val="312124"/>
+                </a:solidFill>
+                <a:latin typeface="Aptos" panose="020B0004020202020204" pitchFamily="34" charset="0"/>
+                <a:ea typeface="Calibri"/>
+                <a:cs typeface="Calibri"/>
+              </a:rPr>
+              <a:t>durationMs adalah waktu proxy.</a:t>
+            </a:r>
+            <a:endParaRPr sz="1400">
+              <a:solidFill>
+                <a:srgbClr val="312124"/>
+              </a:solidFill>
+              <a:latin typeface="Aptos" panose="020B0004020202020204" pitchFamily="34" charset="0"/>
+            </a:endParaRPr>
+          </a:p>
+        </p:txBody>
+      </p:sp>
+      <p:pic>
+        <p:nvPicPr>
+          <p:cNvPr id="58" name="Image 6"/>
+          <p:cNvPicPr>
+            <a:picLocks noChangeAspect="1"/>
+          </p:cNvPicPr>
+          <p:nvPr/>
+        </p:nvPicPr>
+        <p:blipFill>
+          <a:blip r:embed="rId9"/>
+          <a:stretch>
+            <a:fillRect/>
+          </a:stretch>
+        </p:blipFill>
+        <p:spPr>
+          <a:xfrm>
+            <a:off x="777240" y="4709160"/>
+            <a:ext cx="292608" cy="292608"/>
+          </a:xfrm>
+          <a:prstGeom prst="rect">
+            <a:avLst/>
+          </a:prstGeom>
+        </p:spPr>
+      </p:pic>
+      <p:sp>
+        <p:nvSpPr>
+          <p:cNvPr id="21" name="Text 12">
+            <a:extLst>
+              <a:ext uri="{FF2B5EF4-FFF2-40B4-BE49-F238E27FC236}">
+                <a16:creationId xmlns:a16="http://schemas.microsoft.com/office/drawing/2014/main" id="{AE08E845-E5A0-4491-8981-3F3026909A6E}"/>
+              </a:ext>
+            </a:extLst>
+          </p:cNvPr>
+          <p:cNvSpPr>
+            <a:spLocks noGrp="1"/>
+          </p:cNvSpPr>
+          <p:nvPr/>
+        </p:nvSpPr>
+        <p:spPr>
+          <a:xfrm>
+            <a:off x="1207008" y="4617720"/>
+            <a:ext cx="4709160" cy="457200"/>
+          </a:xfrm>
+          <a:prstGeom prst="rect">
+            <a:avLst/>
+          </a:prstGeom>
+          <a:noFill/>
+        </p:spPr>
+        <p:txBody>
+          <a:bodyPr wrap="square" lIns="0" tIns="0" rIns="0" bIns="0" anchor="ctr"/>
+          <a:lstStyle/>
+          <a:p>
+            <a:pPr marL="0" indent="0">
+              <a:buNone/>
+            </a:pPr>
+            <a:r>
+              <a:rPr lang="en-US" sz="1400">
+                <a:solidFill>
+                  <a:srgbClr val="312124"/>
+                </a:solidFill>
+                <a:latin typeface="Aptos" panose="020B0004020202020204" pitchFamily="34" charset="0"/>
+                <a:ea typeface="Calibri"/>
+                <a:cs typeface="Calibri"/>
+              </a:rPr>
+              <a:t>Tidak ada isi catatan atau token.</a:t>
+            </a:r>
+            <a:endParaRPr sz="1400">
+              <a:solidFill>
+                <a:srgbClr val="312124"/>
+              </a:solidFill>
+              <a:latin typeface="Aptos" panose="020B0004020202020204" pitchFamily="34" charset="0"/>
+            </a:endParaRPr>
+          </a:p>
+        </p:txBody>
+      </p:sp>
+      <p:pic>
+        <p:nvPicPr>
+          <p:cNvPr id="60" name="Image 7"/>
+          <p:cNvPicPr>
+            <a:picLocks noChangeAspect="1"/>
+          </p:cNvPicPr>
+          <p:nvPr/>
+        </p:nvPicPr>
+        <p:blipFill>
+          <a:blip r:embed="rId10"/>
+          <a:stretch>
+            <a:fillRect/>
+          </a:stretch>
+        </p:blipFill>
+        <p:spPr>
+          <a:xfrm>
+            <a:off x="777240" y="5212080"/>
+            <a:ext cx="292608" cy="292608"/>
+          </a:xfrm>
+          <a:prstGeom prst="rect">
+            <a:avLst/>
+          </a:prstGeom>
+        </p:spPr>
+      </p:pic>
+      <p:sp>
+        <p:nvSpPr>
+          <p:cNvPr id="23" name="Text 13">
+            <a:extLst>
+              <a:ext uri="{FF2B5EF4-FFF2-40B4-BE49-F238E27FC236}">
+                <a16:creationId xmlns:a16="http://schemas.microsoft.com/office/drawing/2014/main" id="{3AAF5F71-8C83-45DD-A1C2-6A37AE7ADA37}"/>
+              </a:ext>
+            </a:extLst>
+          </p:cNvPr>
+          <p:cNvSpPr>
+            <a:spLocks noGrp="1"/>
+          </p:cNvSpPr>
+          <p:nvPr/>
+        </p:nvSpPr>
+        <p:spPr>
+          <a:xfrm>
+            <a:off x="1207008" y="5120640"/>
+            <a:ext cx="4709160" cy="457200"/>
+          </a:xfrm>
+          <a:prstGeom prst="rect">
+            <a:avLst/>
+          </a:prstGeom>
+          <a:noFill/>
+        </p:spPr>
+        <p:txBody>
+          <a:bodyPr wrap="square" lIns="0" tIns="0" rIns="0" bIns="0" anchor="ctr"/>
+          <a:lstStyle/>
+          <a:p>
+            <a:pPr marL="0" indent="0">
+              <a:buNone/>
+            </a:pPr>
+            <a:r>
+              <a:rPr lang="en-US" sz="1400">
+                <a:solidFill>
+                  <a:srgbClr val="312124"/>
+                </a:solidFill>
+                <a:latin typeface="Aptos" panose="020B0004020202020204" pitchFamily="34" charset="0"/>
+                <a:ea typeface="Calibri"/>
+                <a:cs typeface="Calibri"/>
+              </a:rPr>
+              <a:t>Log server tidak sama dengan UI browser.</a:t>
+            </a:r>
+            <a:endParaRPr sz="1400">
+              <a:solidFill>
+                <a:srgbClr val="312124"/>
+              </a:solidFill>
+              <a:latin typeface="Aptos" panose="020B0004020202020204" pitchFamily="34" charset="0"/>
+            </a:endParaRPr>
+          </a:p>
+        </p:txBody>
+      </p:sp>
+      <p:pic>
+        <p:nvPicPr>
+          <p:cNvPr id="62" name="Image 8"/>
+          <p:cNvPicPr>
+            <a:picLocks noChangeAspect="1"/>
+          </p:cNvPicPr>
+          <p:nvPr/>
+        </p:nvPicPr>
+        <p:blipFill>
+          <a:blip r:embed="rId11"/>
+          <a:stretch>
+            <a:fillRect/>
+          </a:stretch>
+        </p:blipFill>
+        <p:spPr>
+          <a:xfrm>
+            <a:off x="777240" y="5715000"/>
+            <a:ext cx="292608" cy="292608"/>
+          </a:xfrm>
+          <a:prstGeom prst="rect">
+            <a:avLst/>
+          </a:prstGeom>
+        </p:spPr>
+      </p:pic>
+      <p:sp>
+        <p:nvSpPr>
+          <p:cNvPr id="25" name="Text 14">
+            <a:extLst>
+              <a:ext uri="{FF2B5EF4-FFF2-40B4-BE49-F238E27FC236}">
+                <a16:creationId xmlns:a16="http://schemas.microsoft.com/office/drawing/2014/main" id="{C7CDA5B9-11CE-4C44-977A-C028B4EEF951}"/>
+              </a:ext>
+            </a:extLst>
+          </p:cNvPr>
+          <p:cNvSpPr>
+            <a:spLocks noGrp="1"/>
+          </p:cNvSpPr>
+          <p:nvPr/>
+        </p:nvSpPr>
+        <p:spPr>
+          <a:xfrm>
+            <a:off x="1207008" y="5623560"/>
+            <a:ext cx="4709160" cy="457200"/>
+          </a:xfrm>
+          <a:prstGeom prst="rect">
+            <a:avLst/>
+          </a:prstGeom>
+          <a:noFill/>
+        </p:spPr>
+        <p:txBody>
+          <a:bodyPr wrap="square" lIns="0" tIns="0" rIns="0" bIns="0" anchor="ctr"/>
+          <a:lstStyle/>
+          <a:p>
+            <a:pPr marL="0" indent="0">
+              <a:buNone/>
+            </a:pPr>
+            <a:r>
+              <a:rPr lang="en-US" sz="1400">
+                <a:solidFill>
+                  <a:srgbClr val="312124"/>
+                </a:solidFill>
+                <a:latin typeface="Aptos" panose="020B0004020202020204" pitchFamily="34" charset="0"/>
+                <a:ea typeface="Calibri"/>
+                <a:cs typeface="Calibri"/>
+              </a:rPr>
+              <a:t>Gunakan ID untuk troubleshooting.</a:t>
+            </a:r>
+            <a:endParaRPr sz="1400">
+              <a:solidFill>
+                <a:srgbClr val="312124"/>
+              </a:solidFill>
+              <a:latin typeface="Aptos" panose="020B0004020202020204" pitchFamily="34" charset="0"/>
+            </a:endParaRPr>
+          </a:p>
+        </p:txBody>
+      </p:sp>
+      <p:sp>
+        <p:nvSpPr>
+          <p:cNvPr id="26" name="Shape 15">
+            <a:extLst>
+              <a:ext uri="{FF2B5EF4-FFF2-40B4-BE49-F238E27FC236}">
+                <a16:creationId xmlns:a16="http://schemas.microsoft.com/office/drawing/2014/main" id="{700288CD-FD9B-460A-854F-55CBD9ABDC2C}"/>
+              </a:ext>
+            </a:extLst>
+          </p:cNvPr>
+          <p:cNvSpPr>
+            <a:spLocks noGrp="1"/>
+          </p:cNvSpPr>
+          <p:nvPr/>
+        </p:nvSpPr>
+        <p:spPr>
+          <a:xfrm>
+            <a:off x="6217920" y="1417320"/>
+            <a:ext cx="5486400" cy="4754880"/>
+          </a:xfrm>
+          <a:prstGeom prst="rect">
+            <a:avLst/>
+          </a:prstGeom>
+          <a:solidFill>
+            <a:srgbClr val="002677"/>
+          </a:solidFill>
+          <a:ln w="12700">
+            <a:solidFill>
+              <a:srgbClr val="002677"/>
+            </a:solidFill>
+            <a:prstDash val="solid"/>
+          </a:ln>
+        </p:spPr>
+        <p:txBody>
+          <a:bodyPr/>
+          <a:p/>
+        </p:txBody>
+      </p:sp>
+      <p:sp>
+        <p:nvSpPr>
+          <p:cNvPr id="27" name="Text 16">
+            <a:extLst>
+              <a:ext uri="{FF2B5EF4-FFF2-40B4-BE49-F238E27FC236}">
+                <a16:creationId xmlns:a16="http://schemas.microsoft.com/office/drawing/2014/main" id="{CB3350F3-3296-426D-863F-177ECABD3178}"/>
+              </a:ext>
+            </a:extLst>
+          </p:cNvPr>
+          <p:cNvSpPr>
+            <a:spLocks noGrp="1"/>
+          </p:cNvSpPr>
+          <p:nvPr/>
+        </p:nvSpPr>
+        <p:spPr>
+          <a:xfrm>
+            <a:off x="6446520" y="1600200"/>
+            <a:ext cx="5120640" cy="822960"/>
+          </a:xfrm>
+          <a:prstGeom prst="rect">
+            <a:avLst/>
+          </a:prstGeom>
+          <a:noFill/>
+        </p:spPr>
+        <p:txBody>
+          <a:bodyPr wrap="square" lIns="0" tIns="0" rIns="0" bIns="0" anchor="ctr"/>
+          <a:lstStyle/>
+          <a:p>
+            <a:pPr marL="0" indent="0">
+              <a:buNone/>
+            </a:pPr>
+            <a:r>
+              <a:rPr lang="en-US" sz="1100" b="1" spc="300">
+                <a:solidFill>
+                  <a:srgbClr val="F37021"/>
+                </a:solidFill>
+                <a:latin typeface="Calibri"/>
+                <a:ea typeface="Calibri"/>
+                <a:cs typeface="Calibri"/>
+              </a:rPr>
+              <a:t>BUKTI PADA MESIN UJI</a:t>
+            </a:r>
+            <a:endParaRPr sz="1100"/>
+          </a:p>
+        </p:txBody>
+      </p:sp>
+      <p:sp>
+        <p:nvSpPr>
+          <p:cNvPr id="28" name="Text 17">
+            <a:extLst>
+              <a:ext uri="{FF2B5EF4-FFF2-40B4-BE49-F238E27FC236}">
+                <a16:creationId xmlns:a16="http://schemas.microsoft.com/office/drawing/2014/main" id="{A18E4DFD-E12D-4609-A35A-914A51AE19D2}"/>
+              </a:ext>
+            </a:extLst>
+          </p:cNvPr>
+          <p:cNvSpPr>
+            <a:spLocks noGrp="1"/>
+          </p:cNvSpPr>
+          <p:nvPr/>
+        </p:nvSpPr>
+        <p:spPr>
+          <a:xfrm>
+            <a:off x="6446520" y="2606040"/>
+            <a:ext cx="5029200" cy="2743200"/>
+          </a:xfrm>
+          <a:prstGeom prst="rect">
+            <a:avLst/>
+          </a:prstGeom>
+          <a:noFill/>
+        </p:spPr>
+        <p:txBody>
+          <a:bodyPr wrap="square" anchor="ctr"/>
+          <a:lstStyle/>
+          <a:p>
+            <a:pPr marL="0" indent="0">
+              <a:spcAft>
+                <a:spcPts val="600"/>
+              </a:spcAft>
+              <a:buNone/>
+            </a:pPr>
+            <a:endParaRPr sz="1200"/>
+          </a:p>
+        </p:txBody>
+      </p:sp>
+      <p:sp>
+        <p:nvSpPr>
+          <p:cNvPr id="29" name="Shape 18">
+            <a:extLst>
+              <a:ext uri="{FF2B5EF4-FFF2-40B4-BE49-F238E27FC236}">
+                <a16:creationId xmlns:a16="http://schemas.microsoft.com/office/drawing/2014/main" id="{F0706024-38A2-416F-B205-77840F63871B}"/>
+              </a:ext>
+            </a:extLst>
+          </p:cNvPr>
+          <p:cNvSpPr>
+            <a:spLocks noGrp="1"/>
+          </p:cNvSpPr>
+          <p:nvPr/>
+        </p:nvSpPr>
+        <p:spPr>
+          <a:xfrm>
+            <a:off x="6446520" y="5349240"/>
+            <a:ext cx="5029200" cy="731520"/>
+          </a:xfrm>
+          <a:prstGeom prst="rect">
+            <a:avLst/>
+          </a:prstGeom>
+          <a:solidFill>
+            <a:srgbClr val="F37021"/>
+          </a:solidFill>
+          <a:ln w="12700">
+            <a:solidFill>
+              <a:srgbClr val="F37021"/>
+            </a:solidFill>
+            <a:prstDash val="solid"/>
+          </a:ln>
+        </p:spPr>
+        <p:txBody>
+          <a:bodyPr/>
+          <a:p/>
+        </p:txBody>
+      </p:sp>
+      <p:sp>
+        <p:nvSpPr>
+          <p:cNvPr id="30" name="Text 19">
+            <a:extLst>
+              <a:ext uri="{FF2B5EF4-FFF2-40B4-BE49-F238E27FC236}">
+                <a16:creationId xmlns:a16="http://schemas.microsoft.com/office/drawing/2014/main" id="{26BEBC0A-D3A9-485A-A70F-650A3A86343C}"/>
+              </a:ext>
+            </a:extLst>
+          </p:cNvPr>
+          <p:cNvSpPr>
+            <a:spLocks noGrp="1"/>
+          </p:cNvSpPr>
+          <p:nvPr/>
+        </p:nvSpPr>
+        <p:spPr>
+          <a:xfrm>
+            <a:off x="6446520" y="5349240"/>
+            <a:ext cx="5029200" cy="731520"/>
+          </a:xfrm>
+          <a:prstGeom prst="rect">
+            <a:avLst/>
+          </a:prstGeom>
+          <a:noFill/>
+        </p:spPr>
+        <p:txBody>
+          <a:bodyPr wrap="square" lIns="0" tIns="0" rIns="0" bIns="0" anchor="ctr"/>
+          <a:lstStyle/>
+          <a:p>
+            <a:pPr marL="0" indent="0" algn="ctr">
+              <a:buNone/>
+            </a:pPr>
+            <a:r>
+              <a:rPr lang="en-US" sz="1500" i="1">
+                <a:solidFill>
+                  <a:srgbClr val="FFFFFF"/>
+                </a:solidFill>
+                <a:latin typeface="Aptos" panose="020B0004020202020204" pitchFamily="34" charset="0"/>
+                <a:ea typeface="Calibri"/>
+                <a:cs typeface="Calibri"/>
+              </a:rPr>
+              <a:t>Satu baris JSON menjelaskan request tanpa secret.</a:t>
+            </a:r>
+            <a:endParaRPr sz="1500">
+              <a:solidFill>
+                <a:srgbClr val="FFFFFF"/>
+              </a:solidFill>
+              <a:latin typeface="Aptos" panose="020B0004020202020204" pitchFamily="34" charset="0"/>
+            </a:endParaRPr>
+          </a:p>
+        </p:txBody>
+      </p:sp>
+      <p:pic>
+        <p:nvPicPr>
+          <p:cNvPr id="6" name="Picture 5">
+            <a:extLst>
+              <a:ext uri="{FF2B5EF4-FFF2-40B4-BE49-F238E27FC236}">
+                <a16:creationId xmlns:a16="http://schemas.microsoft.com/office/drawing/2014/main" id="{BFE431B2-64F3-D19A-E35D-1922D5961501}"/>
+              </a:ext>
+            </a:extLst>
+          </p:cNvPr>
+          <p:cNvPicPr>
+            <a:picLocks/>
+          </p:cNvPicPr>
+          <p:nvPr/>
+        </p:nvPicPr>
+        <p:blipFill>
+          <a:blip r:embed="rId12">
+            <a:extLst>
+              <a:ext uri="{28A0092B-C50C-407E-A947-70E740481C1C}">
+                <a14:useLocalDpi xmlns:a14="http://schemas.microsoft.com/office/drawing/2010/main" val="0"/>
+              </a:ext>
+            </a:extLst>
+          </a:blip>
+          <a:stretch>
+            <a:fillRect/>
+          </a:stretch>
+        </p:blipFill>
+        <p:spPr>
+          <a:xfrm>
+            <a:off x="6419088" y="2593993"/>
+            <a:ext cx="5084064" cy="2017486"/>
+          </a:xfrm>
+          <a:prstGeom prst="rect">
+            <a:avLst/>
+          </a:prstGeom>
+        </p:spPr>
+      </p:pic>
+    </p:spTree>
+    <p:extLst>
+      <p:ext uri="{BB962C8B-B14F-4D97-AF65-F5344CB8AC3E}">
+        <p14:creationId xmlns:p14="http://schemas.microsoft.com/office/powerpoint/2010/main" val="1858563147"/>
+      </p:ext>
+    </p:extLst>
+  </p:cSld>
+  <p:clrMapOvr>
+    <a:masterClrMapping/>
+  </p:clrMapOvr>
+</p:sld>
+</file>
+
+<file path=ppt/slides/slide13.xml><?xml version="1.0" encoding="utf-8"?>
+<p:sld xmlns:a="http://schemas.openxmlformats.org/drawingml/2006/main" xmlns:r="http://schemas.openxmlformats.org/officeDocument/2006/relationships" xmlns:p="http://schemas.openxmlformats.org/presentationml/2006/main">
+  <p:cSld>
+    <p:bg>
+      <p:bgPr>
+        <a:solidFill>
+          <a:srgbClr val="FFFFFF"/>
+        </a:solidFill>
+        <a:effectLst/>
+      </p:bgPr>
+    </p:bg>
+    <p:spTree>
+      <p:nvGrpSpPr>
+        <p:cNvPr id="1" name=""/>
+        <p:cNvGrpSpPr/>
+        <p:nvPr/>
+      </p:nvGrpSpPr>
+      <p:grpSpPr>
+        <a:xfrm>
+          <a:off x="0" y="0"/>
+          <a:ext cx="0" cy="0"/>
+          <a:chOff x="0" y="0"/>
+          <a:chExt cx="0" cy="0"/>
+        </a:xfrm>
+      </p:grpSpPr>
+      <p:sp>
+        <p:nvSpPr>
+          <p:cNvPr id="2" name="Text 0">
+            <a:extLst>
+              <a:ext uri="{FF2B5EF4-FFF2-40B4-BE49-F238E27FC236}">
+                <a16:creationId xmlns:a16="http://schemas.microsoft.com/office/drawing/2014/main" id="{551B2EDE-56D0-4896-9CD6-C86D14D34152}"/>
+              </a:ext>
+            </a:extLst>
+          </p:cNvPr>
+          <p:cNvSpPr>
+            <a:spLocks noGrp="1"/>
+          </p:cNvSpPr>
+          <p:nvPr/>
+        </p:nvSpPr>
+        <p:spPr>
+          <a:xfrm>
+            <a:off x="457200" y="6492240"/>
+            <a:ext cx="7315200" cy="274320"/>
+          </a:xfrm>
+          <a:prstGeom prst="rect">
+            <a:avLst/>
+          </a:prstGeom>
+          <a:noFill/>
+        </p:spPr>
+        <p:txBody>
+          <a:bodyPr wrap="square" lIns="0" tIns="0" rIns="0" bIns="0" anchor="ctr"/>
+          <a:lstStyle/>
+          <a:p>
+            <a:pPr marL="0" indent="0" algn="l">
+              <a:buNone/>
+            </a:pPr>
+            <a:r>
+              <a:rPr sz="900">
+                <a:solidFill>
+                  <a:srgbClr val="64748B"/>
+                </a:solidFill>
+                <a:latin typeface="Calibri"/>
+                <a:ea typeface="Calibri"/>
+                <a:cs typeface="Calibri"/>
+              </a:rPr>
+              <a:t>BINUS UNIVERSITY  |  Cloud Services  |  Praktikum 10</a:t>
+            </a:r>
+            <a:endParaRPr sz="900"/>
+          </a:p>
+        </p:txBody>
+      </p:sp>
+      <p:sp>
+        <p:nvSpPr>
+          <p:cNvPr id="3" name="Text 1">
+            <a:extLst>
+              <a:ext uri="{FF2B5EF4-FFF2-40B4-BE49-F238E27FC236}">
+                <a16:creationId xmlns:a16="http://schemas.microsoft.com/office/drawing/2014/main" id="{85CFE9F8-72DD-4CCB-85CF-7C658CE0B028}"/>
+              </a:ext>
+            </a:extLst>
+          </p:cNvPr>
+          <p:cNvSpPr>
+            <a:spLocks noGrp="1"/>
+          </p:cNvSpPr>
+          <p:nvPr/>
+        </p:nvSpPr>
+        <p:spPr>
+          <a:xfrm>
+            <a:off x="11247120" y="6492240"/>
+            <a:ext cx="457200" cy="274320"/>
+          </a:xfrm>
+          <a:prstGeom prst="rect">
+            <a:avLst/>
+          </a:prstGeom>
+          <a:noFill/>
+        </p:spPr>
+        <p:txBody>
+          <a:bodyPr wrap="square" lIns="0" tIns="0" rIns="0" bIns="0" anchor="ctr"/>
+          <a:lstStyle/>
+          <a:p>
+            <a:pPr marL="0" indent="0" algn="r">
+              <a:buNone/>
+            </a:pPr>
+            <a:r>
+              <a:rPr lang="en-US" sz="900" b="1">
+                <a:solidFill>
+                  <a:srgbClr val="64748B"/>
+                </a:solidFill>
+                <a:latin typeface="Calibri"/>
+                <a:ea typeface="Calibri"/>
+                <a:cs typeface="Calibri"/>
+              </a:rPr>
+              <a:t>13</a:t>
+            </a:r>
+            <a:endParaRPr sz="900"/>
+          </a:p>
+        </p:txBody>
+      </p:sp>
+      <p:sp>
+        <p:nvSpPr>
+          <p:cNvPr id="4" name="Shape 2">
+            <a:extLst>
+              <a:ext uri="{FF2B5EF4-FFF2-40B4-BE49-F238E27FC236}">
+                <a16:creationId xmlns:a16="http://schemas.microsoft.com/office/drawing/2014/main" id="{755E14C0-7D13-4B50-A92E-306CDCC99592}"/>
+              </a:ext>
+            </a:extLst>
+          </p:cNvPr>
+          <p:cNvSpPr>
+            <a:spLocks noGrp="1"/>
+          </p:cNvSpPr>
+          <p:nvPr/>
+        </p:nvSpPr>
+        <p:spPr>
+          <a:xfrm>
+            <a:off x="457200" y="6446520"/>
+            <a:ext cx="228600" cy="36576"/>
+          </a:xfrm>
+          <a:prstGeom prst="rect">
+            <a:avLst/>
+          </a:prstGeom>
+          <a:solidFill>
+            <a:srgbClr val="F37021"/>
+          </a:solidFill>
+          <a:ln w="12700">
+            <a:solidFill>
+              <a:srgbClr val="F37021"/>
+            </a:solidFill>
+            <a:prstDash val="solid"/>
+          </a:ln>
+        </p:spPr>
+        <p:txBody>
+          <a:bodyPr/>
+          <a:p/>
+        </p:txBody>
+      </p:sp>
+      <p:pic>
+        <p:nvPicPr>
+          <p:cNvPr id="29" name="Image 0"/>
+          <p:cNvPicPr>
+            <a:picLocks noChangeAspect="1"/>
+          </p:cNvPicPr>
+          <p:nvPr/>
+        </p:nvPicPr>
+        <p:blipFill>
+          <a:blip r:embed="rId3"/>
+          <a:stretch>
+            <a:fillRect/>
+          </a:stretch>
+        </p:blipFill>
+        <p:spPr>
+          <a:xfrm>
+            <a:off x="274320" y="164592"/>
+            <a:ext cx="914400" cy="603504"/>
+          </a:xfrm>
+          <a:prstGeom prst="rect">
+            <a:avLst/>
+          </a:prstGeom>
+        </p:spPr>
+      </p:pic>
+      <p:pic>
+        <p:nvPicPr>
+          <p:cNvPr id="30" name="Image 1"/>
+          <p:cNvPicPr>
+            <a:picLocks noChangeAspect="1"/>
+          </p:cNvPicPr>
+          <p:nvPr/>
+        </p:nvPicPr>
+        <p:blipFill>
+          <a:blip r:embed="rId4"/>
+          <a:stretch>
+            <a:fillRect/>
+          </a:stretch>
+        </p:blipFill>
+        <p:spPr>
+          <a:xfrm>
+            <a:off x="10881360" y="182880"/>
+            <a:ext cx="1005840" cy="512064"/>
+          </a:xfrm>
+          <a:prstGeom prst="rect">
+            <a:avLst/>
+          </a:prstGeom>
+        </p:spPr>
+      </p:pic>
+      <p:sp>
+        <p:nvSpPr>
+          <p:cNvPr id="7" name="Shape 3">
+            <a:extLst>
+              <a:ext uri="{FF2B5EF4-FFF2-40B4-BE49-F238E27FC236}">
+                <a16:creationId xmlns:a16="http://schemas.microsoft.com/office/drawing/2014/main" id="{E404997F-173C-4E22-A72E-8CFB412D7706}"/>
+              </a:ext>
+            </a:extLst>
+          </p:cNvPr>
+          <p:cNvSpPr>
+            <a:spLocks noGrp="1"/>
+          </p:cNvSpPr>
+          <p:nvPr/>
+        </p:nvSpPr>
+        <p:spPr>
+          <a:xfrm>
+            <a:off x="457200" y="868680"/>
+            <a:ext cx="11247120" cy="0"/>
+          </a:xfrm>
+          <a:prstGeom prst="line">
+            <a:avLst/>
+          </a:prstGeom>
+          <a:noFill/>
+          <a:ln w="12700">
+            <a:solidFill>
+              <a:srgbClr val="E2E8F0"/>
+            </a:solidFill>
+            <a:prstDash val="solid"/>
+          </a:ln>
+        </p:spPr>
+        <p:txBody>
+          <a:bodyPr/>
+          <a:p/>
+        </p:txBody>
       </p:sp>
       <p:sp>
         <p:nvSpPr>
@@ -4363,6 +5367,10 @@
             <a:prstDash val="solid"/>
           </a:ln>
         </p:spPr>
+        <p:txBody>
+          <a:bodyPr/>
+          <a:p/>
+        </p:txBody>
       </p:sp>
       <p:sp>
         <p:nvSpPr>
@@ -4396,6 +5404,10 @@
             <a:prstDash val="solid"/>
           </a:ln>
         </p:spPr>
+        <p:txBody>
+          <a:bodyPr/>
+          <a:p/>
+        </p:txBody>
       </p:sp>
       <p:sp>
         <p:nvSpPr>
@@ -4429,6 +5441,10 @@
             <a:prstDash val="solid"/>
           </a:ln>
         </p:spPr>
+        <p:txBody>
+          <a:bodyPr/>
+          <a:p/>
+        </p:txBody>
       </p:sp>
       <p:sp>
         <p:nvSpPr>
@@ -4462,6 +5478,10 @@
             <a:prstDash val="solid"/>
           </a:ln>
         </p:spPr>
+        <p:txBody>
+          <a:bodyPr/>
+          <a:p/>
+        </p:txBody>
       </p:sp>
       <p:sp>
         <p:nvSpPr>
@@ -4495,6 +5515,10 @@
             <a:prstDash val="solid"/>
           </a:ln>
         </p:spPr>
+        <p:txBody>
+          <a:bodyPr/>
+          <a:p/>
+        </p:txBody>
       </p:sp>
       <p:sp>
         <p:nvSpPr>
@@ -4637,6 +5661,10 @@
             <a:prstDash val="solid"/>
           </a:ln>
         </p:spPr>
+        <p:txBody>
+          <a:bodyPr/>
+          <a:p/>
+        </p:txBody>
       </p:sp>
       <p:sp>
         <p:nvSpPr>
@@ -4670,6 +5698,10 @@
             <a:prstDash val="solid"/>
           </a:ln>
         </p:spPr>
+        <p:txBody>
+          <a:bodyPr/>
+          <a:p/>
+        </p:txBody>
       </p:sp>
       <p:sp>
         <p:nvSpPr>
@@ -4703,6 +5735,10 @@
             <a:prstDash val="solid"/>
           </a:ln>
         </p:spPr>
+        <p:txBody>
+          <a:bodyPr/>
+          <a:p/>
+        </p:txBody>
       </p:sp>
       <p:sp>
         <p:nvSpPr>
@@ -4736,6 +5772,10 @@
             <a:prstDash val="solid"/>
           </a:ln>
         </p:spPr>
+        <p:txBody>
+          <a:bodyPr/>
+          <a:p/>
+        </p:txBody>
       </p:sp>
       <p:sp>
         <p:nvSpPr>
@@ -4769,6 +5809,10 @@
             <a:prstDash val="solid"/>
           </a:ln>
         </p:spPr>
+        <p:txBody>
+          <a:bodyPr/>
+          <a:p/>
+        </p:txBody>
       </p:sp>
       <p:sp>
         <p:nvSpPr>
@@ -5037,6 +6081,10 @@
             <a:prstDash val="solid"/>
           </a:ln>
         </p:spPr>
+        <p:txBody>
+          <a:bodyPr/>
+          <a:p/>
+        </p:txBody>
       </p:sp>
       <p:pic>
         <p:nvPicPr>
@@ -5116,6 +6164,10 @@
             <a:prstDash val="solid"/>
           </a:ln>
         </p:spPr>
+        <p:txBody>
+          <a:bodyPr/>
+          <a:p/>
+        </p:txBody>
       </p:sp>
       <p:sp>
         <p:nvSpPr>
@@ -5241,6 +6293,10 @@
             <a:prstDash val="solid"/>
           </a:ln>
         </p:spPr>
+        <p:txBody>
+          <a:bodyPr/>
+          <a:p/>
+        </p:txBody>
       </p:sp>
       <p:sp>
         <p:nvSpPr>
@@ -5839,6 +6895,10 @@
             <a:prstDash val="solid"/>
           </a:ln>
         </p:spPr>
+        <p:txBody>
+          <a:bodyPr/>
+          <a:p/>
+        </p:txBody>
       </p:sp>
       <p:sp>
         <p:nvSpPr>
@@ -6053,6 +7113,10 @@
             <a:prstDash val="solid"/>
           </a:ln>
         </p:spPr>
+        <p:txBody>
+          <a:bodyPr/>
+          <a:p/>
+        </p:txBody>
       </p:sp>
       <p:sp>
         <p:nvSpPr>
@@ -6262,6 +7326,10 @@
             <a:prstDash val="solid"/>
           </a:ln>
         </p:spPr>
+        <p:txBody>
+          <a:bodyPr/>
+          <a:p/>
+        </p:txBody>
       </p:sp>
       <p:pic>
         <p:nvPicPr>
@@ -6341,6 +7409,10 @@
             <a:prstDash val="solid"/>
           </a:ln>
         </p:spPr>
+        <p:txBody>
+          <a:bodyPr/>
+          <a:p/>
+        </p:txBody>
       </p:sp>
       <p:sp>
         <p:nvSpPr>
@@ -6466,6 +7538,10 @@
             <a:prstDash val="solid"/>
           </a:ln>
         </p:spPr>
+        <p:txBody>
+          <a:bodyPr/>
+          <a:p/>
+        </p:txBody>
       </p:sp>
       <p:sp>
         <p:nvSpPr>
@@ -6499,6 +7575,10 @@
             <a:prstDash val="solid"/>
           </a:ln>
         </p:spPr>
+        <p:txBody>
+          <a:bodyPr/>
+          <a:p/>
+        </p:txBody>
       </p:sp>
       <p:sp>
         <p:nvSpPr>
@@ -6532,6 +7612,10 @@
             <a:prstDash val="solid"/>
           </a:ln>
         </p:spPr>
+        <p:txBody>
+          <a:bodyPr/>
+          <a:p/>
+        </p:txBody>
       </p:sp>
       <p:sp>
         <p:nvSpPr>
@@ -6565,6 +7649,10 @@
             <a:prstDash val="solid"/>
           </a:ln>
         </p:spPr>
+        <p:txBody>
+          <a:bodyPr/>
+          <a:p/>
+        </p:txBody>
       </p:sp>
       <p:sp>
         <p:nvSpPr>
@@ -6598,6 +7686,10 @@
             <a:prstDash val="solid"/>
           </a:ln>
         </p:spPr>
+        <p:txBody>
+          <a:bodyPr/>
+          <a:p/>
+        </p:txBody>
       </p:sp>
       <p:sp>
         <p:nvSpPr>
@@ -6736,6 +7828,10 @@
             <a:prstDash val="solid"/>
           </a:ln>
         </p:spPr>
+        <p:txBody>
+          <a:bodyPr/>
+          <a:p/>
+        </p:txBody>
       </p:sp>
       <p:sp>
         <p:nvSpPr>
@@ -6769,6 +7865,10 @@
             <a:prstDash val="solid"/>
           </a:ln>
         </p:spPr>
+        <p:txBody>
+          <a:bodyPr/>
+          <a:p/>
+        </p:txBody>
       </p:sp>
       <p:sp>
         <p:nvSpPr>
@@ -6802,6 +7902,10 @@
             <a:prstDash val="solid"/>
           </a:ln>
         </p:spPr>
+        <p:txBody>
+          <a:bodyPr/>
+          <a:p/>
+        </p:txBody>
       </p:sp>
       <p:sp>
         <p:nvSpPr>
@@ -6835,6 +7939,10 @@
             <a:prstDash val="solid"/>
           </a:ln>
         </p:spPr>
+        <p:txBody>
+          <a:bodyPr/>
+          <a:p/>
+        </p:txBody>
       </p:sp>
       <p:sp>
         <p:nvSpPr>
@@ -6868,6 +7976,10 @@
             <a:prstDash val="solid"/>
           </a:ln>
         </p:spPr>
+        <p:txBody>
+          <a:bodyPr/>
+          <a:p/>
+        </p:txBody>
       </p:sp>
       <p:sp>
         <p:nvSpPr>
@@ -7136,6 +8248,10 @@
             <a:prstDash val="solid"/>
           </a:ln>
         </p:spPr>
+        <p:txBody>
+          <a:bodyPr/>
+          <a:p/>
+        </p:txBody>
       </p:sp>
       <p:pic>
         <p:nvPicPr>
@@ -7215,6 +8331,10 @@
             <a:prstDash val="solid"/>
           </a:ln>
         </p:spPr>
+        <p:txBody>
+          <a:bodyPr/>
+          <a:p/>
+        </p:txBody>
       </p:sp>
       <p:sp>
         <p:nvSpPr>
@@ -7340,6 +8460,10 @@
             <a:prstDash val="solid"/>
           </a:ln>
         </p:spPr>
+        <p:txBody>
+          <a:bodyPr/>
+          <a:p/>
+        </p:txBody>
       </p:sp>
       <p:sp>
         <p:nvSpPr>
@@ -7373,6 +8497,10 @@
             <a:prstDash val="solid"/>
           </a:ln>
         </p:spPr>
+        <p:txBody>
+          <a:bodyPr/>
+          <a:p/>
+        </p:txBody>
       </p:sp>
       <p:sp>
         <p:nvSpPr>
@@ -7406,6 +8534,10 @@
             <a:prstDash val="solid"/>
           </a:ln>
         </p:spPr>
+        <p:txBody>
+          <a:bodyPr/>
+          <a:p/>
+        </p:txBody>
       </p:sp>
       <p:sp>
         <p:nvSpPr>
@@ -7439,6 +8571,10 @@
             <a:prstDash val="solid"/>
           </a:ln>
         </p:spPr>
+        <p:txBody>
+          <a:bodyPr/>
+          <a:p/>
+        </p:txBody>
       </p:sp>
       <p:sp>
         <p:nvSpPr>
@@ -7472,6 +8608,10 @@
             <a:prstDash val="solid"/>
           </a:ln>
         </p:spPr>
+        <p:txBody>
+          <a:bodyPr/>
+          <a:p/>
+        </p:txBody>
       </p:sp>
       <p:sp>
         <p:nvSpPr>
@@ -7609,6 +8749,10 @@
             <a:prstDash val="solid"/>
           </a:ln>
         </p:spPr>
+        <p:txBody>
+          <a:bodyPr/>
+          <a:p/>
+        </p:txBody>
       </p:sp>
       <p:sp>
         <p:nvSpPr>
@@ -7642,6 +8786,10 @@
             <a:prstDash val="solid"/>
           </a:ln>
         </p:spPr>
+        <p:txBody>
+          <a:bodyPr/>
+          <a:p/>
+        </p:txBody>
       </p:sp>
       <p:sp>
         <p:nvSpPr>
@@ -7675,6 +8823,10 @@
             <a:prstDash val="solid"/>
           </a:ln>
         </p:spPr>
+        <p:txBody>
+          <a:bodyPr/>
+          <a:p/>
+        </p:txBody>
       </p:sp>
       <p:sp>
         <p:nvSpPr>
@@ -7708,6 +8860,10 @@
             <a:prstDash val="solid"/>
           </a:ln>
         </p:spPr>
+        <p:txBody>
+          <a:bodyPr/>
+          <a:p/>
+        </p:txBody>
       </p:sp>
       <p:sp>
         <p:nvSpPr>
@@ -7741,6 +8897,10 @@
             <a:prstDash val="solid"/>
           </a:ln>
         </p:spPr>
+        <p:txBody>
+          <a:bodyPr/>
+          <a:p/>
+        </p:txBody>
       </p:sp>
       <p:sp>
         <p:nvSpPr>
@@ -8009,6 +9169,10 @@
             <a:prstDash val="solid"/>
           </a:ln>
         </p:spPr>
+        <p:txBody>
+          <a:bodyPr/>
+          <a:p/>
+        </p:txBody>
       </p:sp>
       <p:pic>
         <p:nvPicPr>
@@ -8088,6 +9252,10 @@
             <a:prstDash val="solid"/>
           </a:ln>
         </p:spPr>
+        <p:txBody>
+          <a:bodyPr/>
+          <a:p/>
+        </p:txBody>
       </p:sp>
       <p:sp>
         <p:nvSpPr>
@@ -8213,6 +9381,10 @@
             <a:prstDash val="solid"/>
           </a:ln>
         </p:spPr>
+        <p:txBody>
+          <a:bodyPr/>
+          <a:p/>
+        </p:txBody>
       </p:sp>
       <p:sp>
         <p:nvSpPr>
@@ -8817,6 +9989,10 @@
             <a:prstDash val="solid"/>
           </a:ln>
         </p:spPr>
+        <p:txBody>
+          <a:bodyPr/>
+          <a:p/>
+        </p:txBody>
       </p:sp>
       <p:sp>
         <p:nvSpPr>
@@ -8934,6 +10110,10 @@
             <a:prstDash val="solid"/>
           </a:ln>
         </p:spPr>
+        <p:txBody>
+          <a:bodyPr/>
+          <a:p/>
+        </p:txBody>
       </p:sp>
       <p:sp>
         <p:nvSpPr>
@@ -9184,6 +10364,10 @@
             <a:prstDash val="solid"/>
           </a:ln>
         </p:spPr>
+        <p:txBody>
+          <a:bodyPr/>
+          <a:p/>
+        </p:txBody>
       </p:sp>
       <p:pic>
         <p:nvPicPr>
@@ -9263,6 +10447,10 @@
             <a:prstDash val="solid"/>
           </a:ln>
         </p:spPr>
+        <p:txBody>
+          <a:bodyPr/>
+          <a:p/>
+        </p:txBody>
       </p:sp>
       <p:sp>
         <p:nvSpPr>
@@ -9388,6 +10576,10 @@
             <a:prstDash val="solid"/>
           </a:ln>
         </p:spPr>
+        <p:txBody>
+          <a:bodyPr/>
+          <a:p/>
+        </p:txBody>
       </p:sp>
       <p:sp>
         <p:nvSpPr>
@@ -9992,6 +11184,10 @@
             <a:prstDash val="solid"/>
           </a:ln>
         </p:spPr>
+        <p:txBody>
+          <a:bodyPr/>
+          <a:p/>
+        </p:txBody>
       </p:sp>
       <p:sp>
         <p:nvSpPr>
@@ -10109,6 +11305,10 @@
             <a:prstDash val="solid"/>
           </a:ln>
         </p:spPr>
+        <p:txBody>
+          <a:bodyPr/>
+          <a:p/>
+        </p:txBody>
       </p:sp>
       <p:sp>
         <p:nvSpPr>
@@ -10359,6 +11559,10 @@
             <a:prstDash val="solid"/>
           </a:ln>
         </p:spPr>
+        <p:txBody>
+          <a:bodyPr/>
+          <a:p/>
+        </p:txBody>
       </p:sp>
       <p:pic>
         <p:nvPicPr>
@@ -10438,6 +11642,10 @@
             <a:prstDash val="solid"/>
           </a:ln>
         </p:spPr>
+        <p:txBody>
+          <a:bodyPr/>
+          <a:p/>
+        </p:txBody>
       </p:sp>
       <p:sp>
         <p:nvSpPr>
@@ -10563,6 +11771,10 @@
             <a:prstDash val="solid"/>
           </a:ln>
         </p:spPr>
+        <p:txBody>
+          <a:bodyPr/>
+          <a:p/>
+        </p:txBody>
       </p:sp>
       <p:sp>
         <p:nvSpPr>
@@ -10596,6 +11808,10 @@
             <a:prstDash val="solid"/>
           </a:ln>
         </p:spPr>
+        <p:txBody>
+          <a:bodyPr/>
+          <a:p/>
+        </p:txBody>
       </p:sp>
       <p:sp>
         <p:nvSpPr>
@@ -10629,6 +11845,10 @@
             <a:prstDash val="solid"/>
           </a:ln>
         </p:spPr>
+        <p:txBody>
+          <a:bodyPr/>
+          <a:p/>
+        </p:txBody>
       </p:sp>
       <p:sp>
         <p:nvSpPr>
@@ -10662,6 +11882,10 @@
             <a:prstDash val="solid"/>
           </a:ln>
         </p:spPr>
+        <p:txBody>
+          <a:bodyPr/>
+          <a:p/>
+        </p:txBody>
       </p:sp>
       <p:sp>
         <p:nvSpPr>
@@ -10695,6 +11919,10 @@
             <a:prstDash val="solid"/>
           </a:ln>
         </p:spPr>
+        <p:txBody>
+          <a:bodyPr/>
+          <a:p/>
+        </p:txBody>
       </p:sp>
       <p:sp>
         <p:nvSpPr>
@@ -10834,6 +12062,10 @@
             <a:prstDash val="solid"/>
           </a:ln>
         </p:spPr>
+        <p:txBody>
+          <a:bodyPr/>
+          <a:p/>
+        </p:txBody>
       </p:sp>
       <p:sp>
         <p:nvSpPr>
@@ -10867,6 +12099,10 @@
             <a:prstDash val="solid"/>
           </a:ln>
         </p:spPr>
+        <p:txBody>
+          <a:bodyPr/>
+          <a:p/>
+        </p:txBody>
       </p:sp>
       <p:sp>
         <p:nvSpPr>
@@ -10900,6 +12136,10 @@
             <a:prstDash val="solid"/>
           </a:ln>
         </p:spPr>
+        <p:txBody>
+          <a:bodyPr/>
+          <a:p/>
+        </p:txBody>
       </p:sp>
       <p:sp>
         <p:nvSpPr>
@@ -10933,6 +12173,10 @@
             <a:prstDash val="solid"/>
           </a:ln>
         </p:spPr>
+        <p:txBody>
+          <a:bodyPr/>
+          <a:p/>
+        </p:txBody>
       </p:sp>
       <p:sp>
         <p:nvSpPr>
@@ -10966,6 +12210,10 @@
             <a:prstDash val="solid"/>
           </a:ln>
         </p:spPr>
+        <p:txBody>
+          <a:bodyPr/>
+          <a:p/>
+        </p:txBody>
       </p:sp>
       <p:sp>
         <p:nvSpPr>
@@ -11234,6 +12482,10 @@
             <a:prstDash val="solid"/>
           </a:ln>
         </p:spPr>
+        <p:txBody>
+          <a:bodyPr/>
+          <a:p/>
+        </p:txBody>
       </p:sp>
       <p:pic>
         <p:nvPicPr>
@@ -11313,6 +12565,10 @@
             <a:prstDash val="solid"/>
           </a:ln>
         </p:spPr>
+        <p:txBody>
+          <a:bodyPr/>
+          <a:p/>
+        </p:txBody>
       </p:sp>
       <p:sp>
         <p:nvSpPr>
@@ -11400,7 +12656,7 @@
                 <a:ea typeface="Calibri"/>
                 <a:cs typeface="Calibri"/>
               </a:rPr>
-              <a:t>Status page aktual sesudah proses Next.js dimatikan</a:t>
+              <a:t>Simulasi insiden: Next.js dihentikan, API dan Gradio tetap hidup</a:t>
             </a:r>
             <a:endParaRPr sz="1200"/>
           </a:p>
@@ -11438,6 +12694,10 @@
             <a:prstDash val="solid"/>
           </a:ln>
         </p:spPr>
+        <p:txBody>
+          <a:bodyPr/>
+          <a:p/>
+        </p:txBody>
       </p:sp>
       <p:sp>
         <p:nvSpPr>
@@ -12042,6 +13302,10 @@
             <a:prstDash val="solid"/>
           </a:ln>
         </p:spPr>
+        <p:txBody>
+          <a:bodyPr/>
+          <a:p/>
+        </p:txBody>
       </p:sp>
       <p:sp>
         <p:nvSpPr>
@@ -12059,8 +13323,8 @@
         </p:nvSpPr>
         <p:spPr>
           <a:xfrm>
-            <a:off x="6446520" y="1600200"/>
-            <a:ext cx="5120640" cy="822960"/>
+            <a:off x="6446520" y="1508760"/>
+            <a:ext cx="5120640" cy="457200"/>
           </a:xfrm>
           <a:prstGeom prst="rect">
             <a:avLst/>
@@ -12159,6 +13423,10 @@
             <a:prstDash val="solid"/>
           </a:ln>
         </p:spPr>
+        <p:txBody>
+          <a:bodyPr/>
+          <a:p/>
+        </p:txBody>
       </p:sp>
       <p:sp>
         <p:nvSpPr>
@@ -12261,36 +13529,21 @@
 </file>
 
 <file path=ppt/slides/slide9.xml><?xml version="1.0" encoding="utf-8"?>
-<p:sld xmlns:a="http://schemas.openxmlformats.org/drawingml/2006/main" xmlns:r="http://schemas.openxmlformats.org/officeDocument/2006/relationships" xmlns:p="http://schemas.openxmlformats.org/presentationml/2006/main">
+<p:sld xmlns:a="http://schemas.openxmlformats.org/drawingml/2006/main" xmlns:p="http://schemas.openxmlformats.org/presentationml/2006/main" xmlns:r="http://schemas.openxmlformats.org/officeDocument/2006/relationships">
   <p:cSld>
-    <p:bg>
-      <p:bgPr>
-        <a:solidFill>
-          <a:srgbClr val="FFFFFF"/>
-        </a:solidFill>
-        <a:effectLst/>
-      </p:bgPr>
-    </p:bg>
     <p:spTree>
       <p:nvGrpSpPr>
         <p:cNvPr id="1" name=""/>
         <p:cNvGrpSpPr/>
         <p:nvPr/>
       </p:nvGrpSpPr>
-      <p:grpSpPr>
-        <a:xfrm>
-          <a:off x="0" y="0"/>
-          <a:ext cx="0" cy="0"/>
-          <a:chOff x="0" y="0"/>
-          <a:chExt cx="0" cy="0"/>
-        </a:xfrm>
-      </p:grpSpPr>
+      <p:grpSpPr/>
       <p:sp>
         <p:nvSpPr>
           <p:cNvPr id="2" name="Text 0">
             <a:extLst>
               <a:ext uri="{FF2B5EF4-FFF2-40B4-BE49-F238E27FC236}">
-                <a16:creationId xmlns:a16="http://schemas.microsoft.com/office/drawing/2014/main" id="{551B2EDE-56D0-4896-9CD6-C86D14D34152}"/>
+                <a16:creationId xmlns:a16="http://schemas.microsoft.com/office/drawing/2014/main" id="{09AB9A9A-0947-462E-934E-B2400BC5469D}"/>
               </a:ext>
             </a:extLst>
           </p:cNvPr>
@@ -12336,7 +13589,7 @@
           <p:cNvPr id="3" name="Text 1">
             <a:extLst>
               <a:ext uri="{FF2B5EF4-FFF2-40B4-BE49-F238E27FC236}">
-                <a16:creationId xmlns:a16="http://schemas.microsoft.com/office/drawing/2014/main" id="{85CFE9F8-72DD-4CCB-85CF-7C658CE0B028}"/>
+                <a16:creationId xmlns:a16="http://schemas.microsoft.com/office/drawing/2014/main" id="{5D4F55D9-27D4-46C6-8E07-7E01E2F5FE75}"/>
               </a:ext>
             </a:extLst>
           </p:cNvPr>
@@ -12382,7 +13635,7 @@
           <p:cNvPr id="4" name="Shape 2">
             <a:extLst>
               <a:ext uri="{FF2B5EF4-FFF2-40B4-BE49-F238E27FC236}">
-                <a16:creationId xmlns:a16="http://schemas.microsoft.com/office/drawing/2014/main" id="{755E14C0-7D13-4B50-A92E-306CDCC99592}"/>
+                <a16:creationId xmlns:a16="http://schemas.microsoft.com/office/drawing/2014/main" id="{7C05EB8C-1AB1-4E56-84FE-958525890D5F}"/>
               </a:ext>
             </a:extLst>
           </p:cNvPr>
@@ -12409,10 +13662,14 @@
             <a:prstDash val="solid"/>
           </a:ln>
         </p:spPr>
+        <p:txBody>
+          <a:bodyPr/>
+          <a:p/>
+        </p:txBody>
       </p:sp>
       <p:pic>
         <p:nvPicPr>
-          <p:cNvPr id="29" name="Image 0"/>
+          <p:cNvPr id="43" name="Image 0"/>
           <p:cNvPicPr>
             <a:picLocks noChangeAspect="1"/>
           </p:cNvPicPr>
@@ -12436,14 +13693,14 @@
       </p:pic>
       <p:pic>
         <p:nvPicPr>
-          <p:cNvPr id="30" name="Image 1"/>
+          <p:cNvPr id="44" name="Image 1"/>
           <p:cNvPicPr>
             <a:picLocks noChangeAspect="1"/>
           </p:cNvPicPr>
           <p:nvPr/>
         </p:nvPicPr>
         <p:blipFill>
-          <a:blip r:embed="rId4"/>
+          <a:blip r:embed="rId10"/>
           <a:stretch>
             <a:fillRect/>
           </a:stretch>
@@ -12463,7 +13720,7 @@
           <p:cNvPr id="7" name="Shape 3">
             <a:extLst>
               <a:ext uri="{FF2B5EF4-FFF2-40B4-BE49-F238E27FC236}">
-                <a16:creationId xmlns:a16="http://schemas.microsoft.com/office/drawing/2014/main" id="{E404997F-173C-4E22-A72E-8CFB412D7706}"/>
+                <a16:creationId xmlns:a16="http://schemas.microsoft.com/office/drawing/2014/main" id="{A1F127FB-81B4-41A8-9C45-AA7F15155A0B}"/>
               </a:ext>
             </a:extLst>
           </p:cNvPr>
@@ -12488,13 +13745,17 @@
             <a:prstDash val="solid"/>
           </a:ln>
         </p:spPr>
+        <p:txBody>
+          <a:bodyPr/>
+          <a:p/>
+        </p:txBody>
       </p:sp>
       <p:sp>
         <p:nvSpPr>
           <p:cNvPr id="8" name="Text 4">
             <a:extLst>
               <a:ext uri="{FF2B5EF4-FFF2-40B4-BE49-F238E27FC236}">
-                <a16:creationId xmlns:a16="http://schemas.microsoft.com/office/drawing/2014/main" id="{6CF796B5-56F1-4890-B330-5869D287A6B5}"/>
+                <a16:creationId xmlns:a16="http://schemas.microsoft.com/office/drawing/2014/main" id="{F3EF31C9-BAC9-43A5-9588-35F774ADA48D}"/>
               </a:ext>
             </a:extLst>
           </p:cNvPr>
@@ -12529,7 +13790,7 @@
                 <a:ea typeface="Calibri"/>
                 <a:cs typeface="Calibri"/>
               </a:rPr>
-              <a:t>4 | Kunci challenge SLI, SLO, p95</a:t>
+              <a:t>Bukti pemulihan | Next.js UP lagi</a:t>
             </a:r>
             <a:endParaRPr sz="2200"/>
           </a:p>
@@ -12540,7 +13801,7 @@
           <p:cNvPr id="9" name="Text 5">
             <a:extLst>
               <a:ext uri="{FF2B5EF4-FFF2-40B4-BE49-F238E27FC236}">
-                <a16:creationId xmlns:a16="http://schemas.microsoft.com/office/drawing/2014/main" id="{12F1C4EB-98E2-4DC3-9D82-FB87203F7327}"/>
+                <a16:creationId xmlns:a16="http://schemas.microsoft.com/office/drawing/2014/main" id="{3ED02C09-C53D-4B52-BD4C-71B1FEDDAD1D}"/>
               </a:ext>
             </a:extLst>
           </p:cNvPr>
@@ -12575,7 +13836,7 @@
                 <a:ea typeface="Calibri"/>
                 <a:cs typeface="Calibri"/>
               </a:rPr>
-              <a:t>Baca report.py; hitung dari data yang benar</a:t>
+              <a:t>Pemulihan simulasi insiden: Next.js UP, histori gagal tetap dihitung</a:t>
             </a:r>
             <a:endParaRPr sz="1200"/>
           </a:p>
@@ -12586,7 +13847,7 @@
           <p:cNvPr id="10" name="Shape 6">
             <a:extLst>
               <a:ext uri="{FF2B5EF4-FFF2-40B4-BE49-F238E27FC236}">
-                <a16:creationId xmlns:a16="http://schemas.microsoft.com/office/drawing/2014/main" id="{DF8CC7F4-ED35-4A04-8415-70ACD2C0A81E}"/>
+                <a16:creationId xmlns:a16="http://schemas.microsoft.com/office/drawing/2014/main" id="{4511F3F0-6A98-41EF-8649-E696F4C9BFF2}"/>
               </a:ext>
             </a:extLst>
           </p:cNvPr>
@@ -12604,166 +13865,767 @@
             <a:avLst/>
           </a:prstGeom>
           <a:solidFill>
-            <a:srgbClr val="1E293B"/>
+            <a:srgbClr val="F8FAFC"/>
           </a:solidFill>
           <a:ln w="12700">
             <a:solidFill>
-              <a:srgbClr val="0F172A"/>
+              <a:srgbClr val="E2E8F0"/>
             </a:solidFill>
             <a:prstDash val="solid"/>
           </a:ln>
         </p:spPr>
-      </p:sp>
-      <p:sp>
-        <p:nvSpPr>
-          <p:cNvPr id="11" name="Shape 7">
-            <a:extLst>
-              <a:ext uri="{FF2B5EF4-FFF2-40B4-BE49-F238E27FC236}">
-                <a16:creationId xmlns:a16="http://schemas.microsoft.com/office/drawing/2014/main" id="{B411C01C-0CB8-4154-B3A8-6D74E1D55C0A}"/>
-              </a:ext>
-            </a:extLst>
-          </p:cNvPr>
-          <p:cNvSpPr>
-            <a:spLocks noGrp="1"/>
-          </p:cNvSpPr>
-          <p:nvPr/>
-        </p:nvSpPr>
-        <p:spPr>
-          <a:xfrm>
-            <a:off x="457200" y="1417320"/>
-            <a:ext cx="5577840" cy="274320"/>
+        <p:txBody>
+          <a:bodyPr/>
+          <a:p/>
+        </p:txBody>
+      </p:sp>
+      <p:sp>
+        <p:nvSpPr>
+          <p:cNvPr id="11" name="Text 7">
+            <a:extLst>
+              <a:ext uri="{FF2B5EF4-FFF2-40B4-BE49-F238E27FC236}">
+                <a16:creationId xmlns:a16="http://schemas.microsoft.com/office/drawing/2014/main" id="{B0515DAC-679C-41E5-BEF3-470237094B6D}"/>
+              </a:ext>
+            </a:extLst>
+          </p:cNvPr>
+          <p:cNvSpPr>
+            <a:spLocks noGrp="1"/>
+          </p:cNvSpPr>
+          <p:nvPr/>
+        </p:nvSpPr>
+        <p:spPr>
+          <a:xfrm>
+            <a:off x="685800" y="1600200"/>
+            <a:ext cx="5120640" cy="822960"/>
+          </a:xfrm>
+          <a:prstGeom prst="rect">
+            <a:avLst/>
+          </a:prstGeom>
+          <a:noFill/>
+        </p:spPr>
+        <p:txBody>
+          <a:bodyPr wrap="square" lIns="0" tIns="0" rIns="0" bIns="0" anchor="ctr"/>
+          <a:lstStyle/>
+          <a:p>
+            <a:pPr marL="0" indent="0">
+              <a:buNone/>
+            </a:pPr>
+            <a:r>
+              <a:rPr lang="en-US" sz="1100" b="1" spc="300">
+                <a:solidFill>
+                  <a:srgbClr val="F37021"/>
+                </a:solidFill>
+                <a:latin typeface="Calibri"/>
+                <a:ea typeface="Calibri"/>
+                <a:cs typeface="Calibri"/>
+              </a:rPr>
+              <a:t>PERINTAH, FUNGSI, DAN HASIL</a:t>
+            </a:r>
+            <a:endParaRPr sz="1100"/>
+          </a:p>
+        </p:txBody>
+      </p:sp>
+      <p:pic>
+        <p:nvPicPr>
+          <p:cNvPr id="50" name="Image 2"/>
+          <p:cNvPicPr>
+            <a:picLocks noChangeAspect="1"/>
+          </p:cNvPicPr>
+          <p:nvPr/>
+        </p:nvPicPr>
+        <p:blipFill>
+          <a:blip r:embed="rId8"/>
+          <a:stretch>
+            <a:fillRect/>
+          </a:stretch>
+        </p:blipFill>
+        <p:spPr>
+          <a:xfrm>
+            <a:off x="777240" y="2697480"/>
+            <a:ext cx="292608" cy="292608"/>
+          </a:xfrm>
+          <a:prstGeom prst="rect">
+            <a:avLst/>
+          </a:prstGeom>
+        </p:spPr>
+      </p:pic>
+      <p:sp>
+        <p:nvSpPr>
+          <p:cNvPr id="13" name="Text 8">
+            <a:extLst>
+              <a:ext uri="{FF2B5EF4-FFF2-40B4-BE49-F238E27FC236}">
+                <a16:creationId xmlns:a16="http://schemas.microsoft.com/office/drawing/2014/main" id="{7777633E-25E8-473B-85D1-A2CCDB704DE5}"/>
+              </a:ext>
+            </a:extLst>
+          </p:cNvPr>
+          <p:cNvSpPr>
+            <a:spLocks noGrp="1"/>
+          </p:cNvSpPr>
+          <p:nvPr/>
+        </p:nvSpPr>
+        <p:spPr>
+          <a:xfrm>
+            <a:off x="1207008" y="2606040"/>
+            <a:ext cx="4709160" cy="457200"/>
+          </a:xfrm>
+          <a:prstGeom prst="rect">
+            <a:avLst/>
+          </a:prstGeom>
+          <a:noFill/>
+        </p:spPr>
+        <p:txBody>
+          <a:bodyPr wrap="square" lIns="0" tIns="0" rIns="0" bIns="0" anchor="ctr"/>
+          <a:lstStyle/>
+          <a:p>
+            <a:pPr marL="0" indent="0">
+              <a:buNone/>
+            </a:pPr>
+            <a:r>
+              <a:rPr lang="en-US" sz="1400">
+                <a:solidFill>
+                  <a:srgbClr val="312124"/>
+                </a:solidFill>
+                <a:latin typeface="Aptos" panose="020B0004020202020204" pitchFamily="34" charset="0"/>
+                <a:ea typeface="Calibri"/>
+                <a:cs typeface="Calibri"/>
+              </a:rPr>
+              <a:t>Jalankan npm run dev Lab 08 lagi.</a:t>
+            </a:r>
+            <a:endParaRPr sz="1400">
+              <a:solidFill>
+                <a:srgbClr val="312124"/>
+              </a:solidFill>
+              <a:latin typeface="Aptos" panose="020B0004020202020204" pitchFamily="34" charset="0"/>
+            </a:endParaRPr>
+          </a:p>
+        </p:txBody>
+      </p:sp>
+      <p:pic>
+        <p:nvPicPr>
+          <p:cNvPr id="52" name="Image 3"/>
+          <p:cNvPicPr>
+            <a:picLocks noChangeAspect="1"/>
+          </p:cNvPicPr>
+          <p:nvPr/>
+        </p:nvPicPr>
+        <p:blipFill>
+          <a:blip r:embed="rId6"/>
+          <a:stretch>
+            <a:fillRect/>
+          </a:stretch>
+        </p:blipFill>
+        <p:spPr>
+          <a:xfrm>
+            <a:off x="777240" y="3200400"/>
+            <a:ext cx="292608" cy="292608"/>
+          </a:xfrm>
+          <a:prstGeom prst="rect">
+            <a:avLst/>
+          </a:prstGeom>
+        </p:spPr>
+      </p:pic>
+      <p:sp>
+        <p:nvSpPr>
+          <p:cNvPr id="15" name="Text 9">
+            <a:extLst>
+              <a:ext uri="{FF2B5EF4-FFF2-40B4-BE49-F238E27FC236}">
+                <a16:creationId xmlns:a16="http://schemas.microsoft.com/office/drawing/2014/main" id="{F45398AE-0FB6-42F9-BADC-B4E51CAC94BD}"/>
+              </a:ext>
+            </a:extLst>
+          </p:cNvPr>
+          <p:cNvSpPr>
+            <a:spLocks noGrp="1"/>
+          </p:cNvSpPr>
+          <p:nvPr/>
+        </p:nvSpPr>
+        <p:spPr>
+          <a:xfrm>
+            <a:off x="1207008" y="3108960"/>
+            <a:ext cx="4709160" cy="457200"/>
+          </a:xfrm>
+          <a:prstGeom prst="rect">
+            <a:avLst/>
+          </a:prstGeom>
+          <a:noFill/>
+        </p:spPr>
+        <p:txBody>
+          <a:bodyPr wrap="square" lIns="0" tIns="0" rIns="0" bIns="0" anchor="ctr"/>
+          <a:lstStyle/>
+          <a:p>
+            <a:pPr marL="0" indent="0">
+              <a:buNone/>
+            </a:pPr>
+            <a:r>
+              <a:rPr lang="en-US" sz="1400">
+                <a:solidFill>
+                  <a:srgbClr val="312124"/>
+                </a:solidFill>
+                <a:latin typeface="Aptos" panose="020B0004020202020204" pitchFamily="34" charset="0"/>
+                <a:ea typeface="Calibri"/>
+                <a:cs typeface="Calibri"/>
+              </a:rPr>
+              <a:t>monitor.py --count 1 tanpa --reset.</a:t>
+            </a:r>
+            <a:endParaRPr sz="1400">
+              <a:solidFill>
+                <a:srgbClr val="312124"/>
+              </a:solidFill>
+              <a:latin typeface="Aptos" panose="020B0004020202020204" pitchFamily="34" charset="0"/>
+            </a:endParaRPr>
+          </a:p>
+        </p:txBody>
+      </p:sp>
+      <p:pic>
+        <p:nvPicPr>
+          <p:cNvPr id="54" name="Image 4"/>
+          <p:cNvPicPr>
+            <a:picLocks noChangeAspect="1"/>
+          </p:cNvPicPr>
+          <p:nvPr/>
+        </p:nvPicPr>
+        <p:blipFill>
+          <a:blip r:embed="rId4"/>
+          <a:stretch>
+            <a:fillRect/>
+          </a:stretch>
+        </p:blipFill>
+        <p:spPr>
+          <a:xfrm>
+            <a:off x="777240" y="3703320"/>
+            <a:ext cx="292608" cy="292608"/>
+          </a:xfrm>
+          <a:prstGeom prst="rect">
+            <a:avLst/>
+          </a:prstGeom>
+        </p:spPr>
+      </p:pic>
+      <p:sp>
+        <p:nvSpPr>
+          <p:cNvPr id="17" name="Text 10">
+            <a:extLst>
+              <a:ext uri="{FF2B5EF4-FFF2-40B4-BE49-F238E27FC236}">
+                <a16:creationId xmlns:a16="http://schemas.microsoft.com/office/drawing/2014/main" id="{3465C8B5-2F2E-41A5-9CE8-A1140A05F92B}"/>
+              </a:ext>
+            </a:extLst>
+          </p:cNvPr>
+          <p:cNvSpPr>
+            <a:spLocks noGrp="1"/>
+          </p:cNvSpPr>
+          <p:nvPr/>
+        </p:nvSpPr>
+        <p:spPr>
+          <a:xfrm>
+            <a:off x="1207008" y="3611880"/>
+            <a:ext cx="4709160" cy="457200"/>
+          </a:xfrm>
+          <a:prstGeom prst="rect">
+            <a:avLst/>
+          </a:prstGeom>
+          <a:noFill/>
+        </p:spPr>
+        <p:txBody>
+          <a:bodyPr wrap="square" lIns="0" tIns="0" rIns="0" bIns="0" anchor="ctr"/>
+          <a:lstStyle/>
+          <a:p>
+            <a:pPr marL="0" indent="0">
+              <a:buNone/>
+            </a:pPr>
+            <a:r>
+              <a:rPr lang="en-US" sz="1400">
+                <a:solidFill>
+                  <a:srgbClr val="312124"/>
+                </a:solidFill>
+                <a:latin typeface="Aptos" panose="020B0004020202020204" pitchFamily="34" charset="0"/>
+                <a:ea typeface="Calibri"/>
+                <a:cs typeface="Calibri"/>
+              </a:rPr>
+              <a:t>report.py menghitung seluruh histori.</a:t>
+            </a:r>
+            <a:endParaRPr sz="1400">
+              <a:solidFill>
+                <a:srgbClr val="312124"/>
+              </a:solidFill>
+              <a:latin typeface="Aptos" panose="020B0004020202020204" pitchFamily="34" charset="0"/>
+            </a:endParaRPr>
+          </a:p>
+        </p:txBody>
+      </p:sp>
+      <p:pic>
+        <p:nvPicPr>
+          <p:cNvPr id="56" name="Image 5"/>
+          <p:cNvPicPr>
+            <a:picLocks noChangeAspect="1"/>
+          </p:cNvPicPr>
+          <p:nvPr/>
+        </p:nvPicPr>
+        <p:blipFill>
+          <a:blip r:embed="rId2"/>
+          <a:stretch>
+            <a:fillRect/>
+          </a:stretch>
+        </p:blipFill>
+        <p:spPr>
+          <a:xfrm>
+            <a:off x="777240" y="4206240"/>
+            <a:ext cx="292608" cy="292608"/>
+          </a:xfrm>
+          <a:prstGeom prst="rect">
+            <a:avLst/>
+          </a:prstGeom>
+        </p:spPr>
+      </p:pic>
+      <p:sp>
+        <p:nvSpPr>
+          <p:cNvPr id="19" name="Text 11">
+            <a:extLst>
+              <a:ext uri="{FF2B5EF4-FFF2-40B4-BE49-F238E27FC236}">
+                <a16:creationId xmlns:a16="http://schemas.microsoft.com/office/drawing/2014/main" id="{E3BA35A8-245C-4E42-B810-578F386C675B}"/>
+              </a:ext>
+            </a:extLst>
+          </p:cNvPr>
+          <p:cNvSpPr>
+            <a:spLocks noGrp="1"/>
+          </p:cNvSpPr>
+          <p:nvPr/>
+        </p:nvSpPr>
+        <p:spPr>
+          <a:xfrm>
+            <a:off x="1207008" y="4114800"/>
+            <a:ext cx="4709160" cy="457200"/>
+          </a:xfrm>
+          <a:prstGeom prst="rect">
+            <a:avLst/>
+          </a:prstGeom>
+          <a:noFill/>
+        </p:spPr>
+        <p:txBody>
+          <a:bodyPr wrap="square" lIns="0" tIns="0" rIns="0" bIns="0" anchor="ctr"/>
+          <a:lstStyle/>
+          <a:p>
+            <a:pPr marL="0" indent="0">
+              <a:buNone/>
+            </a:pPr>
+            <a:r>
+              <a:rPr lang="fr-FR" sz="1400">
+                <a:solidFill>
+                  <a:srgbClr val="312124"/>
+                </a:solidFill>
+                <a:latin typeface="Aptos" panose="020B0004020202020204" pitchFamily="34" charset="0"/>
+                <a:ea typeface="Calibri"/>
+                <a:cs typeface="Calibri"/>
+              </a:rPr>
+              <a:t>status.py memperbarui status.html.</a:t>
+            </a:r>
+            <a:endParaRPr sz="1400">
+              <a:solidFill>
+                <a:srgbClr val="312124"/>
+              </a:solidFill>
+              <a:latin typeface="Aptos" panose="020B0004020202020204" pitchFamily="34" charset="0"/>
+            </a:endParaRPr>
+          </a:p>
+        </p:txBody>
+      </p:sp>
+      <p:pic>
+        <p:nvPicPr>
+          <p:cNvPr id="58" name="Image 6"/>
+          <p:cNvPicPr>
+            <a:picLocks noChangeAspect="1"/>
+          </p:cNvPicPr>
+          <p:nvPr/>
+        </p:nvPicPr>
+        <p:blipFill>
+          <a:blip r:embed="rId11"/>
+          <a:stretch>
+            <a:fillRect/>
+          </a:stretch>
+        </p:blipFill>
+        <p:spPr>
+          <a:xfrm>
+            <a:off x="777240" y="4709160"/>
+            <a:ext cx="292608" cy="292608"/>
+          </a:xfrm>
+          <a:prstGeom prst="rect">
+            <a:avLst/>
+          </a:prstGeom>
+        </p:spPr>
+      </p:pic>
+      <p:sp>
+        <p:nvSpPr>
+          <p:cNvPr id="21" name="Text 12">
+            <a:extLst>
+              <a:ext uri="{FF2B5EF4-FFF2-40B4-BE49-F238E27FC236}">
+                <a16:creationId xmlns:a16="http://schemas.microsoft.com/office/drawing/2014/main" id="{AE08E845-E5A0-4491-8981-3F3026909A6E}"/>
+              </a:ext>
+            </a:extLst>
+          </p:cNvPr>
+          <p:cNvSpPr>
+            <a:spLocks noGrp="1"/>
+          </p:cNvSpPr>
+          <p:nvPr/>
+        </p:nvSpPr>
+        <p:spPr>
+          <a:xfrm>
+            <a:off x="1207008" y="4617720"/>
+            <a:ext cx="4709160" cy="457200"/>
+          </a:xfrm>
+          <a:prstGeom prst="rect">
+            <a:avLst/>
+          </a:prstGeom>
+          <a:noFill/>
+        </p:spPr>
+        <p:txBody>
+          <a:bodyPr wrap="square" lIns="0" tIns="0" rIns="0" bIns="0" anchor="ctr"/>
+          <a:lstStyle/>
+          <a:p>
+            <a:pPr marL="0" indent="0">
+              <a:buNone/>
+            </a:pPr>
+            <a:r>
+              <a:rPr lang="en-US" sz="1400">
+                <a:solidFill>
+                  <a:srgbClr val="312124"/>
+                </a:solidFill>
+                <a:latin typeface="Aptos" panose="020B0004020202020204" pitchFamily="34" charset="0"/>
+                <a:ea typeface="Calibri"/>
+                <a:cs typeface="Calibri"/>
+              </a:rPr>
+              <a:t>Next.js UP; 4/6 = 66,67%.</a:t>
+            </a:r>
+            <a:endParaRPr sz="1400">
+              <a:solidFill>
+                <a:srgbClr val="312124"/>
+              </a:solidFill>
+              <a:latin typeface="Aptos" panose="020B0004020202020204" pitchFamily="34" charset="0"/>
+            </a:endParaRPr>
+          </a:p>
+        </p:txBody>
+      </p:sp>
+      <p:pic>
+        <p:nvPicPr>
+          <p:cNvPr id="60" name="Image 7"/>
+          <p:cNvPicPr>
+            <a:picLocks noChangeAspect="1"/>
+          </p:cNvPicPr>
+          <p:nvPr/>
+        </p:nvPicPr>
+        <p:blipFill>
+          <a:blip r:embed="rId9"/>
+          <a:stretch>
+            <a:fillRect/>
+          </a:stretch>
+        </p:blipFill>
+        <p:spPr>
+          <a:xfrm>
+            <a:off x="777240" y="5212080"/>
+            <a:ext cx="292608" cy="292608"/>
+          </a:xfrm>
+          <a:prstGeom prst="rect">
+            <a:avLst/>
+          </a:prstGeom>
+        </p:spPr>
+      </p:pic>
+      <p:sp>
+        <p:nvSpPr>
+          <p:cNvPr id="23" name="Text 13">
+            <a:extLst>
+              <a:ext uri="{FF2B5EF4-FFF2-40B4-BE49-F238E27FC236}">
+                <a16:creationId xmlns:a16="http://schemas.microsoft.com/office/drawing/2014/main" id="{3AAF5F71-8C83-45DD-A1C2-6A37AE7ADA37}"/>
+              </a:ext>
+            </a:extLst>
+          </p:cNvPr>
+          <p:cNvSpPr>
+            <a:spLocks noGrp="1"/>
+          </p:cNvSpPr>
+          <p:nvPr/>
+        </p:nvSpPr>
+        <p:spPr>
+          <a:xfrm>
+            <a:off x="1207008" y="5120640"/>
+            <a:ext cx="4709160" cy="457200"/>
+          </a:xfrm>
+          <a:prstGeom prst="rect">
+            <a:avLst/>
+          </a:prstGeom>
+          <a:noFill/>
+        </p:spPr>
+        <p:txBody>
+          <a:bodyPr wrap="square" lIns="0" tIns="0" rIns="0" bIns="0" anchor="ctr"/>
+          <a:lstStyle/>
+          <a:p>
+            <a:pPr marL="0" indent="0">
+              <a:buNone/>
+            </a:pPr>
+            <a:r>
+              <a:rPr lang="nb-NO" sz="1400">
+                <a:solidFill>
+                  <a:srgbClr val="312124"/>
+                </a:solidFill>
+                <a:latin typeface="Aptos" panose="020B0004020202020204" pitchFamily="34" charset="0"/>
+                <a:ea typeface="Calibri"/>
+                <a:cs typeface="Calibri"/>
+              </a:rPr>
+              <a:t>Budget tetap negatif: -1,94 check.</a:t>
+            </a:r>
+            <a:endParaRPr sz="1400">
+              <a:solidFill>
+                <a:srgbClr val="312124"/>
+              </a:solidFill>
+              <a:latin typeface="Aptos" panose="020B0004020202020204" pitchFamily="34" charset="0"/>
+            </a:endParaRPr>
+          </a:p>
+        </p:txBody>
+      </p:sp>
+      <p:pic>
+        <p:nvPicPr>
+          <p:cNvPr id="62" name="Image 8"/>
+          <p:cNvPicPr>
+            <a:picLocks noChangeAspect="1"/>
+          </p:cNvPicPr>
+          <p:nvPr/>
+        </p:nvPicPr>
+        <p:blipFill>
+          <a:blip r:embed="rId7"/>
+          <a:stretch>
+            <a:fillRect/>
+          </a:stretch>
+        </p:blipFill>
+        <p:spPr>
+          <a:xfrm>
+            <a:off x="777240" y="5715000"/>
+            <a:ext cx="292608" cy="292608"/>
+          </a:xfrm>
+          <a:prstGeom prst="rect">
+            <a:avLst/>
+          </a:prstGeom>
+        </p:spPr>
+      </p:pic>
+      <p:sp>
+        <p:nvSpPr>
+          <p:cNvPr id="25" name="Text 14">
+            <a:extLst>
+              <a:ext uri="{FF2B5EF4-FFF2-40B4-BE49-F238E27FC236}">
+                <a16:creationId xmlns:a16="http://schemas.microsoft.com/office/drawing/2014/main" id="{C7CDA5B9-11CE-4C44-977A-C028B4EEF951}"/>
+              </a:ext>
+            </a:extLst>
+          </p:cNvPr>
+          <p:cNvSpPr>
+            <a:spLocks noGrp="1"/>
+          </p:cNvSpPr>
+          <p:nvPr/>
+        </p:nvSpPr>
+        <p:spPr>
+          <a:xfrm>
+            <a:off x="1207008" y="5623560"/>
+            <a:ext cx="4709160" cy="457200"/>
+          </a:xfrm>
+          <a:prstGeom prst="rect">
+            <a:avLst/>
+          </a:prstGeom>
+          <a:noFill/>
+        </p:spPr>
+        <p:txBody>
+          <a:bodyPr wrap="square" lIns="0" tIns="0" rIns="0" bIns="0" anchor="ctr"/>
+          <a:lstStyle/>
+          <a:p>
+            <a:pPr marL="0" indent="0">
+              <a:buNone/>
+            </a:pPr>
+            <a:r>
+              <a:rPr lang="en-US" sz="1400">
+                <a:solidFill>
+                  <a:srgbClr val="312124"/>
+                </a:solidFill>
+                <a:latin typeface="Aptos" panose="020B0004020202020204" pitchFamily="34" charset="0"/>
+                <a:ea typeface="Calibri"/>
+                <a:cs typeface="Calibri"/>
+              </a:rPr>
+              <a:t>API dan Gradio tetap UP 6/6.</a:t>
+            </a:r>
+            <a:endParaRPr sz="1400">
+              <a:solidFill>
+                <a:srgbClr val="312124"/>
+              </a:solidFill>
+              <a:latin typeface="Aptos" panose="020B0004020202020204" pitchFamily="34" charset="0"/>
+            </a:endParaRPr>
+          </a:p>
+        </p:txBody>
+      </p:sp>
+      <p:sp>
+        <p:nvSpPr>
+          <p:cNvPr id="26" name="Shape 15">
+            <a:extLst>
+              <a:ext uri="{FF2B5EF4-FFF2-40B4-BE49-F238E27FC236}">
+                <a16:creationId xmlns:a16="http://schemas.microsoft.com/office/drawing/2014/main" id="{700288CD-FD9B-460A-854F-55CBD9ABDC2C}"/>
+              </a:ext>
+            </a:extLst>
+          </p:cNvPr>
+          <p:cNvSpPr>
+            <a:spLocks noGrp="1"/>
+          </p:cNvSpPr>
+          <p:nvPr/>
+        </p:nvSpPr>
+        <p:spPr>
+          <a:xfrm>
+            <a:off x="6217920" y="1417320"/>
+            <a:ext cx="5486400" cy="4754880"/>
           </a:xfrm>
           <a:prstGeom prst="rect">
             <a:avLst/>
           </a:prstGeom>
           <a:solidFill>
-            <a:srgbClr val="0F172A"/>
+            <a:srgbClr val="002677"/>
           </a:solidFill>
           <a:ln w="12700">
             <a:solidFill>
-              <a:srgbClr val="0F172A"/>
+              <a:srgbClr val="002677"/>
             </a:solidFill>
             <a:prstDash val="solid"/>
           </a:ln>
         </p:spPr>
-      </p:sp>
-      <p:sp>
-        <p:nvSpPr>
-          <p:cNvPr id="12" name="Shape 8">
-            <a:extLst>
-              <a:ext uri="{FF2B5EF4-FFF2-40B4-BE49-F238E27FC236}">
-                <a16:creationId xmlns:a16="http://schemas.microsoft.com/office/drawing/2014/main" id="{462527B0-2FD1-4F8F-9486-ECDEEC6C79F1}"/>
-              </a:ext>
-            </a:extLst>
-          </p:cNvPr>
-          <p:cNvSpPr>
-            <a:spLocks noGrp="1"/>
-          </p:cNvSpPr>
-          <p:nvPr/>
-        </p:nvSpPr>
-        <p:spPr>
-          <a:xfrm>
-            <a:off x="548640" y="1499616"/>
-            <a:ext cx="109728" cy="109728"/>
-          </a:xfrm>
-          <a:prstGeom prst="ellipse">
+        <p:txBody>
+          <a:bodyPr/>
+          <a:p/>
+        </p:txBody>
+      </p:sp>
+      <p:sp>
+        <p:nvSpPr>
+          <p:cNvPr id="27" name="Text 16">
+            <a:extLst>
+              <a:ext uri="{FF2B5EF4-FFF2-40B4-BE49-F238E27FC236}">
+                <a16:creationId xmlns:a16="http://schemas.microsoft.com/office/drawing/2014/main" id="{CB3350F3-3296-426D-863F-177ECABD3178}"/>
+              </a:ext>
+            </a:extLst>
+          </p:cNvPr>
+          <p:cNvSpPr>
+            <a:spLocks noGrp="1"/>
+          </p:cNvSpPr>
+          <p:nvPr/>
+        </p:nvSpPr>
+        <p:spPr>
+          <a:xfrm>
+            <a:off x="6446520" y="1508760"/>
+            <a:ext cx="5120640" cy="457200"/>
+          </a:xfrm>
+          <a:prstGeom prst="rect">
+            <a:avLst/>
+          </a:prstGeom>
+          <a:noFill/>
+        </p:spPr>
+        <p:txBody>
+          <a:bodyPr wrap="square" lIns="0" tIns="0" rIns="0" bIns="0" anchor="ctr"/>
+          <a:lstStyle/>
+          <a:p>
+            <a:pPr marL="0" indent="0">
+              <a:buNone/>
+            </a:pPr>
+            <a:r>
+              <a:rPr lang="en-US" sz="1100" b="1" spc="300">
+                <a:solidFill>
+                  <a:srgbClr val="F37021"/>
+                </a:solidFill>
+                <a:latin typeface="Calibri"/>
+                <a:ea typeface="Calibri"/>
+                <a:cs typeface="Calibri"/>
+              </a:rPr>
+              <a:t>BUKTI PADA MESIN UJI</a:t>
+            </a:r>
+            <a:endParaRPr sz="1100"/>
+          </a:p>
+        </p:txBody>
+      </p:sp>
+      <p:sp>
+        <p:nvSpPr>
+          <p:cNvPr id="28" name="Text 17">
+            <a:extLst>
+              <a:ext uri="{FF2B5EF4-FFF2-40B4-BE49-F238E27FC236}">
+                <a16:creationId xmlns:a16="http://schemas.microsoft.com/office/drawing/2014/main" id="{A18E4DFD-E12D-4609-A35A-914A51AE19D2}"/>
+              </a:ext>
+            </a:extLst>
+          </p:cNvPr>
+          <p:cNvSpPr>
+            <a:spLocks noGrp="1"/>
+          </p:cNvSpPr>
+          <p:nvPr/>
+        </p:nvSpPr>
+        <p:spPr>
+          <a:xfrm>
+            <a:off x="6446520" y="2606040"/>
+            <a:ext cx="5029200" cy="2743200"/>
+          </a:xfrm>
+          <a:prstGeom prst="rect">
+            <a:avLst/>
+          </a:prstGeom>
+          <a:noFill/>
+        </p:spPr>
+        <p:txBody>
+          <a:bodyPr wrap="square" anchor="ctr"/>
+          <a:lstStyle/>
+          <a:p>
+            <a:pPr marL="0" indent="0">
+              <a:spcAft>
+                <a:spcPts val="600"/>
+              </a:spcAft>
+              <a:buNone/>
+            </a:pPr>
+            <a:endParaRPr sz="1200"/>
+          </a:p>
+        </p:txBody>
+      </p:sp>
+      <p:sp>
+        <p:nvSpPr>
+          <p:cNvPr id="29" name="Shape 18">
+            <a:extLst>
+              <a:ext uri="{FF2B5EF4-FFF2-40B4-BE49-F238E27FC236}">
+                <a16:creationId xmlns:a16="http://schemas.microsoft.com/office/drawing/2014/main" id="{F0706024-38A2-416F-B205-77840F63871B}"/>
+              </a:ext>
+            </a:extLst>
+          </p:cNvPr>
+          <p:cNvSpPr>
+            <a:spLocks noGrp="1"/>
+          </p:cNvSpPr>
+          <p:nvPr/>
+        </p:nvSpPr>
+        <p:spPr>
+          <a:xfrm>
+            <a:off x="6446520" y="5349240"/>
+            <a:ext cx="5029200" cy="731520"/>
+          </a:xfrm>
+          <a:prstGeom prst="rect">
             <a:avLst/>
           </a:prstGeom>
           <a:solidFill>
-            <a:srgbClr val="EF4444"/>
+            <a:srgbClr val="F37021"/>
           </a:solidFill>
           <a:ln w="12700">
             <a:solidFill>
-              <a:srgbClr val="EF4444"/>
+              <a:srgbClr val="F37021"/>
             </a:solidFill>
             <a:prstDash val="solid"/>
           </a:ln>
         </p:spPr>
-      </p:sp>
-      <p:sp>
-        <p:nvSpPr>
-          <p:cNvPr id="13" name="Shape 9">
-            <a:extLst>
-              <a:ext uri="{FF2B5EF4-FFF2-40B4-BE49-F238E27FC236}">
-                <a16:creationId xmlns:a16="http://schemas.microsoft.com/office/drawing/2014/main" id="{DCEA9217-0B7B-4F3D-8F5E-9245E634D2B6}"/>
-              </a:ext>
-            </a:extLst>
-          </p:cNvPr>
-          <p:cNvSpPr>
-            <a:spLocks noGrp="1"/>
-          </p:cNvSpPr>
-          <p:nvPr/>
-        </p:nvSpPr>
-        <p:spPr>
-          <a:xfrm>
-            <a:off x="685800" y="1499616"/>
-            <a:ext cx="109728" cy="109728"/>
-          </a:xfrm>
-          <a:prstGeom prst="ellipse">
-            <a:avLst/>
-          </a:prstGeom>
-          <a:solidFill>
-            <a:srgbClr val="F59E0B"/>
-          </a:solidFill>
-          <a:ln w="12700">
-            <a:solidFill>
-              <a:srgbClr val="F59E0B"/>
-            </a:solidFill>
-            <a:prstDash val="solid"/>
-          </a:ln>
-        </p:spPr>
-      </p:sp>
-      <p:sp>
-        <p:nvSpPr>
-          <p:cNvPr id="14" name="Shape 10">
-            <a:extLst>
-              <a:ext uri="{FF2B5EF4-FFF2-40B4-BE49-F238E27FC236}">
-                <a16:creationId xmlns:a16="http://schemas.microsoft.com/office/drawing/2014/main" id="{5B3A4AC1-4C38-499E-9355-B79B9659CB78}"/>
-              </a:ext>
-            </a:extLst>
-          </p:cNvPr>
-          <p:cNvSpPr>
-            <a:spLocks noGrp="1"/>
-          </p:cNvSpPr>
-          <p:nvPr/>
-        </p:nvSpPr>
-        <p:spPr>
-          <a:xfrm>
-            <a:off x="822960" y="1499616"/>
-            <a:ext cx="109728" cy="109728"/>
-          </a:xfrm>
-          <a:prstGeom prst="ellipse">
-            <a:avLst/>
-          </a:prstGeom>
-          <a:solidFill>
-            <a:srgbClr val="10B981"/>
-          </a:solidFill>
-          <a:ln w="12700">
-            <a:solidFill>
-              <a:srgbClr val="10B981"/>
-            </a:solidFill>
-            <a:prstDash val="solid"/>
-          </a:ln>
-        </p:spPr>
-      </p:sp>
-      <p:sp>
-        <p:nvSpPr>
-          <p:cNvPr id="15" name="Text 11">
-            <a:extLst>
-              <a:ext uri="{FF2B5EF4-FFF2-40B4-BE49-F238E27FC236}">
-                <a16:creationId xmlns:a16="http://schemas.microsoft.com/office/drawing/2014/main" id="{6EB60959-1E9D-4E31-BA36-9E6852BA16D0}"/>
-              </a:ext>
-            </a:extLst>
-          </p:cNvPr>
-          <p:cNvSpPr>
-            <a:spLocks noGrp="1"/>
-          </p:cNvSpPr>
-          <p:nvPr/>
-        </p:nvSpPr>
-        <p:spPr>
-          <a:xfrm>
-            <a:off x="1005840" y="1417320"/>
-            <a:ext cx="4846320" cy="274320"/>
+        <p:txBody>
+          <a:bodyPr/>
+          <a:p/>
+        </p:txBody>
+      </p:sp>
+      <p:sp>
+        <p:nvSpPr>
+          <p:cNvPr id="30" name="Text 19">
+            <a:extLst>
+              <a:ext uri="{FF2B5EF4-FFF2-40B4-BE49-F238E27FC236}">
+                <a16:creationId xmlns:a16="http://schemas.microsoft.com/office/drawing/2014/main" id="{26BEBC0A-D3A9-485A-A70F-650A3A86343C}"/>
+              </a:ext>
+            </a:extLst>
+          </p:cNvPr>
+          <p:cNvSpPr>
+            <a:spLocks noGrp="1"/>
+          </p:cNvSpPr>
+          <p:nvPr/>
+        </p:nvSpPr>
+        <p:spPr>
+          <a:xfrm>
+            <a:off x="6446520" y="5349240"/>
+            <a:ext cx="5029200" cy="731520"/>
           </a:xfrm>
           <a:prstGeom prst="rect">
             <a:avLst/>
@@ -12778,356 +14640,50 @@
               <a:buNone/>
             </a:pPr>
             <a:r>
-              <a:rPr lang="en-US" sz="900">
-                <a:solidFill>
-                  <a:srgbClr val="94A3B8"/>
-                </a:solidFill>
-                <a:latin typeface="Consolas"/>
-                <a:ea typeface="Consolas"/>
-                <a:cs typeface="Consolas"/>
-              </a:rPr>
-              <a:t>Rumus di report.py</a:t>
-            </a:r>
-            <a:endParaRPr sz="900"/>
-          </a:p>
-        </p:txBody>
-      </p:sp>
-      <p:sp>
-        <p:nvSpPr>
-          <p:cNvPr id="16" name="Text 12">
-            <a:extLst>
-              <a:ext uri="{FF2B5EF4-FFF2-40B4-BE49-F238E27FC236}">
-                <a16:creationId xmlns:a16="http://schemas.microsoft.com/office/drawing/2014/main" id="{BC340967-8F8A-42B0-85CE-592D55F14D89}"/>
-              </a:ext>
-            </a:extLst>
-          </p:cNvPr>
-          <p:cNvSpPr>
-            <a:spLocks noGrp="1"/>
-          </p:cNvSpPr>
-          <p:nvPr/>
-        </p:nvSpPr>
-        <p:spPr>
-          <a:xfrm>
-            <a:off x="594360" y="1783080"/>
-            <a:ext cx="5303520" cy="4297680"/>
-          </a:xfrm>
-          <a:prstGeom prst="rect">
-            <a:avLst/>
-          </a:prstGeom>
-          <a:noFill/>
-        </p:spPr>
-        <p:txBody>
-          <a:bodyPr wrap="square" lIns="0" tIns="0" rIns="0" bIns="0" anchor="t"/>
-          <a:lstStyle/>
-          <a:p>
-            <a:pPr marL="0" indent="0">
-              <a:spcAft>
-                <a:spcPts val="200"/>
-              </a:spcAft>
-              <a:buNone/>
-            </a:pPr>
-            <a:r>
-              <a:rPr lang="en-US" sz="1500">
+              <a:rPr lang="fi-FI" sz="1500" i="1">
                 <a:solidFill>
                   <a:srgbClr val="FFFFFF"/>
                 </a:solidFill>
-                <a:latin typeface="Consolas" panose="020B0609020204030204" pitchFamily="49" charset="0"/>
-                <a:ea typeface="Consolas"/>
-                <a:cs typeface="Consolas"/>
+                <a:latin typeface="Aptos" panose="020B0004020202020204" pitchFamily="34" charset="0"/>
+                <a:ea typeface="Calibri"/>
+                <a:cs typeface="Calibri"/>
               </a:rPr>
-              <a:t>availability = len(ok) / len(rows)
-latencies = sorted(r["latency_ms"]
-                   for r in ok)
-p95 = latencies[ceil(.95 * n) - 1]
-budget_total = len(rows) * .01
-budget_spent = len(rows) - len(ok)
-budget_left = budget_total - budget_spent</a:t>
+              <a:t>Status kini UP; SLI masih mencatat insiden.</a:t>
             </a:r>
             <a:endParaRPr sz="1500">
               <a:solidFill>
                 <a:srgbClr val="FFFFFF"/>
               </a:solidFill>
-              <a:latin typeface="Consolas" panose="020B0609020204030204" pitchFamily="49" charset="0"/>
-            </a:endParaRPr>
-          </a:p>
-        </p:txBody>
-      </p:sp>
-      <p:sp>
-        <p:nvSpPr>
-          <p:cNvPr id="17" name="Shape 13">
-            <a:extLst>
-              <a:ext uri="{FF2B5EF4-FFF2-40B4-BE49-F238E27FC236}">
-                <a16:creationId xmlns:a16="http://schemas.microsoft.com/office/drawing/2014/main" id="{9BC739D4-5798-4228-9B77-D0807E2088EF}"/>
-              </a:ext>
-            </a:extLst>
-          </p:cNvPr>
-          <p:cNvSpPr>
-            <a:spLocks noGrp="1"/>
-          </p:cNvSpPr>
-          <p:nvPr/>
-        </p:nvSpPr>
-        <p:spPr>
-          <a:xfrm>
-            <a:off x="6217920" y="1417320"/>
-            <a:ext cx="5486400" cy="4754880"/>
-          </a:xfrm>
-          <a:prstGeom prst="rect">
-            <a:avLst/>
-          </a:prstGeom>
-          <a:solidFill>
-            <a:srgbClr val="1E293B"/>
-          </a:solidFill>
-          <a:ln w="12700">
-            <a:solidFill>
-              <a:srgbClr val="0F172A"/>
-            </a:solidFill>
-            <a:prstDash val="solid"/>
-          </a:ln>
-        </p:spPr>
-      </p:sp>
-      <p:sp>
-        <p:nvSpPr>
-          <p:cNvPr id="18" name="Shape 14">
-            <a:extLst>
-              <a:ext uri="{FF2B5EF4-FFF2-40B4-BE49-F238E27FC236}">
-                <a16:creationId xmlns:a16="http://schemas.microsoft.com/office/drawing/2014/main" id="{FD9EBF0B-E8C4-4AFB-AFE7-B6CEC2B6C004}"/>
-              </a:ext>
-            </a:extLst>
-          </p:cNvPr>
-          <p:cNvSpPr>
-            <a:spLocks noGrp="1"/>
-          </p:cNvSpPr>
-          <p:nvPr/>
-        </p:nvSpPr>
-        <p:spPr>
-          <a:xfrm>
-            <a:off x="6217920" y="1417320"/>
-            <a:ext cx="5486400" cy="274320"/>
-          </a:xfrm>
-          <a:prstGeom prst="rect">
-            <a:avLst/>
-          </a:prstGeom>
-          <a:solidFill>
-            <a:srgbClr val="0F172A"/>
-          </a:solidFill>
-          <a:ln w="12700">
-            <a:solidFill>
-              <a:srgbClr val="0F172A"/>
-            </a:solidFill>
-            <a:prstDash val="solid"/>
-          </a:ln>
-        </p:spPr>
-      </p:sp>
-      <p:sp>
-        <p:nvSpPr>
-          <p:cNvPr id="19" name="Shape 15">
-            <a:extLst>
-              <a:ext uri="{FF2B5EF4-FFF2-40B4-BE49-F238E27FC236}">
-                <a16:creationId xmlns:a16="http://schemas.microsoft.com/office/drawing/2014/main" id="{47943E62-587A-41A0-AA91-65E9314111DC}"/>
-              </a:ext>
-            </a:extLst>
-          </p:cNvPr>
-          <p:cNvSpPr>
-            <a:spLocks noGrp="1"/>
-          </p:cNvSpPr>
-          <p:nvPr/>
-        </p:nvSpPr>
-        <p:spPr>
-          <a:xfrm>
-            <a:off x="6309360" y="1499616"/>
-            <a:ext cx="109728" cy="109728"/>
-          </a:xfrm>
-          <a:prstGeom prst="ellipse">
-            <a:avLst/>
-          </a:prstGeom>
-          <a:solidFill>
-            <a:srgbClr val="EF4444"/>
-          </a:solidFill>
-          <a:ln w="12700">
-            <a:solidFill>
-              <a:srgbClr val="EF4444"/>
-            </a:solidFill>
-            <a:prstDash val="solid"/>
-          </a:ln>
-        </p:spPr>
-      </p:sp>
-      <p:sp>
-        <p:nvSpPr>
-          <p:cNvPr id="20" name="Shape 16">
-            <a:extLst>
-              <a:ext uri="{FF2B5EF4-FFF2-40B4-BE49-F238E27FC236}">
-                <a16:creationId xmlns:a16="http://schemas.microsoft.com/office/drawing/2014/main" id="{F04DFE67-2A9F-48AA-8EA4-C86F7B353DB4}"/>
-              </a:ext>
-            </a:extLst>
-          </p:cNvPr>
-          <p:cNvSpPr>
-            <a:spLocks noGrp="1"/>
-          </p:cNvSpPr>
-          <p:nvPr/>
-        </p:nvSpPr>
-        <p:spPr>
-          <a:xfrm>
-            <a:off x="6446520" y="1499616"/>
-            <a:ext cx="109728" cy="109728"/>
-          </a:xfrm>
-          <a:prstGeom prst="ellipse">
-            <a:avLst/>
-          </a:prstGeom>
-          <a:solidFill>
-            <a:srgbClr val="F59E0B"/>
-          </a:solidFill>
-          <a:ln w="12700">
-            <a:solidFill>
-              <a:srgbClr val="F59E0B"/>
-            </a:solidFill>
-            <a:prstDash val="solid"/>
-          </a:ln>
-        </p:spPr>
-      </p:sp>
-      <p:sp>
-        <p:nvSpPr>
-          <p:cNvPr id="21" name="Shape 17">
-            <a:extLst>
-              <a:ext uri="{FF2B5EF4-FFF2-40B4-BE49-F238E27FC236}">
-                <a16:creationId xmlns:a16="http://schemas.microsoft.com/office/drawing/2014/main" id="{97180367-74D6-4455-837C-10DB48453089}"/>
-              </a:ext>
-            </a:extLst>
-          </p:cNvPr>
-          <p:cNvSpPr>
-            <a:spLocks noGrp="1"/>
-          </p:cNvSpPr>
-          <p:nvPr/>
-        </p:nvSpPr>
-        <p:spPr>
-          <a:xfrm>
-            <a:off x="6583680" y="1499616"/>
-            <a:ext cx="109728" cy="109728"/>
-          </a:xfrm>
-          <a:prstGeom prst="ellipse">
-            <a:avLst/>
-          </a:prstGeom>
-          <a:solidFill>
-            <a:srgbClr val="10B981"/>
-          </a:solidFill>
-          <a:ln w="12700">
-            <a:solidFill>
-              <a:srgbClr val="10B981"/>
-            </a:solidFill>
-            <a:prstDash val="solid"/>
-          </a:ln>
-        </p:spPr>
-      </p:sp>
-      <p:sp>
-        <p:nvSpPr>
-          <p:cNvPr id="22" name="Text 18">
-            <a:extLst>
-              <a:ext uri="{FF2B5EF4-FFF2-40B4-BE49-F238E27FC236}">
-                <a16:creationId xmlns:a16="http://schemas.microsoft.com/office/drawing/2014/main" id="{8A13D164-060E-41CA-8437-890A2B36EE1D}"/>
-              </a:ext>
-            </a:extLst>
-          </p:cNvPr>
-          <p:cNvSpPr>
-            <a:spLocks noGrp="1"/>
-          </p:cNvSpPr>
-          <p:nvPr/>
-        </p:nvSpPr>
-        <p:spPr>
-          <a:xfrm>
-            <a:off x="6766560" y="1417320"/>
-            <a:ext cx="4754880" cy="274320"/>
-          </a:xfrm>
-          <a:prstGeom prst="rect">
-            <a:avLst/>
-          </a:prstGeom>
-          <a:noFill/>
-        </p:spPr>
-        <p:txBody>
-          <a:bodyPr wrap="square" lIns="0" tIns="0" rIns="0" bIns="0" anchor="ctr"/>
-          <a:lstStyle/>
-          <a:p>
-            <a:pPr marL="0" indent="0" algn="ctr">
-              <a:buNone/>
-            </a:pPr>
-            <a:r>
-              <a:rPr lang="en-US" sz="900">
-                <a:solidFill>
-                  <a:srgbClr val="94A3B8"/>
-                </a:solidFill>
-                <a:latin typeface="Consolas"/>
-                <a:ea typeface="Consolas"/>
-                <a:cs typeface="Consolas"/>
-              </a:rPr>
-              <a:t>Interpretasi</a:t>
-            </a:r>
-            <a:endParaRPr sz="900"/>
-          </a:p>
-        </p:txBody>
-      </p:sp>
-      <p:sp>
-        <p:nvSpPr>
-          <p:cNvPr id="23" name="Text 19">
-            <a:extLst>
-              <a:ext uri="{FF2B5EF4-FFF2-40B4-BE49-F238E27FC236}">
-                <a16:creationId xmlns:a16="http://schemas.microsoft.com/office/drawing/2014/main" id="{B3EACD03-024A-4921-9CE4-CECC7D83730F}"/>
-              </a:ext>
-            </a:extLst>
-          </p:cNvPr>
-          <p:cNvSpPr>
-            <a:spLocks noGrp="1"/>
-          </p:cNvSpPr>
-          <p:nvPr/>
-        </p:nvSpPr>
-        <p:spPr>
-          <a:xfrm>
-            <a:off x="6355080" y="1783080"/>
-            <a:ext cx="5212080" cy="4297680"/>
-          </a:xfrm>
-          <a:prstGeom prst="rect">
-            <a:avLst/>
-          </a:prstGeom>
-          <a:noFill/>
-        </p:spPr>
-        <p:txBody>
-          <a:bodyPr wrap="square" lIns="0" tIns="0" rIns="0" bIns="0" anchor="t"/>
-          <a:lstStyle/>
-          <a:p>
-            <a:pPr marL="0" indent="0">
-              <a:spcAft>
-                <a:spcPts val="200"/>
-              </a:spcAft>
-              <a:buNone/>
-            </a:pPr>
-            <a:r>
-              <a:rPr lang="en-US" sz="1600">
-                <a:solidFill>
-                  <a:srgbClr val="FFFFFF"/>
-                </a:solidFill>
-                <a:latin typeface="Aptos" panose="020B0004020202020204" pitchFamily="34" charset="0"/>
-                <a:ea typeface="Consolas"/>
-                <a:cs typeface="Consolas"/>
-              </a:rPr>
-              <a:t>Availability menghitung sukses/all.
-p95 hanya respons sukses.
-Nearest-rank memilih posisi 95%.
-SLO 99% adalah target, bukan hasil.
-Budget berlaku pada periode terdefinisi.
-Lima sampel tidak cukup untuk SLA nyata.</a:t>
-            </a:r>
-            <a:endParaRPr sz="1600">
-              <a:solidFill>
-                <a:srgbClr val="FFFFFF"/>
-              </a:solidFill>
               <a:latin typeface="Aptos" panose="020B0004020202020204" pitchFamily="34" charset="0"/>
             </a:endParaRPr>
           </a:p>
         </p:txBody>
       </p:sp>
+      <p:pic>
+        <p:nvPicPr>
+          <p:cNvPr id="63" name="Picture 62" descr="10_status_pulih_aktual.png"/>
+          <p:cNvPicPr>
+            <a:picLocks noChangeAspect="1"/>
+          </p:cNvPicPr>
+          <p:nvPr/>
+        </p:nvPicPr>
+        <p:blipFill>
+          <a:blip r:embed="rId12"/>
+          <a:stretch>
+            <a:fillRect/>
+          </a:stretch>
+        </p:blipFill>
+        <p:spPr>
+          <a:xfrm>
+            <a:off x="6976299" y="2057400"/>
+            <a:ext cx="3969641" cy="3063239"/>
+          </a:xfrm>
+          <a:prstGeom prst="rect">
+            <a:avLst/>
+          </a:prstGeom>
+        </p:spPr>
+      </p:pic>
     </p:spTree>
-    <p:extLst>
-      <p:ext uri="{BB962C8B-B14F-4D97-AF65-F5344CB8AC3E}">
-        <p14:creationId xmlns:p14="http://schemas.microsoft.com/office/powerpoint/2010/main" val="2715567140"/>
-      </p:ext>
-    </p:extLst>
   </p:cSld>
   <p:clrMapOvr>
     <a:masterClrMapping/>

--- a/slides/LAB10_Monitoring_Status_Bukti_Live.pptx
+++ b/slides/LAB10_Monitoring_Status_Bukti_Live.pptx
@@ -2,25 +2,25 @@
 <file path=ppt/presentation.xml><?xml version="1.0" encoding="utf-8"?>
 <p:presentation xmlns:p="http://schemas.openxmlformats.org/presentationml/2006/main">
   <p:sldMasterIdLst>
-    <p:sldMasterId xmlns:r="http://schemas.openxmlformats.org/officeDocument/2006/relationships" id="2147483648" r:id="R1a3075f184d64273"/>
+    <p:sldMasterId xmlns:r="http://schemas.openxmlformats.org/officeDocument/2006/relationships" id="2147483648" r:id="R48ccf4ac9c454b8a"/>
   </p:sldMasterIdLst>
   <p:notesMasterIdLst>
-    <p:notesMasterId xmlns:r="http://schemas.openxmlformats.org/officeDocument/2006/relationships" r:id="R42d8f837c3864318"/>
+    <p:notesMasterId xmlns:r="http://schemas.openxmlformats.org/officeDocument/2006/relationships" r:id="R4e7a08b074244823"/>
   </p:notesMasterIdLst>
   <p:sldIdLst>
-    <p:sldId xmlns:r="http://schemas.openxmlformats.org/officeDocument/2006/relationships" id="256" r:id="Rd059ddd5a0444c17"/>
-    <p:sldId xmlns:r="http://schemas.openxmlformats.org/officeDocument/2006/relationships" id="257" r:id="R9f44533e24f04ff7"/>
-    <p:sldId xmlns:r="http://schemas.openxmlformats.org/officeDocument/2006/relationships" id="258" r:id="Ree65b4f1009c44cd"/>
-    <p:sldId xmlns:r="http://schemas.openxmlformats.org/officeDocument/2006/relationships" id="259" r:id="R05b2492727784763"/>
-    <p:sldId xmlns:r="http://schemas.openxmlformats.org/officeDocument/2006/relationships" id="260" r:id="R260a47c812224128"/>
-    <p:sldId xmlns:r="http://schemas.openxmlformats.org/officeDocument/2006/relationships" id="261" r:id="R747b46b2974a480f"/>
-    <p:sldId xmlns:r="http://schemas.openxmlformats.org/officeDocument/2006/relationships" id="262" r:id="Reace4bcbb43c45b2"/>
-    <p:sldId xmlns:r="http://schemas.openxmlformats.org/officeDocument/2006/relationships" id="263" r:id="R3a2a483dcb434840"/>
-    <p:sldId xmlns:r="http://schemas.openxmlformats.org/officeDocument/2006/relationships" id="264" r:id="Rdc3292e3e97b4f21"/>
-    <p:sldId xmlns:r="http://schemas.openxmlformats.org/officeDocument/2006/relationships" id="265" r:id="Re8972b3150a1484a"/>
-    <p:sldId xmlns:r="http://schemas.openxmlformats.org/officeDocument/2006/relationships" id="266" r:id="R1afc0ec1b8954986"/>
-    <p:sldId xmlns:r="http://schemas.openxmlformats.org/officeDocument/2006/relationships" id="267" r:id="R392a89f246c0498a"/>
-    <p:sldId xmlns:r="http://schemas.openxmlformats.org/officeDocument/2006/relationships" id="268" r:id="R5fe2336d28da4b44"/>
+    <p:sldId xmlns:r="http://schemas.openxmlformats.org/officeDocument/2006/relationships" id="256" r:id="R8270bf3d3ea142a8"/>
+    <p:sldId xmlns:r="http://schemas.openxmlformats.org/officeDocument/2006/relationships" id="257" r:id="R936513b794c7445e"/>
+    <p:sldId xmlns:r="http://schemas.openxmlformats.org/officeDocument/2006/relationships" id="258" r:id="R0474660e9f74441c"/>
+    <p:sldId xmlns:r="http://schemas.openxmlformats.org/officeDocument/2006/relationships" id="259" r:id="R1b5aaab5bbe947cf"/>
+    <p:sldId xmlns:r="http://schemas.openxmlformats.org/officeDocument/2006/relationships" id="260" r:id="Rf859e2f64252461b"/>
+    <p:sldId xmlns:r="http://schemas.openxmlformats.org/officeDocument/2006/relationships" id="261" r:id="R73f25f9d84ed4287"/>
+    <p:sldId xmlns:r="http://schemas.openxmlformats.org/officeDocument/2006/relationships" id="262" r:id="R9e289dbbddd943ac"/>
+    <p:sldId xmlns:r="http://schemas.openxmlformats.org/officeDocument/2006/relationships" id="263" r:id="R1950737dcedc47e1"/>
+    <p:sldId xmlns:r="http://schemas.openxmlformats.org/officeDocument/2006/relationships" id="264" r:id="Rea757c56f7764041"/>
+    <p:sldId xmlns:r="http://schemas.openxmlformats.org/officeDocument/2006/relationships" id="265" r:id="R4b9404e04703427c"/>
+    <p:sldId xmlns:r="http://schemas.openxmlformats.org/officeDocument/2006/relationships" id="266" r:id="Rd4e1708e172e46f4"/>
+    <p:sldId xmlns:r="http://schemas.openxmlformats.org/officeDocument/2006/relationships" id="267" r:id="Rb6afe2a0e9da4da2"/>
+    <p:sldId xmlns:r="http://schemas.openxmlformats.org/officeDocument/2006/relationships" id="268" r:id="R3f65ba722efe4038"/>
   </p:sldIdLst>
   <p:sldSz cx="12192000" cy="6858000"/>
   <p:notesSz cx="6858000" cy="9144000"/>
@@ -1379,7 +1379,7 @@
   </p:cSld>
   <p:clrMap bg1="lt1" tx1="dk1" bg2="lt2" tx2="dk2" accent1="accent1" accent2="accent2" accent3="accent3" accent4="accent4" accent5="accent5" accent6="accent6" hlink="hlink" folHlink="folHlink"/>
   <p:sldLayoutIdLst>
-    <p:sldLayoutId xmlns:r="http://schemas.openxmlformats.org/officeDocument/2006/relationships" id="2147483649" r:id="R6fa06650f0a34b34"/>
+    <p:sldLayoutId xmlns:r="http://schemas.openxmlformats.org/officeDocument/2006/relationships" id="2147483649" r:id="R6bfeb947ae124d43"/>
   </p:sldLayoutIdLst>
   <p:hf sldNum="0" hdr="0" ftr="0" dt="0"/>
   <p:txStyles>
@@ -1932,7 +1932,7 @@
     <p:bg>
       <p:bgPr>
         <a:blipFill xmlns:a="http://schemas.openxmlformats.org/drawingml/2006/main" rotWithShape="1">
-          <a:blip xmlns:r="http://schemas.openxmlformats.org/officeDocument/2006/relationships" r:embed="Rb8dcf6eea1f243a8">
+          <a:blip xmlns:r="http://schemas.openxmlformats.org/officeDocument/2006/relationships" r:embed="Rc8c51fc794c34d6d">
             <a:lum/>
           </a:blip>
           <a:srcRect l="0" t="0" r="0" b="0"/>
@@ -1960,7 +1960,7 @@
           <p:nvPr/>
         </p:nvPicPr>
         <p:blipFill>
-          <a:blip xmlns:r="http://schemas.openxmlformats.org/officeDocument/2006/relationships" xmlns:a="http://schemas.openxmlformats.org/drawingml/2006/main" r:embed="Ra68017254c4c4029"/>
+          <a:blip xmlns:r="http://schemas.openxmlformats.org/officeDocument/2006/relationships" xmlns:a="http://schemas.openxmlformats.org/drawingml/2006/main" r:embed="R9e4d962db0334be1"/>
           <a:stretch xmlns:a="http://schemas.openxmlformats.org/drawingml/2006/main">
             <a:fillRect l="0" t="0" r="0" b="0"/>
           </a:stretch>
@@ -1984,7 +1984,7 @@
           <p:nvPr/>
         </p:nvPicPr>
         <p:blipFill>
-          <a:blip xmlns:r="http://schemas.openxmlformats.org/officeDocument/2006/relationships" xmlns:a="http://schemas.openxmlformats.org/drawingml/2006/main" r:embed="R120d7d9a931e4bec"/>
+          <a:blip xmlns:r="http://schemas.openxmlformats.org/officeDocument/2006/relationships" xmlns:a="http://schemas.openxmlformats.org/drawingml/2006/main" r:embed="R3fa7a7dbd64941f6"/>
           <a:stretch xmlns:a="http://schemas.openxmlformats.org/drawingml/2006/main">
             <a:fillRect l="0" t="0" r="0" b="0"/>
           </a:stretch>
@@ -2527,7 +2527,7 @@
           <p:nvPr/>
         </p:nvPicPr>
         <p:blipFill>
-          <a:blip xmlns:r="http://schemas.openxmlformats.org/officeDocument/2006/relationships" xmlns:a="http://schemas.openxmlformats.org/drawingml/2006/main" r:embed="R05fe96acff0f4547"/>
+          <a:blip xmlns:r="http://schemas.openxmlformats.org/officeDocument/2006/relationships" xmlns:a="http://schemas.openxmlformats.org/drawingml/2006/main" r:embed="R40d4c473b8884b72"/>
           <a:stretch xmlns:a="http://schemas.openxmlformats.org/drawingml/2006/main">
             <a:fillRect l="0" t="0" r="0" b="0"/>
           </a:stretch>
@@ -2551,7 +2551,7 @@
           <p:nvPr/>
         </p:nvPicPr>
         <p:blipFill>
-          <a:blip xmlns:r="http://schemas.openxmlformats.org/officeDocument/2006/relationships" xmlns:a="http://schemas.openxmlformats.org/drawingml/2006/main" r:embed="Rc25b3247f8274965"/>
+          <a:blip xmlns:r="http://schemas.openxmlformats.org/officeDocument/2006/relationships" xmlns:a="http://schemas.openxmlformats.org/drawingml/2006/main" r:embed="R44d5a0cb9c4f48c7"/>
           <a:stretch xmlns:a="http://schemas.openxmlformats.org/drawingml/2006/main">
             <a:fillRect l="0" t="0" r="0" b="0"/>
           </a:stretch>
@@ -3457,7 +3457,7 @@
           <p:nvPr/>
         </p:nvPicPr>
         <p:blipFill>
-          <a:blip xmlns:r="http://schemas.openxmlformats.org/officeDocument/2006/relationships" xmlns:a="http://schemas.openxmlformats.org/drawingml/2006/main" r:embed="Rcac7535abce343ec"/>
+          <a:blip xmlns:r="http://schemas.openxmlformats.org/officeDocument/2006/relationships" xmlns:a="http://schemas.openxmlformats.org/drawingml/2006/main" r:embed="R46081f7c0f964b6b"/>
           <a:stretch xmlns:a="http://schemas.openxmlformats.org/drawingml/2006/main">
             <a:fillRect l="0" t="0" r="0" b="0"/>
           </a:stretch>
@@ -3481,7 +3481,7 @@
           <p:nvPr/>
         </p:nvPicPr>
         <p:blipFill>
-          <a:blip xmlns:r="http://schemas.openxmlformats.org/officeDocument/2006/relationships" xmlns:a="http://schemas.openxmlformats.org/drawingml/2006/main" r:embed="Rb5e227bca3f644b5"/>
+          <a:blip xmlns:r="http://schemas.openxmlformats.org/officeDocument/2006/relationships" xmlns:a="http://schemas.openxmlformats.org/drawingml/2006/main" r:embed="R33c1bab5c321469b"/>
           <a:stretch xmlns:a="http://schemas.openxmlformats.org/drawingml/2006/main">
             <a:fillRect l="0" t="0" r="0" b="0"/>
           </a:stretch>
@@ -4385,7 +4385,7 @@
           <p:nvPr/>
         </p:nvPicPr>
         <p:blipFill>
-          <a:blip xmlns:r="http://schemas.openxmlformats.org/officeDocument/2006/relationships" xmlns:a="http://schemas.openxmlformats.org/drawingml/2006/main" r:embed="R4eac6c6898fb40a2"/>
+          <a:blip xmlns:r="http://schemas.openxmlformats.org/officeDocument/2006/relationships" xmlns:a="http://schemas.openxmlformats.org/drawingml/2006/main" r:embed="R9b4fabb3221f4b18"/>
           <a:stretch xmlns:a="http://schemas.openxmlformats.org/drawingml/2006/main">
             <a:fillRect l="0" t="0" r="0" b="0"/>
           </a:stretch>
@@ -4409,7 +4409,7 @@
           <p:nvPr/>
         </p:nvPicPr>
         <p:blipFill>
-          <a:blip xmlns:r="http://schemas.openxmlformats.org/officeDocument/2006/relationships" xmlns:a="http://schemas.openxmlformats.org/drawingml/2006/main" r:embed="R039fab14d5d342fb"/>
+          <a:blip xmlns:r="http://schemas.openxmlformats.org/officeDocument/2006/relationships" xmlns:a="http://schemas.openxmlformats.org/drawingml/2006/main" r:embed="Rdba2ad0fba664d31"/>
           <a:stretch xmlns:a="http://schemas.openxmlformats.org/drawingml/2006/main">
             <a:fillRect l="0" t="0" r="0" b="0"/>
           </a:stretch>
@@ -4645,7 +4645,7 @@
           <p:nvPr/>
         </p:nvPicPr>
         <p:blipFill>
-          <a:blip xmlns:r="http://schemas.openxmlformats.org/officeDocument/2006/relationships" xmlns:a="http://schemas.openxmlformats.org/drawingml/2006/main" r:embed="Ref6ebf3b92ee4d0c"/>
+          <a:blip xmlns:r="http://schemas.openxmlformats.org/officeDocument/2006/relationships" xmlns:a="http://schemas.openxmlformats.org/drawingml/2006/main" r:embed="R8a63bb569049493d"/>
           <a:stretch xmlns:a="http://schemas.openxmlformats.org/drawingml/2006/main">
             <a:fillRect l="0" t="0" r="0" b="0"/>
           </a:stretch>
@@ -4722,7 +4722,7 @@
           <p:nvPr/>
         </p:nvPicPr>
         <p:blipFill>
-          <a:blip xmlns:r="http://schemas.openxmlformats.org/officeDocument/2006/relationships" xmlns:a="http://schemas.openxmlformats.org/drawingml/2006/main" r:embed="R9a1c7a2d839a4425"/>
+          <a:blip xmlns:r="http://schemas.openxmlformats.org/officeDocument/2006/relationships" xmlns:a="http://schemas.openxmlformats.org/drawingml/2006/main" r:embed="Rc75782e319634b8d"/>
           <a:stretch xmlns:a="http://schemas.openxmlformats.org/drawingml/2006/main">
             <a:fillRect l="0" t="0" r="0" b="0"/>
           </a:stretch>
@@ -4799,7 +4799,7 @@
           <p:nvPr/>
         </p:nvPicPr>
         <p:blipFill>
-          <a:blip xmlns:r="http://schemas.openxmlformats.org/officeDocument/2006/relationships" xmlns:a="http://schemas.openxmlformats.org/drawingml/2006/main" r:embed="R5c4296e9dda04cc5"/>
+          <a:blip xmlns:r="http://schemas.openxmlformats.org/officeDocument/2006/relationships" xmlns:a="http://schemas.openxmlformats.org/drawingml/2006/main" r:embed="R37f2fb917d2a436c"/>
           <a:stretch xmlns:a="http://schemas.openxmlformats.org/drawingml/2006/main">
             <a:fillRect l="0" t="0" r="0" b="0"/>
           </a:stretch>
@@ -4876,7 +4876,7 @@
           <p:nvPr/>
         </p:nvPicPr>
         <p:blipFill>
-          <a:blip xmlns:r="http://schemas.openxmlformats.org/officeDocument/2006/relationships" xmlns:a="http://schemas.openxmlformats.org/drawingml/2006/main" r:embed="Reed27e8280d14b08"/>
+          <a:blip xmlns:r="http://schemas.openxmlformats.org/officeDocument/2006/relationships" xmlns:a="http://schemas.openxmlformats.org/drawingml/2006/main" r:embed="R5de3be6b6a3949fb"/>
           <a:stretch xmlns:a="http://schemas.openxmlformats.org/drawingml/2006/main">
             <a:fillRect l="0" t="0" r="0" b="0"/>
           </a:stretch>
@@ -4953,7 +4953,7 @@
           <p:nvPr/>
         </p:nvPicPr>
         <p:blipFill>
-          <a:blip xmlns:r="http://schemas.openxmlformats.org/officeDocument/2006/relationships" xmlns:a="http://schemas.openxmlformats.org/drawingml/2006/main" r:embed="Rb7e8484e91674fd7"/>
+          <a:blip xmlns:r="http://schemas.openxmlformats.org/officeDocument/2006/relationships" xmlns:a="http://schemas.openxmlformats.org/drawingml/2006/main" r:embed="R03e803b019364cb8"/>
           <a:stretch xmlns:a="http://schemas.openxmlformats.org/drawingml/2006/main">
             <a:fillRect l="0" t="0" r="0" b="0"/>
           </a:stretch>
@@ -5030,7 +5030,7 @@
           <p:nvPr/>
         </p:nvPicPr>
         <p:blipFill>
-          <a:blip xmlns:r="http://schemas.openxmlformats.org/officeDocument/2006/relationships" xmlns:a="http://schemas.openxmlformats.org/drawingml/2006/main" r:embed="R152e360ac986400d"/>
+          <a:blip xmlns:r="http://schemas.openxmlformats.org/officeDocument/2006/relationships" xmlns:a="http://schemas.openxmlformats.org/drawingml/2006/main" r:embed="Re298d34d0d0f4ac2"/>
           <a:stretch xmlns:a="http://schemas.openxmlformats.org/drawingml/2006/main">
             <a:fillRect l="0" t="0" r="0" b="0"/>
           </a:stretch>
@@ -5107,7 +5107,7 @@
           <p:nvPr/>
         </p:nvPicPr>
         <p:blipFill>
-          <a:blip xmlns:r="http://schemas.openxmlformats.org/officeDocument/2006/relationships" xmlns:a="http://schemas.openxmlformats.org/drawingml/2006/main" r:embed="Re07e961ae8f04d61"/>
+          <a:blip xmlns:r="http://schemas.openxmlformats.org/officeDocument/2006/relationships" xmlns:a="http://schemas.openxmlformats.org/drawingml/2006/main" r:embed="R051ba07aa50f49be"/>
           <a:stretch xmlns:a="http://schemas.openxmlformats.org/drawingml/2006/main">
             <a:fillRect l="0" t="0" r="0" b="0"/>
           </a:stretch>
@@ -5397,7 +5397,7 @@
           <p:nvPr/>
         </p:nvPicPr>
         <p:blipFill>
-          <a:blip xmlns:r="http://schemas.openxmlformats.org/officeDocument/2006/relationships" xmlns:a="http://schemas.openxmlformats.org/drawingml/2006/main" r:embed="R90ac75ce9fdf4c36"/>
+          <a:blip xmlns:r="http://schemas.openxmlformats.org/officeDocument/2006/relationships" xmlns:a="http://schemas.openxmlformats.org/drawingml/2006/main" r:embed="Rb1a9b96646c04972"/>
           <a:stretch xmlns:a="http://schemas.openxmlformats.org/drawingml/2006/main">
             <a:fillRect l="0" t="0" r="0" b="0"/>
           </a:stretch>
@@ -5580,7 +5580,7 @@
           <p:nvPr/>
         </p:nvPicPr>
         <p:blipFill>
-          <a:blip xmlns:r="http://schemas.openxmlformats.org/officeDocument/2006/relationships" xmlns:a="http://schemas.openxmlformats.org/drawingml/2006/main" r:embed="Rb9ebeb9924354980"/>
+          <a:blip xmlns:r="http://schemas.openxmlformats.org/officeDocument/2006/relationships" xmlns:a="http://schemas.openxmlformats.org/drawingml/2006/main" r:embed="R060216353a644f51"/>
           <a:stretch xmlns:a="http://schemas.openxmlformats.org/drawingml/2006/main">
             <a:fillRect l="0" t="0" r="0" b="0"/>
           </a:stretch>
@@ -5604,7 +5604,7 @@
           <p:nvPr/>
         </p:nvPicPr>
         <p:blipFill>
-          <a:blip xmlns:r="http://schemas.openxmlformats.org/officeDocument/2006/relationships" xmlns:a="http://schemas.openxmlformats.org/drawingml/2006/main" r:embed="R53e28a832c364d1d"/>
+          <a:blip xmlns:r="http://schemas.openxmlformats.org/officeDocument/2006/relationships" xmlns:a="http://schemas.openxmlformats.org/drawingml/2006/main" r:embed="R24b509845d934068"/>
           <a:stretch xmlns:a="http://schemas.openxmlformats.org/drawingml/2006/main">
             <a:fillRect l="0" t="0" r="0" b="0"/>
           </a:stretch>
@@ -6513,7 +6513,7 @@
           <p:nvPr/>
         </p:nvPicPr>
         <p:blipFill>
-          <a:blip xmlns:r="http://schemas.openxmlformats.org/officeDocument/2006/relationships" xmlns:a="http://schemas.openxmlformats.org/drawingml/2006/main" r:embed="Rd7012054eaff45ae"/>
+          <a:blip xmlns:r="http://schemas.openxmlformats.org/officeDocument/2006/relationships" xmlns:a="http://schemas.openxmlformats.org/drawingml/2006/main" r:embed="Raea033abd5b44e48"/>
           <a:stretch xmlns:a="http://schemas.openxmlformats.org/drawingml/2006/main">
             <a:fillRect l="0" t="0" r="0" b="0"/>
           </a:stretch>
@@ -6537,7 +6537,7 @@
           <p:nvPr/>
         </p:nvPicPr>
         <p:blipFill>
-          <a:blip xmlns:r="http://schemas.openxmlformats.org/officeDocument/2006/relationships" xmlns:a="http://schemas.openxmlformats.org/drawingml/2006/main" r:embed="Ra65d6628b2e0472f"/>
+          <a:blip xmlns:r="http://schemas.openxmlformats.org/officeDocument/2006/relationships" xmlns:a="http://schemas.openxmlformats.org/drawingml/2006/main" r:embed="R4134999cd59c45e6"/>
           <a:stretch xmlns:a="http://schemas.openxmlformats.org/drawingml/2006/main">
             <a:fillRect l="0" t="0" r="0" b="0"/>
           </a:stretch>
@@ -6802,7 +6802,7 @@
           <p:nvPr/>
         </p:nvPicPr>
         <p:blipFill>
-          <a:blip xmlns:r="http://schemas.openxmlformats.org/officeDocument/2006/relationships" xmlns:a="http://schemas.openxmlformats.org/drawingml/2006/main" r:embed="Raaf3735faab5408c"/>
+          <a:blip xmlns:r="http://schemas.openxmlformats.org/officeDocument/2006/relationships" xmlns:a="http://schemas.openxmlformats.org/drawingml/2006/main" r:embed="R59da2904db9f4b17"/>
           <a:stretch xmlns:a="http://schemas.openxmlformats.org/drawingml/2006/main">
             <a:fillRect l="0" t="0" r="0" b="0"/>
           </a:stretch>
@@ -6872,7 +6872,7 @@
           <p:nvPr/>
         </p:nvPicPr>
         <p:blipFill>
-          <a:blip xmlns:r="http://schemas.openxmlformats.org/officeDocument/2006/relationships" xmlns:a="http://schemas.openxmlformats.org/drawingml/2006/main" r:embed="Rd85539089289444e"/>
+          <a:blip xmlns:r="http://schemas.openxmlformats.org/officeDocument/2006/relationships" xmlns:a="http://schemas.openxmlformats.org/drawingml/2006/main" r:embed="R6002f7aea836412c"/>
           <a:stretch xmlns:a="http://schemas.openxmlformats.org/drawingml/2006/main">
             <a:fillRect l="0" t="0" r="0" b="0"/>
           </a:stretch>
@@ -6942,7 +6942,7 @@
           <p:nvPr/>
         </p:nvPicPr>
         <p:blipFill>
-          <a:blip xmlns:r="http://schemas.openxmlformats.org/officeDocument/2006/relationships" xmlns:a="http://schemas.openxmlformats.org/drawingml/2006/main" r:embed="R0e9f7d3684ef4718"/>
+          <a:blip xmlns:r="http://schemas.openxmlformats.org/officeDocument/2006/relationships" xmlns:a="http://schemas.openxmlformats.org/drawingml/2006/main" r:embed="R6509619467cf4767"/>
           <a:stretch xmlns:a="http://schemas.openxmlformats.org/drawingml/2006/main">
             <a:fillRect l="0" t="0" r="0" b="0"/>
           </a:stretch>
@@ -6997,7 +6997,7 @@
                 <a:ea typeface="Calibri"/>
                 <a:cs typeface="Calibri"/>
               </a:rPr>
-              <a:t>Kumpulkan observations.jsonl</a:t>
+              <a:t>Catat observations.jsonl</a:t>
             </a:r>
             <a:endParaRPr sz="1600"/>
           </a:p>
@@ -7012,7 +7012,7 @@
           <p:nvPr/>
         </p:nvPicPr>
         <p:blipFill>
-          <a:blip xmlns:r="http://schemas.openxmlformats.org/officeDocument/2006/relationships" xmlns:a="http://schemas.openxmlformats.org/drawingml/2006/main" r:embed="R1de3ce80e41040e4"/>
+          <a:blip xmlns:r="http://schemas.openxmlformats.org/officeDocument/2006/relationships" xmlns:a="http://schemas.openxmlformats.org/drawingml/2006/main" r:embed="Re376e0e25eaa42d0"/>
           <a:stretch xmlns:a="http://schemas.openxmlformats.org/drawingml/2006/main">
             <a:fillRect l="0" t="0" r="0" b="0"/>
           </a:stretch>
@@ -7082,7 +7082,7 @@
           <p:nvPr/>
         </p:nvPicPr>
         <p:blipFill>
-          <a:blip xmlns:r="http://schemas.openxmlformats.org/officeDocument/2006/relationships" xmlns:a="http://schemas.openxmlformats.org/drawingml/2006/main" r:embed="R7c7ebe8049784567"/>
+          <a:blip xmlns:r="http://schemas.openxmlformats.org/officeDocument/2006/relationships" xmlns:a="http://schemas.openxmlformats.org/drawingml/2006/main" r:embed="R1b4f3cf57bc242c0"/>
           <a:stretch xmlns:a="http://schemas.openxmlformats.org/drawingml/2006/main">
             <a:fillRect l="0" t="0" r="0" b="0"/>
           </a:stretch>
@@ -7152,7 +7152,7 @@
           <p:nvPr/>
         </p:nvPicPr>
         <p:blipFill>
-          <a:blip xmlns:r="http://schemas.openxmlformats.org/officeDocument/2006/relationships" xmlns:a="http://schemas.openxmlformats.org/drawingml/2006/main" r:embed="R343af74831f4449e"/>
+          <a:blip xmlns:r="http://schemas.openxmlformats.org/officeDocument/2006/relationships" xmlns:a="http://schemas.openxmlformats.org/drawingml/2006/main" r:embed="R59889345855a4e03"/>
           <a:stretch xmlns:a="http://schemas.openxmlformats.org/drawingml/2006/main">
             <a:fillRect l="0" t="0" r="0" b="0"/>
           </a:stretch>
@@ -7222,7 +7222,7 @@
           <p:nvPr/>
         </p:nvPicPr>
         <p:blipFill>
-          <a:blip xmlns:r="http://schemas.openxmlformats.org/officeDocument/2006/relationships" xmlns:a="http://schemas.openxmlformats.org/drawingml/2006/main" r:embed="R3b04f2f463ab4751"/>
+          <a:blip xmlns:r="http://schemas.openxmlformats.org/officeDocument/2006/relationships" xmlns:a="http://schemas.openxmlformats.org/drawingml/2006/main" r:embed="Rec792d8d25c14de7"/>
           <a:stretch xmlns:a="http://schemas.openxmlformats.org/drawingml/2006/main">
             <a:fillRect l="0" t="0" r="0" b="0"/>
           </a:stretch>
@@ -7361,7 +7361,7 @@
                 <a:ea typeface="Calibri"/>
                 <a:cs typeface="Calibri"/>
               </a:rPr>
-              <a:t>BUKTI YANG DIKUMPULKAN</a:t>
+              <a:t>PROYEK KELOMPOK</a:t>
             </a:r>
           </a:p>
           <a:p xmlns:a="http://schemas.openxmlformats.org/drawingml/2006/main">
@@ -7390,7 +7390,7 @@
                 <a:ea typeface="Calibri"/>
                 <a:cs typeface="Calibri"/>
               </a:rPr>
-              <a:t>Hasil mesin sendiri</a:t>
+              <a:t>Tim 3 orang</a:t>
             </a:r>
             <a:endParaRPr sz="1100"/>
           </a:p>
@@ -7439,7 +7439,7 @@
                 <a:ea typeface="Calibri"/>
                 <a:cs typeface="Calibri"/>
               </a:rPr>
-              <a:t>1. JSONL probe tiga target</a:t>
+              <a:t>Monitoring mendukung operasi proyek</a:t>
             </a:r>
           </a:p>
           <a:p xmlns:a="http://schemas.openxmlformats.org/drawingml/2006/main">
@@ -7458,7 +7458,7 @@
                 <a:ea typeface="Calibri"/>
                 <a:cs typeface="Calibri"/>
               </a:rPr>
-              <a:t>2. p95 dan availability sampel</a:t>
+              <a:t>Ukur availability dan p95 sampel</a:t>
             </a:r>
           </a:p>
           <a:p xmlns:a="http://schemas.openxmlformats.org/drawingml/2006/main">
@@ -7477,7 +7477,7 @@
                 <a:ea typeface="Calibri"/>
                 <a:cs typeface="Calibri"/>
               </a:rPr>
-              <a:t>3. Halaman UP lalu DOWN</a:t>
+              <a:t>Simpan bukti bila berguna</a:t>
             </a:r>
           </a:p>
           <a:p xmlns:a="http://schemas.openxmlformats.org/drawingml/2006/main">
@@ -7496,7 +7496,7 @@
                 <a:ea typeface="Calibri"/>
                 <a:cs typeface="Calibri"/>
               </a:rPr>
-              <a:t>4. Log JSON dan penjelasan budget</a:t>
+              <a:t>Minggu 7 dan 14; tanpa nilai Lab 10</a:t>
             </a:r>
             <a:endParaRPr sz="1700"/>
           </a:p>
@@ -7754,7 +7754,7 @@
           <p:nvPr/>
         </p:nvPicPr>
         <p:blipFill>
-          <a:blip xmlns:r="http://schemas.openxmlformats.org/officeDocument/2006/relationships" xmlns:a="http://schemas.openxmlformats.org/drawingml/2006/main" r:embed="Rb64af87e4c7846af"/>
+          <a:blip xmlns:r="http://schemas.openxmlformats.org/officeDocument/2006/relationships" xmlns:a="http://schemas.openxmlformats.org/drawingml/2006/main" r:embed="R0e9dcc0ff9c645ed"/>
           <a:stretch xmlns:a="http://schemas.openxmlformats.org/drawingml/2006/main">
             <a:fillRect l="0" t="0" r="0" b="0"/>
           </a:stretch>
@@ -7778,7 +7778,7 @@
           <p:nvPr/>
         </p:nvPicPr>
         <p:blipFill>
-          <a:blip xmlns:r="http://schemas.openxmlformats.org/officeDocument/2006/relationships" xmlns:a="http://schemas.openxmlformats.org/drawingml/2006/main" r:embed="R07d51711e2f5477f"/>
+          <a:blip xmlns:r="http://schemas.openxmlformats.org/officeDocument/2006/relationships" xmlns:a="http://schemas.openxmlformats.org/drawingml/2006/main" r:embed="R2a3c3e0c9d3245a6"/>
           <a:stretch xmlns:a="http://schemas.openxmlformats.org/drawingml/2006/main">
             <a:fillRect l="0" t="0" r="0" b="0"/>
           </a:stretch>
@@ -8683,7 +8683,7 @@
           <p:nvPr/>
         </p:nvPicPr>
         <p:blipFill>
-          <a:blip xmlns:r="http://schemas.openxmlformats.org/officeDocument/2006/relationships" xmlns:a="http://schemas.openxmlformats.org/drawingml/2006/main" r:embed="Rdadf905bb6834a1c"/>
+          <a:blip xmlns:r="http://schemas.openxmlformats.org/officeDocument/2006/relationships" xmlns:a="http://schemas.openxmlformats.org/drawingml/2006/main" r:embed="R693366f6c68b4ef9"/>
           <a:stretch xmlns:a="http://schemas.openxmlformats.org/drawingml/2006/main">
             <a:fillRect l="0" t="0" r="0" b="0"/>
           </a:stretch>
@@ -8707,7 +8707,7 @@
           <p:nvPr/>
         </p:nvPicPr>
         <p:blipFill>
-          <a:blip xmlns:r="http://schemas.openxmlformats.org/officeDocument/2006/relationships" xmlns:a="http://schemas.openxmlformats.org/drawingml/2006/main" r:embed="R6eb390e7a47744ef"/>
+          <a:blip xmlns:r="http://schemas.openxmlformats.org/officeDocument/2006/relationships" xmlns:a="http://schemas.openxmlformats.org/drawingml/2006/main" r:embed="Rc7bbffc24a7348be"/>
           <a:stretch xmlns:a="http://schemas.openxmlformats.org/drawingml/2006/main">
             <a:fillRect l="0" t="0" r="0" b="0"/>
           </a:stretch>
@@ -9611,7 +9611,7 @@
           <p:nvPr/>
         </p:nvPicPr>
         <p:blipFill>
-          <a:blip xmlns:r="http://schemas.openxmlformats.org/officeDocument/2006/relationships" xmlns:a="http://schemas.openxmlformats.org/drawingml/2006/main" r:embed="Ra293e282825b4037"/>
+          <a:blip xmlns:r="http://schemas.openxmlformats.org/officeDocument/2006/relationships" xmlns:a="http://schemas.openxmlformats.org/drawingml/2006/main" r:embed="R9cccd0a95df44476"/>
           <a:stretch xmlns:a="http://schemas.openxmlformats.org/drawingml/2006/main">
             <a:fillRect l="0" t="0" r="0" b="0"/>
           </a:stretch>
@@ -9635,7 +9635,7 @@
           <p:nvPr/>
         </p:nvPicPr>
         <p:blipFill>
-          <a:blip xmlns:r="http://schemas.openxmlformats.org/officeDocument/2006/relationships" xmlns:a="http://schemas.openxmlformats.org/drawingml/2006/main" r:embed="Raa2c68380a384c8c"/>
+          <a:blip xmlns:r="http://schemas.openxmlformats.org/officeDocument/2006/relationships" xmlns:a="http://schemas.openxmlformats.org/drawingml/2006/main" r:embed="R995ed0db673e4cfa"/>
           <a:stretch xmlns:a="http://schemas.openxmlformats.org/drawingml/2006/main">
             <a:fillRect l="0" t="0" r="0" b="0"/>
           </a:stretch>
@@ -9871,7 +9871,7 @@
           <p:nvPr/>
         </p:nvPicPr>
         <p:blipFill>
-          <a:blip xmlns:r="http://schemas.openxmlformats.org/officeDocument/2006/relationships" xmlns:a="http://schemas.openxmlformats.org/drawingml/2006/main" r:embed="R90fd7590ee4d4ab6"/>
+          <a:blip xmlns:r="http://schemas.openxmlformats.org/officeDocument/2006/relationships" xmlns:a="http://schemas.openxmlformats.org/drawingml/2006/main" r:embed="Rf81acab152b54ff6"/>
           <a:stretch xmlns:a="http://schemas.openxmlformats.org/drawingml/2006/main">
             <a:fillRect l="0" t="0" r="0" b="0"/>
           </a:stretch>
@@ -9948,7 +9948,7 @@
           <p:nvPr/>
         </p:nvPicPr>
         <p:blipFill>
-          <a:blip xmlns:r="http://schemas.openxmlformats.org/officeDocument/2006/relationships" xmlns:a="http://schemas.openxmlformats.org/drawingml/2006/main" r:embed="R3b129a2cfa2e4ef1"/>
+          <a:blip xmlns:r="http://schemas.openxmlformats.org/officeDocument/2006/relationships" xmlns:a="http://schemas.openxmlformats.org/drawingml/2006/main" r:embed="R059d22f32cd34f7a"/>
           <a:stretch xmlns:a="http://schemas.openxmlformats.org/drawingml/2006/main">
             <a:fillRect l="0" t="0" r="0" b="0"/>
           </a:stretch>
@@ -10025,7 +10025,7 @@
           <p:nvPr/>
         </p:nvPicPr>
         <p:blipFill>
-          <a:blip xmlns:r="http://schemas.openxmlformats.org/officeDocument/2006/relationships" xmlns:a="http://schemas.openxmlformats.org/drawingml/2006/main" r:embed="R52170f8dec824fdf"/>
+          <a:blip xmlns:r="http://schemas.openxmlformats.org/officeDocument/2006/relationships" xmlns:a="http://schemas.openxmlformats.org/drawingml/2006/main" r:embed="R3e3b959150b54db5"/>
           <a:stretch xmlns:a="http://schemas.openxmlformats.org/drawingml/2006/main">
             <a:fillRect l="0" t="0" r="0" b="0"/>
           </a:stretch>
@@ -10102,7 +10102,7 @@
           <p:nvPr/>
         </p:nvPicPr>
         <p:blipFill>
-          <a:blip xmlns:r="http://schemas.openxmlformats.org/officeDocument/2006/relationships" xmlns:a="http://schemas.openxmlformats.org/drawingml/2006/main" r:embed="R6643ec78a04e46be"/>
+          <a:blip xmlns:r="http://schemas.openxmlformats.org/officeDocument/2006/relationships" xmlns:a="http://schemas.openxmlformats.org/drawingml/2006/main" r:embed="R982dd6058d3140c3"/>
           <a:stretch xmlns:a="http://schemas.openxmlformats.org/drawingml/2006/main">
             <a:fillRect l="0" t="0" r="0" b="0"/>
           </a:stretch>
@@ -10179,7 +10179,7 @@
           <p:nvPr/>
         </p:nvPicPr>
         <p:blipFill>
-          <a:blip xmlns:r="http://schemas.openxmlformats.org/officeDocument/2006/relationships" xmlns:a="http://schemas.openxmlformats.org/drawingml/2006/main" r:embed="R5a68299579754b18"/>
+          <a:blip xmlns:r="http://schemas.openxmlformats.org/officeDocument/2006/relationships" xmlns:a="http://schemas.openxmlformats.org/drawingml/2006/main" r:embed="R55415ba6ca674de4"/>
           <a:stretch xmlns:a="http://schemas.openxmlformats.org/drawingml/2006/main">
             <a:fillRect l="0" t="0" r="0" b="0"/>
           </a:stretch>
@@ -10256,7 +10256,7 @@
           <p:nvPr/>
         </p:nvPicPr>
         <p:blipFill>
-          <a:blip xmlns:r="http://schemas.openxmlformats.org/officeDocument/2006/relationships" xmlns:a="http://schemas.openxmlformats.org/drawingml/2006/main" r:embed="Rc87fb62c947d418a"/>
+          <a:blip xmlns:r="http://schemas.openxmlformats.org/officeDocument/2006/relationships" xmlns:a="http://schemas.openxmlformats.org/drawingml/2006/main" r:embed="R6cd3d550f6924690"/>
           <a:stretch xmlns:a="http://schemas.openxmlformats.org/drawingml/2006/main">
             <a:fillRect l="0" t="0" r="0" b="0"/>
           </a:stretch>
@@ -10333,7 +10333,7 @@
           <p:nvPr/>
         </p:nvPicPr>
         <p:blipFill>
-          <a:blip xmlns:r="http://schemas.openxmlformats.org/officeDocument/2006/relationships" xmlns:a="http://schemas.openxmlformats.org/drawingml/2006/main" r:embed="Rfc3423cdf5d64877"/>
+          <a:blip xmlns:r="http://schemas.openxmlformats.org/officeDocument/2006/relationships" xmlns:a="http://schemas.openxmlformats.org/drawingml/2006/main" r:embed="Rfe688806424d47c4"/>
           <a:stretch xmlns:a="http://schemas.openxmlformats.org/drawingml/2006/main">
             <a:fillRect l="0" t="0" r="0" b="0"/>
           </a:stretch>
@@ -10623,7 +10623,7 @@
           <p:nvPr/>
         </p:nvPicPr>
         <p:blipFill>
-          <a:blip xmlns:r="http://schemas.openxmlformats.org/officeDocument/2006/relationships" xmlns:a="http://schemas.openxmlformats.org/drawingml/2006/main" r:embed="R249765bbf02f4c5b"/>
+          <a:blip xmlns:r="http://schemas.openxmlformats.org/officeDocument/2006/relationships" xmlns:a="http://schemas.openxmlformats.org/drawingml/2006/main" r:embed="R02f68bbc8fdf454b"/>
           <a:stretch xmlns:a="http://schemas.openxmlformats.org/drawingml/2006/main">
             <a:fillRect l="0" t="0" r="0" b="0"/>
           </a:stretch>
@@ -10806,7 +10806,7 @@
           <p:nvPr/>
         </p:nvPicPr>
         <p:blipFill>
-          <a:blip xmlns:r="http://schemas.openxmlformats.org/officeDocument/2006/relationships" xmlns:a="http://schemas.openxmlformats.org/drawingml/2006/main" r:embed="R34a2c891ec0746ad"/>
+          <a:blip xmlns:r="http://schemas.openxmlformats.org/officeDocument/2006/relationships" xmlns:a="http://schemas.openxmlformats.org/drawingml/2006/main" r:embed="R1613b812509b4ed4"/>
           <a:stretch xmlns:a="http://schemas.openxmlformats.org/drawingml/2006/main">
             <a:fillRect l="0" t="0" r="0" b="0"/>
           </a:stretch>
@@ -10830,7 +10830,7 @@
           <p:nvPr/>
         </p:nvPicPr>
         <p:blipFill>
-          <a:blip xmlns:r="http://schemas.openxmlformats.org/officeDocument/2006/relationships" xmlns:a="http://schemas.openxmlformats.org/drawingml/2006/main" r:embed="R2ccd122851d44772"/>
+          <a:blip xmlns:r="http://schemas.openxmlformats.org/officeDocument/2006/relationships" xmlns:a="http://schemas.openxmlformats.org/drawingml/2006/main" r:embed="R63bc984a80b84be0"/>
           <a:stretch xmlns:a="http://schemas.openxmlformats.org/drawingml/2006/main">
             <a:fillRect l="0" t="0" r="0" b="0"/>
           </a:stretch>
@@ -11066,7 +11066,7 @@
           <p:nvPr/>
         </p:nvPicPr>
         <p:blipFill>
-          <a:blip xmlns:r="http://schemas.openxmlformats.org/officeDocument/2006/relationships" xmlns:a="http://schemas.openxmlformats.org/drawingml/2006/main" r:embed="R9e585eaec41c4c43"/>
+          <a:blip xmlns:r="http://schemas.openxmlformats.org/officeDocument/2006/relationships" xmlns:a="http://schemas.openxmlformats.org/drawingml/2006/main" r:embed="R67c73ffdd2fa4a01"/>
           <a:stretch xmlns:a="http://schemas.openxmlformats.org/drawingml/2006/main">
             <a:fillRect l="0" t="0" r="0" b="0"/>
           </a:stretch>
@@ -11143,7 +11143,7 @@
           <p:nvPr/>
         </p:nvPicPr>
         <p:blipFill>
-          <a:blip xmlns:r="http://schemas.openxmlformats.org/officeDocument/2006/relationships" xmlns:a="http://schemas.openxmlformats.org/drawingml/2006/main" r:embed="R4984f687563d4268"/>
+          <a:blip xmlns:r="http://schemas.openxmlformats.org/officeDocument/2006/relationships" xmlns:a="http://schemas.openxmlformats.org/drawingml/2006/main" r:embed="Rd3797b3c75b9470f"/>
           <a:stretch xmlns:a="http://schemas.openxmlformats.org/drawingml/2006/main">
             <a:fillRect l="0" t="0" r="0" b="0"/>
           </a:stretch>
@@ -11220,7 +11220,7 @@
           <p:nvPr/>
         </p:nvPicPr>
         <p:blipFill>
-          <a:blip xmlns:r="http://schemas.openxmlformats.org/officeDocument/2006/relationships" xmlns:a="http://schemas.openxmlformats.org/drawingml/2006/main" r:embed="R573192de79a64d4e"/>
+          <a:blip xmlns:r="http://schemas.openxmlformats.org/officeDocument/2006/relationships" xmlns:a="http://schemas.openxmlformats.org/drawingml/2006/main" r:embed="R22997519e9964b50"/>
           <a:stretch xmlns:a="http://schemas.openxmlformats.org/drawingml/2006/main">
             <a:fillRect l="0" t="0" r="0" b="0"/>
           </a:stretch>
@@ -11297,7 +11297,7 @@
           <p:nvPr/>
         </p:nvPicPr>
         <p:blipFill>
-          <a:blip xmlns:r="http://schemas.openxmlformats.org/officeDocument/2006/relationships" xmlns:a="http://schemas.openxmlformats.org/drawingml/2006/main" r:embed="R4a0ab6552b424887"/>
+          <a:blip xmlns:r="http://schemas.openxmlformats.org/officeDocument/2006/relationships" xmlns:a="http://schemas.openxmlformats.org/drawingml/2006/main" r:embed="Ree20e61ce311444e"/>
           <a:stretch xmlns:a="http://schemas.openxmlformats.org/drawingml/2006/main">
             <a:fillRect l="0" t="0" r="0" b="0"/>
           </a:stretch>
@@ -11374,7 +11374,7 @@
           <p:nvPr/>
         </p:nvPicPr>
         <p:blipFill>
-          <a:blip xmlns:r="http://schemas.openxmlformats.org/officeDocument/2006/relationships" xmlns:a="http://schemas.openxmlformats.org/drawingml/2006/main" r:embed="R9f7629623ad94462"/>
+          <a:blip xmlns:r="http://schemas.openxmlformats.org/officeDocument/2006/relationships" xmlns:a="http://schemas.openxmlformats.org/drawingml/2006/main" r:embed="Rfa6a1d0c5dbe4822"/>
           <a:stretch xmlns:a="http://schemas.openxmlformats.org/drawingml/2006/main">
             <a:fillRect l="0" t="0" r="0" b="0"/>
           </a:stretch>
@@ -11451,7 +11451,7 @@
           <p:nvPr/>
         </p:nvPicPr>
         <p:blipFill>
-          <a:blip xmlns:r="http://schemas.openxmlformats.org/officeDocument/2006/relationships" xmlns:a="http://schemas.openxmlformats.org/drawingml/2006/main" r:embed="Rc5606a45a69c4195"/>
+          <a:blip xmlns:r="http://schemas.openxmlformats.org/officeDocument/2006/relationships" xmlns:a="http://schemas.openxmlformats.org/drawingml/2006/main" r:embed="R22afb1f8a4604feb"/>
           <a:stretch xmlns:a="http://schemas.openxmlformats.org/drawingml/2006/main">
             <a:fillRect l="0" t="0" r="0" b="0"/>
           </a:stretch>
@@ -11528,7 +11528,7 @@
           <p:nvPr/>
         </p:nvPicPr>
         <p:blipFill>
-          <a:blip xmlns:r="http://schemas.openxmlformats.org/officeDocument/2006/relationships" xmlns:a="http://schemas.openxmlformats.org/drawingml/2006/main" r:embed="R481f3051ddc443e3"/>
+          <a:blip xmlns:r="http://schemas.openxmlformats.org/officeDocument/2006/relationships" xmlns:a="http://schemas.openxmlformats.org/drawingml/2006/main" r:embed="Rd5c632f337b4442b"/>
           <a:stretch xmlns:a="http://schemas.openxmlformats.org/drawingml/2006/main">
             <a:fillRect l="0" t="0" r="0" b="0"/>
           </a:stretch>
@@ -11818,7 +11818,7 @@
           <p:nvPr/>
         </p:nvPicPr>
         <p:blipFill>
-          <a:blip xmlns:r="http://schemas.openxmlformats.org/officeDocument/2006/relationships" xmlns:a="http://schemas.openxmlformats.org/drawingml/2006/main" r:embed="Rd04e1e850dc447ce"/>
+          <a:blip xmlns:r="http://schemas.openxmlformats.org/officeDocument/2006/relationships" xmlns:a="http://schemas.openxmlformats.org/drawingml/2006/main" r:embed="R635a8ab304ec4363"/>
           <a:stretch xmlns:a="http://schemas.openxmlformats.org/drawingml/2006/main">
             <a:fillRect l="0" t="0" r="0" b="0"/>
           </a:stretch>
@@ -12001,7 +12001,7 @@
           <p:nvPr/>
         </p:nvPicPr>
         <p:blipFill>
-          <a:blip xmlns:r="http://schemas.openxmlformats.org/officeDocument/2006/relationships" xmlns:a="http://schemas.openxmlformats.org/drawingml/2006/main" r:embed="R36381ab52e854370"/>
+          <a:blip xmlns:r="http://schemas.openxmlformats.org/officeDocument/2006/relationships" xmlns:a="http://schemas.openxmlformats.org/drawingml/2006/main" r:embed="Rb4054540f1f84282"/>
           <a:stretch xmlns:a="http://schemas.openxmlformats.org/drawingml/2006/main">
             <a:fillRect l="0" t="0" r="0" b="0"/>
           </a:stretch>
@@ -12025,7 +12025,7 @@
           <p:nvPr/>
         </p:nvPicPr>
         <p:blipFill>
-          <a:blip xmlns:r="http://schemas.openxmlformats.org/officeDocument/2006/relationships" xmlns:a="http://schemas.openxmlformats.org/drawingml/2006/main" r:embed="R7d5731de99d747a4"/>
+          <a:blip xmlns:r="http://schemas.openxmlformats.org/officeDocument/2006/relationships" xmlns:a="http://schemas.openxmlformats.org/drawingml/2006/main" r:embed="Rbdf46a2967a64f01"/>
           <a:stretch xmlns:a="http://schemas.openxmlformats.org/drawingml/2006/main">
             <a:fillRect l="0" t="0" r="0" b="0"/>
           </a:stretch>
@@ -12931,7 +12931,7 @@
           <p:nvPr/>
         </p:nvPicPr>
         <p:blipFill>
-          <a:blip xmlns:r="http://schemas.openxmlformats.org/officeDocument/2006/relationships" xmlns:a="http://schemas.openxmlformats.org/drawingml/2006/main" r:embed="R4319367f42dc4db6"/>
+          <a:blip xmlns:r="http://schemas.openxmlformats.org/officeDocument/2006/relationships" xmlns:a="http://schemas.openxmlformats.org/drawingml/2006/main" r:embed="R4bcd9496ab0042d1"/>
           <a:stretch xmlns:a="http://schemas.openxmlformats.org/drawingml/2006/main">
             <a:fillRect l="0" t="0" r="0" b="0"/>
           </a:stretch>
@@ -12955,7 +12955,7 @@
           <p:nvPr/>
         </p:nvPicPr>
         <p:blipFill>
-          <a:blip xmlns:r="http://schemas.openxmlformats.org/officeDocument/2006/relationships" xmlns:a="http://schemas.openxmlformats.org/drawingml/2006/main" r:embed="Re80e1cdd81b6465b"/>
+          <a:blip xmlns:r="http://schemas.openxmlformats.org/officeDocument/2006/relationships" xmlns:a="http://schemas.openxmlformats.org/drawingml/2006/main" r:embed="R6ec9e7f19b374f9b"/>
           <a:stretch xmlns:a="http://schemas.openxmlformats.org/drawingml/2006/main">
             <a:fillRect l="0" t="0" r="0" b="0"/>
           </a:stretch>
@@ -13191,7 +13191,7 @@
           <p:nvPr/>
         </p:nvPicPr>
         <p:blipFill>
-          <a:blip xmlns:r="http://schemas.openxmlformats.org/officeDocument/2006/relationships" xmlns:a="http://schemas.openxmlformats.org/drawingml/2006/main" r:embed="R37a10a6de71d4b97"/>
+          <a:blip xmlns:r="http://schemas.openxmlformats.org/officeDocument/2006/relationships" xmlns:a="http://schemas.openxmlformats.org/drawingml/2006/main" r:embed="R4f02e08312e445c1"/>
           <a:stretch xmlns:a="http://schemas.openxmlformats.org/drawingml/2006/main">
             <a:fillRect l="0" t="0" r="0" b="0"/>
           </a:stretch>
@@ -13268,7 +13268,7 @@
           <p:nvPr/>
         </p:nvPicPr>
         <p:blipFill>
-          <a:blip xmlns:r="http://schemas.openxmlformats.org/officeDocument/2006/relationships" xmlns:a="http://schemas.openxmlformats.org/drawingml/2006/main" r:embed="R45f9188d9cef4fdb"/>
+          <a:blip xmlns:r="http://schemas.openxmlformats.org/officeDocument/2006/relationships" xmlns:a="http://schemas.openxmlformats.org/drawingml/2006/main" r:embed="R201811c2d3ef41ac"/>
           <a:stretch xmlns:a="http://schemas.openxmlformats.org/drawingml/2006/main">
             <a:fillRect l="0" t="0" r="0" b="0"/>
           </a:stretch>
@@ -13345,7 +13345,7 @@
           <p:nvPr/>
         </p:nvPicPr>
         <p:blipFill>
-          <a:blip xmlns:r="http://schemas.openxmlformats.org/officeDocument/2006/relationships" xmlns:a="http://schemas.openxmlformats.org/drawingml/2006/main" r:embed="R85f1c69735234cc5"/>
+          <a:blip xmlns:r="http://schemas.openxmlformats.org/officeDocument/2006/relationships" xmlns:a="http://schemas.openxmlformats.org/drawingml/2006/main" r:embed="R5cdb6813e5f54e12"/>
           <a:stretch xmlns:a="http://schemas.openxmlformats.org/drawingml/2006/main">
             <a:fillRect l="0" t="0" r="0" b="0"/>
           </a:stretch>
@@ -13422,7 +13422,7 @@
           <p:nvPr/>
         </p:nvPicPr>
         <p:blipFill>
-          <a:blip xmlns:r="http://schemas.openxmlformats.org/officeDocument/2006/relationships" xmlns:a="http://schemas.openxmlformats.org/drawingml/2006/main" r:embed="R520693d00958422d"/>
+          <a:blip xmlns:r="http://schemas.openxmlformats.org/officeDocument/2006/relationships" xmlns:a="http://schemas.openxmlformats.org/drawingml/2006/main" r:embed="Rc5823297ec894904"/>
           <a:stretch xmlns:a="http://schemas.openxmlformats.org/drawingml/2006/main">
             <a:fillRect l="0" t="0" r="0" b="0"/>
           </a:stretch>
@@ -13499,7 +13499,7 @@
           <p:nvPr/>
         </p:nvPicPr>
         <p:blipFill>
-          <a:blip xmlns:r="http://schemas.openxmlformats.org/officeDocument/2006/relationships" xmlns:a="http://schemas.openxmlformats.org/drawingml/2006/main" r:embed="Ra7847d0c63084abb"/>
+          <a:blip xmlns:r="http://schemas.openxmlformats.org/officeDocument/2006/relationships" xmlns:a="http://schemas.openxmlformats.org/drawingml/2006/main" r:embed="R645e6e78253840e8"/>
           <a:stretch xmlns:a="http://schemas.openxmlformats.org/drawingml/2006/main">
             <a:fillRect l="0" t="0" r="0" b="0"/>
           </a:stretch>
@@ -13576,7 +13576,7 @@
           <p:nvPr/>
         </p:nvPicPr>
         <p:blipFill>
-          <a:blip xmlns:r="http://schemas.openxmlformats.org/officeDocument/2006/relationships" xmlns:a="http://schemas.openxmlformats.org/drawingml/2006/main" r:embed="Re6cbf72364ea47e8"/>
+          <a:blip xmlns:r="http://schemas.openxmlformats.org/officeDocument/2006/relationships" xmlns:a="http://schemas.openxmlformats.org/drawingml/2006/main" r:embed="R7a69adbb90214b9d"/>
           <a:stretch xmlns:a="http://schemas.openxmlformats.org/drawingml/2006/main">
             <a:fillRect l="0" t="0" r="0" b="0"/>
           </a:stretch>
@@ -13653,7 +13653,7 @@
           <p:nvPr/>
         </p:nvPicPr>
         <p:blipFill>
-          <a:blip xmlns:r="http://schemas.openxmlformats.org/officeDocument/2006/relationships" xmlns:a="http://schemas.openxmlformats.org/drawingml/2006/main" r:embed="R631227964b0e4082"/>
+          <a:blip xmlns:r="http://schemas.openxmlformats.org/officeDocument/2006/relationships" xmlns:a="http://schemas.openxmlformats.org/drawingml/2006/main" r:embed="R6f1158a341844565"/>
           <a:stretch xmlns:a="http://schemas.openxmlformats.org/drawingml/2006/main">
             <a:fillRect l="0" t="0" r="0" b="0"/>
           </a:stretch>
@@ -13943,7 +13943,7 @@
           <p:nvPr/>
         </p:nvPicPr>
         <p:blipFill>
-          <a:blip xmlns:r="http://schemas.openxmlformats.org/officeDocument/2006/relationships" xmlns:a="http://schemas.openxmlformats.org/drawingml/2006/main" r:embed="R483718084f884842"/>
+          <a:blip xmlns:r="http://schemas.openxmlformats.org/officeDocument/2006/relationships" xmlns:a="http://schemas.openxmlformats.org/drawingml/2006/main" r:embed="R60ff8757820340fa"/>
           <a:stretch xmlns:a="http://schemas.openxmlformats.org/drawingml/2006/main">
             <a:fillRect l="0" t="0" r="0" b="0"/>
           </a:stretch>
@@ -14119,7 +14119,7 @@
           <p:nvPr/>
         </p:nvPicPr>
         <p:blipFill>
-          <a:blip xmlns:r="http://schemas.openxmlformats.org/officeDocument/2006/relationships" xmlns:a="http://schemas.openxmlformats.org/drawingml/2006/main" r:embed="Re061981f59784777"/>
+          <a:blip xmlns:r="http://schemas.openxmlformats.org/officeDocument/2006/relationships" xmlns:a="http://schemas.openxmlformats.org/drawingml/2006/main" r:embed="R043303fa26af4359"/>
           <a:stretch xmlns:a="http://schemas.openxmlformats.org/drawingml/2006/main">
             <a:fillRect l="0" t="0" r="0" b="0"/>
           </a:stretch>
@@ -14143,7 +14143,7 @@
           <p:nvPr/>
         </p:nvPicPr>
         <p:blipFill>
-          <a:blip xmlns:r="http://schemas.openxmlformats.org/officeDocument/2006/relationships" xmlns:a="http://schemas.openxmlformats.org/drawingml/2006/main" r:embed="Re3e6cb4869a345bf"/>
+          <a:blip xmlns:r="http://schemas.openxmlformats.org/officeDocument/2006/relationships" xmlns:a="http://schemas.openxmlformats.org/drawingml/2006/main" r:embed="R211141b2bac340fe"/>
           <a:stretch xmlns:a="http://schemas.openxmlformats.org/drawingml/2006/main">
             <a:fillRect l="0" t="0" r="0" b="0"/>
           </a:stretch>
@@ -14379,7 +14379,7 @@
           <p:nvPr/>
         </p:nvPicPr>
         <p:blipFill>
-          <a:blip xmlns:r="http://schemas.openxmlformats.org/officeDocument/2006/relationships" xmlns:a="http://schemas.openxmlformats.org/drawingml/2006/main" r:embed="Rf5c4667a53214dd1"/>
+          <a:blip xmlns:r="http://schemas.openxmlformats.org/officeDocument/2006/relationships" xmlns:a="http://schemas.openxmlformats.org/drawingml/2006/main" r:embed="R075095e9ddac4543"/>
           <a:stretch xmlns:a="http://schemas.openxmlformats.org/drawingml/2006/main">
             <a:fillRect l="0" t="0" r="0" b="0"/>
           </a:stretch>
@@ -14456,7 +14456,7 @@
           <p:nvPr/>
         </p:nvPicPr>
         <p:blipFill>
-          <a:blip xmlns:r="http://schemas.openxmlformats.org/officeDocument/2006/relationships" xmlns:a="http://schemas.openxmlformats.org/drawingml/2006/main" r:embed="R74b3279763de41bb"/>
+          <a:blip xmlns:r="http://schemas.openxmlformats.org/officeDocument/2006/relationships" xmlns:a="http://schemas.openxmlformats.org/drawingml/2006/main" r:embed="R539f1ba9c7014784"/>
           <a:stretch xmlns:a="http://schemas.openxmlformats.org/drawingml/2006/main">
             <a:fillRect l="0" t="0" r="0" b="0"/>
           </a:stretch>
@@ -14533,7 +14533,7 @@
           <p:nvPr/>
         </p:nvPicPr>
         <p:blipFill>
-          <a:blip xmlns:r="http://schemas.openxmlformats.org/officeDocument/2006/relationships" xmlns:a="http://schemas.openxmlformats.org/drawingml/2006/main" r:embed="Rdfa5f1c744884e7b"/>
+          <a:blip xmlns:r="http://schemas.openxmlformats.org/officeDocument/2006/relationships" xmlns:a="http://schemas.openxmlformats.org/drawingml/2006/main" r:embed="R4d654b3e7e5a46b3"/>
           <a:stretch xmlns:a="http://schemas.openxmlformats.org/drawingml/2006/main">
             <a:fillRect l="0" t="0" r="0" b="0"/>
           </a:stretch>
@@ -14610,7 +14610,7 @@
           <p:nvPr/>
         </p:nvPicPr>
         <p:blipFill>
-          <a:blip xmlns:r="http://schemas.openxmlformats.org/officeDocument/2006/relationships" xmlns:a="http://schemas.openxmlformats.org/drawingml/2006/main" r:embed="Rb7734ffee4f84a0f"/>
+          <a:blip xmlns:r="http://schemas.openxmlformats.org/officeDocument/2006/relationships" xmlns:a="http://schemas.openxmlformats.org/drawingml/2006/main" r:embed="R6dba8dbe97154cd3"/>
           <a:stretch xmlns:a="http://schemas.openxmlformats.org/drawingml/2006/main">
             <a:fillRect l="0" t="0" r="0" b="0"/>
           </a:stretch>
@@ -14687,7 +14687,7 @@
           <p:nvPr/>
         </p:nvPicPr>
         <p:blipFill>
-          <a:blip xmlns:r="http://schemas.openxmlformats.org/officeDocument/2006/relationships" xmlns:a="http://schemas.openxmlformats.org/drawingml/2006/main" r:embed="Re422b80f798c41ca"/>
+          <a:blip xmlns:r="http://schemas.openxmlformats.org/officeDocument/2006/relationships" xmlns:a="http://schemas.openxmlformats.org/drawingml/2006/main" r:embed="R2f09e5199da24e49"/>
           <a:stretch xmlns:a="http://schemas.openxmlformats.org/drawingml/2006/main">
             <a:fillRect l="0" t="0" r="0" b="0"/>
           </a:stretch>
@@ -14764,7 +14764,7 @@
           <p:nvPr/>
         </p:nvPicPr>
         <p:blipFill>
-          <a:blip xmlns:r="http://schemas.openxmlformats.org/officeDocument/2006/relationships" xmlns:a="http://schemas.openxmlformats.org/drawingml/2006/main" r:embed="Re27a5af01b8b444e"/>
+          <a:blip xmlns:r="http://schemas.openxmlformats.org/officeDocument/2006/relationships" xmlns:a="http://schemas.openxmlformats.org/drawingml/2006/main" r:embed="Ra0385f04bc3d48c5"/>
           <a:stretch xmlns:a="http://schemas.openxmlformats.org/drawingml/2006/main">
             <a:fillRect l="0" t="0" r="0" b="0"/>
           </a:stretch>
@@ -14841,7 +14841,7 @@
           <p:nvPr/>
         </p:nvPicPr>
         <p:blipFill>
-          <a:blip xmlns:r="http://schemas.openxmlformats.org/officeDocument/2006/relationships" xmlns:a="http://schemas.openxmlformats.org/drawingml/2006/main" r:embed="R4c3457ae98a745a4"/>
+          <a:blip xmlns:r="http://schemas.openxmlformats.org/officeDocument/2006/relationships" xmlns:a="http://schemas.openxmlformats.org/drawingml/2006/main" r:embed="R61a25f26ce6146d6"/>
           <a:stretch xmlns:a="http://schemas.openxmlformats.org/drawingml/2006/main">
             <a:fillRect l="0" t="0" r="0" b="0"/>
           </a:stretch>
@@ -15131,7 +15131,7 @@
           <p:nvPr/>
         </p:nvPicPr>
         <p:blipFill>
-          <a:blip xmlns:r="http://schemas.openxmlformats.org/officeDocument/2006/relationships" xmlns:a="http://schemas.openxmlformats.org/drawingml/2006/main" r:embed="R1ef96f31d26447bc"/>
+          <a:blip xmlns:r="http://schemas.openxmlformats.org/officeDocument/2006/relationships" xmlns:a="http://schemas.openxmlformats.org/drawingml/2006/main" r:embed="R81f229507d8d44c3"/>
           <a:stretch xmlns:a="http://schemas.openxmlformats.org/drawingml/2006/main">
             <a:fillRect l="0" t="0" r="0" b="0"/>
           </a:stretch>

--- a/slides/LAB10_Monitoring_Status_Bukti_Live.pptx
+++ b/slides/LAB10_Monitoring_Status_Bukti_Live.pptx
@@ -5695,7 +5695,7 @@
                 <a:ea typeface="Calibri"/>
                 <a:cs typeface="Calibri"/>
               </a:rPr>
-              <a:t>6 | Alert opsional, recovery, dan Git</a:t>
+              <a:t>6 | Perluasan alert dan Git opsional</a:t>
             </a:r>
             <a:endParaRPr sz="2200"/>
           </a:p>
@@ -8200,12 +8200,12 @@
                 <a:ea typeface="Consolas"/>
                 <a:cs typeface="Consolas"/>
               </a:rPr>
-              <a:t># Lab 06: docker compose up --build -d
+              <a:t># Lab 06: .env siap sesuai modul Lab 06
+# docker compose up -d --build --wait
 # Lab 08: npm run dev
 # Lab 09: .\.venv\Scripts\python app.py
 Get-Content .\targets.local.json
-Invoke-WebRequest `
-  http://127.0.0.1:3000/api/health</a:t>
+Invoke-RestMethod http://127.0.0.1:18006/health</a:t>
             </a:r>
             <a:endParaRPr sz="1500">
               <a:solidFill>
@@ -8498,11 +8498,11 @@
                 <a:cs typeface="Aptos"/>
               </a:rPr>
               <a:t>Next.js: port 3000 /api/health.
-API Compose: port 8000 /health.
+API Compose: port 18006 /health.
 Gradio: halaman web port 7860.
 monitor.py membaca target JSON.
 URL tidak boleh berisi credential.
-Ketiga proses harus hidup saat uji UP.</a:t>
+Ketiga proses hidup untuk baseline UP.</a:t>
             </a:r>
             <a:endParaRPr sz="1600">
               <a:solidFill>
@@ -12447,7 +12447,7 @@
                 <a:ea typeface="Consolas"/>
                 <a:cs typeface="Consolas"/>
               </a:rPr>
-              <a:t>python monitor.py --reset --count 3 --interval 1
+              <a:t># Lanjutkan baseline lima check, tanpa reset.
 # Hentikan npm run dev Lab 08 (Ctrl+C).
 python monitor.py --count 2 --interval 1
 python report.py
@@ -12745,12 +12745,12 @@
                 <a:ea typeface="Aptos"/>
                 <a:cs typeface="Aptos"/>
               </a:rPr>
-              <a:t>Next.js memberi DOWN setelah gagal probe.
-Target lain tetap UP: isolasi dampak.
-2 kegagalan dari 5 → 60% jika total 5.
-Budget 99% untuk 5 cek = 0.05.
-Spent 2, sisa = -1.95 check.
-Nilai negatif = budget terlampaui.</a:t>
+              <a:t>Next terakhir DOWN, dua target tetap UP.
+Lima sehat + dua gagal: 5/7 = 71,43%.
+Budget 99% untuk 7 check = 0,07.
+Spent 2, sisa = -1,93 check.
+Tanpa reset, histori tetap dihitung.
+Sampel kelas belum menjadi SLO produksi.</a:t>
             </a:r>
             <a:endParaRPr sz="1600">
               <a:solidFill>
@@ -13092,7 +13092,7 @@
                 <a:ea typeface="Calibri"/>
                 <a:cs typeface="Calibri"/>
               </a:rPr>
-              <a:t>Simulasi insiden: Next.js dihentikan, API dan Gradio tetap hidup</a:t>
+              <a:t>Screenshot run sebelumnya memakai baseline 3 check, lalu 2 gagal. Modul terbaru memakai 5 check baseline.</a:t>
             </a:r>
             <a:endParaRPr sz="1200"/>
           </a:p>
@@ -14280,7 +14280,7 @@
                 <a:ea typeface="Calibri"/>
                 <a:cs typeface="Calibri"/>
               </a:rPr>
-              <a:t>Pemulihan simulasi insiden: Next.js UP, histori gagal tetap dihitung</a:t>
+              <a:t>Screenshot run sebelumnya: 3 sehat, 2 gagal, 1 pulih. Jumlah check modul terbaru berbeda.</a:t>
             </a:r>
             <a:endParaRPr sz="1200"/>
           </a:p>
